--- a/pitch/MANNMITRA.pptx
+++ b/pitch/MANNMITRA.pptx
@@ -15,6 +15,9 @@
     <p:sldId id="263" r:id="rId14"/>
     <p:sldId id="264" r:id="rId15"/>
     <p:sldId id="265" r:id="rId16"/>
+    <p:sldId id="266" r:id="rId17"/>
+    <p:sldId id="267" r:id="rId18"/>
+    <p:sldId id="268" r:id="rId19"/>
   </p:sldIdLst>
   <p:sldSz cx="12191695" cy="6858000" type="screen4x3"/>
   <p:notesSz cx="6858000" cy="9144000"/>
@@ -3321,7 +3324,7 @@
                 </a:solidFill>
                 <a:latin typeface="Calibri"/>
               </a:rPr>
-              <a:t>Tiered support:  AI → Peer → Counselor → Crisis   |   Anonymous · No signup · 24×7</a:t>
+              <a:t>AI → Peer → Counselor → Crisis   |   Anonymous · No signup · 24×7   |   EN / HI / MR / GU</a:t>
             </a:r>
           </a:p>
         </p:txBody>
@@ -3394,6 +3397,50 @@
             <a:avLst/>
           </a:prstGeom>
           <a:solidFill>
+            <a:srgbClr val="FFFFFF"/>
+          </a:solidFill>
+          <a:ln>
+            <a:noFill/>
+          </a:ln>
+          <a:effectLst/>
+        </p:spPr>
+        <p:style>
+          <a:lnRef idx="1">
+            <a:schemeClr val="accent1"/>
+          </a:lnRef>
+          <a:fillRef idx="3">
+            <a:schemeClr val="accent1"/>
+          </a:fillRef>
+          <a:effectRef idx="2">
+            <a:schemeClr val="accent1"/>
+          </a:effectRef>
+          <a:fontRef idx="minor">
+            <a:schemeClr val="lt1"/>
+          </a:fontRef>
+        </p:style>
+        <p:txBody>
+          <a:bodyPr rtlCol="0" anchor="ctr"/>
+          <a:lstStyle/>
+          <a:p>
+            <a:pPr algn="ctr"/>
+          </a:p>
+        </p:txBody>
+      </p:sp>
+      <p:sp>
+        <p:nvSpPr>
+          <p:cNvPr id="3" name="Rectangle 2"/>
+          <p:cNvSpPr/>
+          <p:nvPr/>
+        </p:nvSpPr>
+        <p:spPr>
+          <a:xfrm>
+            <a:off x="0" y="0"/>
+            <a:ext cx="12191695" cy="1051560"/>
+          </a:xfrm>
+          <a:prstGeom prst="rect">
+            <a:avLst/>
+          </a:prstGeom>
+          <a:solidFill>
             <a:srgbClr val="0F9B86"/>
           </a:solidFill>
           <a:ln>
@@ -3425,14 +3472,49 @@
       </p:sp>
       <p:sp>
         <p:nvSpPr>
-          <p:cNvPr id="3" name="TextBox 2"/>
+          <p:cNvPr id="4" name="TextBox 3"/>
           <p:cNvSpPr txBox="1"/>
           <p:nvPr/>
         </p:nvSpPr>
         <p:spPr>
           <a:xfrm>
-            <a:off x="731520" y="731520"/>
-            <a:ext cx="10698480" cy="731520"/>
+            <a:off x="457200" y="164592"/>
+            <a:ext cx="10972800" cy="731520"/>
+          </a:xfrm>
+          <a:prstGeom prst="rect">
+            <a:avLst/>
+          </a:prstGeom>
+          <a:noFill/>
+        </p:spPr>
+        <p:txBody>
+          <a:bodyPr wrap="square" anchor="ctr">
+            <a:spAutoFit/>
+          </a:bodyPr>
+          <a:lstStyle/>
+          <a:p>
+            <a:pPr algn="l"/>
+            <a:r>
+              <a:rPr sz="3000" b="1">
+                <a:solidFill>
+                  <a:srgbClr val="FFFFFF"/>
+                </a:solidFill>
+                <a:latin typeface="Calibri"/>
+              </a:rPr>
+              <a:t>Scalability &amp; Business</a:t>
+            </a:r>
+          </a:p>
+        </p:txBody>
+      </p:sp>
+      <p:sp>
+        <p:nvSpPr>
+          <p:cNvPr id="5" name="TextBox 4"/>
+          <p:cNvSpPr txBox="1"/>
+          <p:nvPr/>
+        </p:nvSpPr>
+        <p:spPr>
+          <a:xfrm>
+            <a:off x="457200" y="1143000"/>
+            <a:ext cx="10972800" cy="365760"/>
           </a:xfrm>
           <a:prstGeom prst="rect">
             <a:avLst/>
@@ -3447,27 +3529,27 @@
           <a:p>
             <a:pPr algn="l"/>
             <a:r>
-              <a:rPr sz="3400" b="1">
-                <a:solidFill>
-                  <a:srgbClr val="FFFFFF"/>
-                </a:solidFill>
-                <a:latin typeface="Calibri"/>
-              </a:rPr>
-              <a:t>The Ask</a:t>
-            </a:r>
-          </a:p>
-        </p:txBody>
-      </p:sp>
-      <p:sp>
-        <p:nvSpPr>
-          <p:cNvPr id="4" name="TextBox 3"/>
+              <a:rPr sz="1400" b="1">
+                <a:solidFill>
+                  <a:srgbClr val="5B6B6E"/>
+                </a:solidFill>
+                <a:latin typeface="Calibri"/>
+              </a:rPr>
+              <a:t>B2B2C MODEL</a:t>
+            </a:r>
+          </a:p>
+        </p:txBody>
+      </p:sp>
+      <p:sp>
+        <p:nvSpPr>
+          <p:cNvPr id="6" name="TextBox 5"/>
           <p:cNvSpPr txBox="1"/>
           <p:nvPr/>
         </p:nvSpPr>
         <p:spPr>
           <a:xfrm>
-            <a:off x="731520" y="1737360"/>
-            <a:ext cx="10515600" cy="2377440"/>
+            <a:off x="548640" y="1737360"/>
+            <a:ext cx="5577840" cy="4572000"/>
           </a:xfrm>
           <a:prstGeom prst="rect">
             <a:avLst/>
@@ -3482,63 +3564,583 @@
           <a:p>
             <a:pPr>
               <a:spcAft>
-                <a:spcPts val="1200"/>
+                <a:spcPts val="1000"/>
               </a:spcAft>
             </a:pPr>
             <a:r>
-              <a:rPr sz="1800">
-                <a:solidFill>
-                  <a:srgbClr val="FFFFFF"/>
-                </a:solidFill>
-                <a:latin typeface="Calibri"/>
-              </a:rPr>
-              <a:t>• Pilot with 3 colleges next semester — measure check-in → counselor conversion</a:t>
+              <a:rPr sz="1700">
+                <a:solidFill>
+                  <a:srgbClr val="1F2A2E"/>
+                </a:solidFill>
+                <a:latin typeface="Calibri"/>
+              </a:rPr>
+              <a:t>• Sell to colleges as a subscription</a:t>
+            </a:r>
+          </a:p>
+          <a:p>
+            <a:pPr lvl="1">
+              <a:spcAft>
+                <a:spcPts val="1000"/>
+              </a:spcAft>
+            </a:pPr>
+            <a:r>
+              <a:rPr sz="1700">
+                <a:solidFill>
+                  <a:srgbClr val="1F2A2E"/>
+                </a:solidFill>
+                <a:latin typeface="Calibri"/>
+              </a:rPr>
+              <a:t>– Cheaper than hiring 5 in-house counselors each</a:t>
             </a:r>
           </a:p>
           <a:p>
             <a:pPr>
               <a:spcAft>
-                <a:spcPts val="1200"/>
+                <a:spcPts val="1000"/>
               </a:spcAft>
             </a:pPr>
             <a:r>
-              <a:rPr sz="1800">
-                <a:solidFill>
-                  <a:srgbClr val="FFFFFF"/>
-                </a:solidFill>
-                <a:latin typeface="Calibri"/>
-              </a:rPr>
-              <a:t>• Partnership intro to a telehealth/counselor network for the shared pool</a:t>
+              <a:rPr sz="1700">
+                <a:solidFill>
+                  <a:srgbClr val="1F2A2E"/>
+                </a:solidFill>
+                <a:latin typeface="Calibri"/>
+              </a:rPr>
+              <a:t>• Shared counselor pool across colleges</a:t>
+            </a:r>
+          </a:p>
+          <a:p>
+            <a:pPr lvl="1">
+              <a:spcAft>
+                <a:spcPts val="1000"/>
+              </a:spcAft>
+            </a:pPr>
+            <a:r>
+              <a:rPr sz="1700">
+                <a:solidFill>
+                  <a:srgbClr val="1F2A2E"/>
+                </a:solidFill>
+                <a:latin typeface="Calibri"/>
+              </a:rPr>
+              <a:t>– One network serves many campuses → solves shortage</a:t>
             </a:r>
           </a:p>
           <a:p>
             <a:pPr>
               <a:spcAft>
-                <a:spcPts val="1200"/>
+                <a:spcPts val="1000"/>
               </a:spcAft>
             </a:pPr>
             <a:r>
-              <a:rPr sz="1800">
+              <a:rPr sz="1700">
+                <a:solidFill>
+                  <a:srgbClr val="1F2A2E"/>
+                </a:solidFill>
+                <a:latin typeface="Calibri"/>
+              </a:rPr>
+              <a:t>• Peer volunteers self-replenish each batch</a:t>
+            </a:r>
+          </a:p>
+          <a:p>
+            <a:pPr lvl="1">
+              <a:spcAft>
+                <a:spcPts val="1000"/>
+              </a:spcAft>
+            </a:pPr>
+            <a:r>
+              <a:rPr sz="1700">
+                <a:solidFill>
+                  <a:srgbClr val="1F2A2E"/>
+                </a:solidFill>
+                <a:latin typeface="Calibri"/>
+              </a:rPr>
+              <a:t>– Near-free, compounding supply of listeners</a:t>
+            </a:r>
+          </a:p>
+          <a:p>
+            <a:pPr>
+              <a:spcAft>
+                <a:spcPts val="1000"/>
+              </a:spcAft>
+            </a:pPr>
+            <a:r>
+              <a:rPr sz="1700">
+                <a:solidFill>
+                  <a:srgbClr val="1F2A2E"/>
+                </a:solidFill>
+                <a:latin typeface="Calibri"/>
+              </a:rPr>
+              <a:t>• CSR / wellness-fund subsidies for low-income camps</a:t>
+            </a:r>
+          </a:p>
+        </p:txBody>
+      </p:sp>
+      <p:sp>
+        <p:nvSpPr>
+          <p:cNvPr id="7" name="Rectangle 6"/>
+          <p:cNvSpPr/>
+          <p:nvPr/>
+        </p:nvSpPr>
+        <p:spPr>
+          <a:xfrm>
+            <a:off x="6400800" y="1828800"/>
+            <a:ext cx="5212080" cy="4023360"/>
+          </a:xfrm>
+          <a:prstGeom prst="rect">
+            <a:avLst/>
+          </a:prstGeom>
+          <a:solidFill>
+            <a:srgbClr val="0F9B86"/>
+          </a:solidFill>
+          <a:ln>
+            <a:noFill/>
+          </a:ln>
+          <a:effectLst/>
+        </p:spPr>
+        <p:style>
+          <a:lnRef idx="1">
+            <a:schemeClr val="accent1"/>
+          </a:lnRef>
+          <a:fillRef idx="3">
+            <a:schemeClr val="accent1"/>
+          </a:fillRef>
+          <a:effectRef idx="2">
+            <a:schemeClr val="accent1"/>
+          </a:effectRef>
+          <a:fontRef idx="minor">
+            <a:schemeClr val="lt1"/>
+          </a:fontRef>
+        </p:style>
+        <p:txBody>
+          <a:bodyPr rtlCol="0" anchor="ctr"/>
+          <a:lstStyle/>
+          <a:p>
+            <a:pPr algn="ctr"/>
+          </a:p>
+        </p:txBody>
+      </p:sp>
+      <p:sp>
+        <p:nvSpPr>
+          <p:cNvPr id="8" name="TextBox 7"/>
+          <p:cNvSpPr txBox="1"/>
+          <p:nvPr/>
+        </p:nvSpPr>
+        <p:spPr>
+          <a:xfrm>
+            <a:off x="6583680" y="2011680"/>
+            <a:ext cx="4846320" cy="457200"/>
+          </a:xfrm>
+          <a:prstGeom prst="rect">
+            <a:avLst/>
+          </a:prstGeom>
+          <a:noFill/>
+        </p:spPr>
+        <p:txBody>
+          <a:bodyPr wrap="square" anchor="t">
+            <a:spAutoFit/>
+          </a:bodyPr>
+          <a:lstStyle/>
+          <a:p>
+            <a:pPr algn="l"/>
+            <a:r>
+              <a:rPr sz="1800" b="1">
                 <a:solidFill>
                   <a:srgbClr val="FFFFFF"/>
                 </a:solidFill>
                 <a:latin typeface="Calibri"/>
               </a:rPr>
-              <a:t>• Mentorship on campus wellness-fund / CSR funding path</a:t>
-            </a:r>
-          </a:p>
-        </p:txBody>
-      </p:sp>
-      <p:sp>
-        <p:nvSpPr>
-          <p:cNvPr id="5" name="Rectangle 4"/>
+              <a:t>Unit economics</a:t>
+            </a:r>
+          </a:p>
+        </p:txBody>
+      </p:sp>
+      <p:sp>
+        <p:nvSpPr>
+          <p:cNvPr id="9" name="TextBox 8"/>
+          <p:cNvSpPr txBox="1"/>
+          <p:nvPr/>
+        </p:nvSpPr>
+        <p:spPr>
+          <a:xfrm>
+            <a:off x="6583680" y="2651760"/>
+            <a:ext cx="4846320" cy="3108960"/>
+          </a:xfrm>
+          <a:prstGeom prst="rect">
+            <a:avLst/>
+          </a:prstGeom>
+          <a:noFill/>
+        </p:spPr>
+        <p:txBody>
+          <a:bodyPr wrap="square">
+            <a:spAutoFit/>
+          </a:bodyPr>
+          <a:lstStyle/>
+          <a:p>
+            <a:pPr>
+              <a:spcAft>
+                <a:spcPts val="1000"/>
+              </a:spcAft>
+            </a:pPr>
+            <a:r>
+              <a:rPr sz="1500">
+                <a:solidFill>
+                  <a:srgbClr val="FFFFFF"/>
+                </a:solidFill>
+                <a:latin typeface="Calibri"/>
+              </a:rPr>
+              <a:t>• College pays per-student/yr subscription</a:t>
+            </a:r>
+          </a:p>
+          <a:p>
+            <a:pPr>
+              <a:spcAft>
+                <a:spcPts val="1000"/>
+              </a:spcAft>
+            </a:pPr>
+            <a:r>
+              <a:rPr sz="1500">
+                <a:solidFill>
+                  <a:srgbClr val="FFFFFF"/>
+                </a:solidFill>
+                <a:latin typeface="Calibri"/>
+              </a:rPr>
+              <a:t>• Counselor cost amortized across N colleges</a:t>
+            </a:r>
+          </a:p>
+          <a:p>
+            <a:pPr>
+              <a:spcAft>
+                <a:spcPts val="1000"/>
+              </a:spcAft>
+            </a:pPr>
+            <a:r>
+              <a:rPr sz="1500">
+                <a:solidFill>
+                  <a:srgbClr val="FFFFFF"/>
+                </a:solidFill>
+                <a:latin typeface="Calibri"/>
+              </a:rPr>
+              <a:t>• Peer layer = ~0 marginal cost</a:t>
+            </a:r>
+          </a:p>
+          <a:p>
+            <a:pPr>
+              <a:spcAft>
+                <a:spcPts val="1000"/>
+              </a:spcAft>
+            </a:pPr>
+            <a:r>
+              <a:rPr sz="1500">
+                <a:solidFill>
+                  <a:srgbClr val="FFFFFF"/>
+                </a:solidFill>
+                <a:latin typeface="Calibri"/>
+              </a:rPr>
+              <a:t>• Retention via trust, not forced signup</a:t>
+            </a:r>
+          </a:p>
+        </p:txBody>
+      </p:sp>
+    </p:spTree>
+  </p:cSld>
+  <p:clrMapOvr>
+    <a:masterClrMapping/>
+  </p:clrMapOvr>
+</p:sld>
+</file>
+
+<file path=ppt/slides/slide11.xml><?xml version="1.0" encoding="utf-8"?>
+<p:sld xmlns:a="http://schemas.openxmlformats.org/drawingml/2006/main" xmlns:p="http://schemas.openxmlformats.org/presentationml/2006/main" xmlns:r="http://schemas.openxmlformats.org/officeDocument/2006/relationships">
+  <p:cSld>
+    <p:spTree>
+      <p:nvGrpSpPr>
+        <p:cNvPr id="1" name=""/>
+        <p:cNvGrpSpPr/>
+        <p:nvPr/>
+      </p:nvGrpSpPr>
+      <p:grpSpPr/>
+      <p:sp>
+        <p:nvSpPr>
+          <p:cNvPr id="2" name="Rectangle 1"/>
           <p:cNvSpPr/>
           <p:nvPr/>
         </p:nvSpPr>
         <p:spPr>
           <a:xfrm>
-            <a:off x="731520" y="4389120"/>
-            <a:ext cx="10698480" cy="1463040"/>
+            <a:off x="0" y="0"/>
+            <a:ext cx="12191695" cy="6858000"/>
+          </a:xfrm>
+          <a:prstGeom prst="rect">
+            <a:avLst/>
+          </a:prstGeom>
+          <a:solidFill>
+            <a:srgbClr val="FFFFFF"/>
+          </a:solidFill>
+          <a:ln>
+            <a:noFill/>
+          </a:ln>
+          <a:effectLst/>
+        </p:spPr>
+        <p:style>
+          <a:lnRef idx="1">
+            <a:schemeClr val="accent1"/>
+          </a:lnRef>
+          <a:fillRef idx="3">
+            <a:schemeClr val="accent1"/>
+          </a:fillRef>
+          <a:effectRef idx="2">
+            <a:schemeClr val="accent1"/>
+          </a:effectRef>
+          <a:fontRef idx="minor">
+            <a:schemeClr val="lt1"/>
+          </a:fontRef>
+        </p:style>
+        <p:txBody>
+          <a:bodyPr rtlCol="0" anchor="ctr"/>
+          <a:lstStyle/>
+          <a:p>
+            <a:pPr algn="ctr"/>
+          </a:p>
+        </p:txBody>
+      </p:sp>
+      <p:sp>
+        <p:nvSpPr>
+          <p:cNvPr id="3" name="Rectangle 2"/>
+          <p:cNvSpPr/>
+          <p:nvPr/>
+        </p:nvSpPr>
+        <p:spPr>
+          <a:xfrm>
+            <a:off x="0" y="0"/>
+            <a:ext cx="12191695" cy="1051560"/>
+          </a:xfrm>
+          <a:prstGeom prst="rect">
+            <a:avLst/>
+          </a:prstGeom>
+          <a:solidFill>
+            <a:srgbClr val="0F9B86"/>
+          </a:solidFill>
+          <a:ln>
+            <a:noFill/>
+          </a:ln>
+          <a:effectLst/>
+        </p:spPr>
+        <p:style>
+          <a:lnRef idx="1">
+            <a:schemeClr val="accent1"/>
+          </a:lnRef>
+          <a:fillRef idx="3">
+            <a:schemeClr val="accent1"/>
+          </a:fillRef>
+          <a:effectRef idx="2">
+            <a:schemeClr val="accent1"/>
+          </a:effectRef>
+          <a:fontRef idx="minor">
+            <a:schemeClr val="lt1"/>
+          </a:fontRef>
+        </p:style>
+        <p:txBody>
+          <a:bodyPr rtlCol="0" anchor="ctr"/>
+          <a:lstStyle/>
+          <a:p>
+            <a:pPr algn="ctr"/>
+          </a:p>
+        </p:txBody>
+      </p:sp>
+      <p:sp>
+        <p:nvSpPr>
+          <p:cNvPr id="4" name="TextBox 3"/>
+          <p:cNvSpPr txBox="1"/>
+          <p:nvPr/>
+        </p:nvSpPr>
+        <p:spPr>
+          <a:xfrm>
+            <a:off x="457200" y="164592"/>
+            <a:ext cx="10972800" cy="731520"/>
+          </a:xfrm>
+          <a:prstGeom prst="rect">
+            <a:avLst/>
+          </a:prstGeom>
+          <a:noFill/>
+        </p:spPr>
+        <p:txBody>
+          <a:bodyPr wrap="square" anchor="ctr">
+            <a:spAutoFit/>
+          </a:bodyPr>
+          <a:lstStyle/>
+          <a:p>
+            <a:pPr algn="l"/>
+            <a:r>
+              <a:rPr sz="3000" b="1">
+                <a:solidFill>
+                  <a:srgbClr val="FFFFFF"/>
+                </a:solidFill>
+                <a:latin typeface="Calibri"/>
+              </a:rPr>
+              <a:t>Impact (Demo Metrics)</a:t>
+            </a:r>
+          </a:p>
+        </p:txBody>
+      </p:sp>
+      <p:sp>
+        <p:nvSpPr>
+          <p:cNvPr id="5" name="TextBox 4"/>
+          <p:cNvSpPr txBox="1"/>
+          <p:nvPr/>
+        </p:nvSpPr>
+        <p:spPr>
+          <a:xfrm>
+            <a:off x="457200" y="1143000"/>
+            <a:ext cx="10972800" cy="365760"/>
+          </a:xfrm>
+          <a:prstGeom prst="rect">
+            <a:avLst/>
+          </a:prstGeom>
+          <a:noFill/>
+        </p:spPr>
+        <p:txBody>
+          <a:bodyPr wrap="square" anchor="t">
+            <a:spAutoFit/>
+          </a:bodyPr>
+          <a:lstStyle/>
+          <a:p>
+            <a:pPr algn="l"/>
+            <a:r>
+              <a:rPr sz="1400" b="1">
+                <a:solidFill>
+                  <a:srgbClr val="5B6B6E"/>
+                </a:solidFill>
+                <a:latin typeface="Calibri"/>
+              </a:rPr>
+              <a:t>WHAT SUCCESS LOOKS LIKE</a:t>
+            </a:r>
+          </a:p>
+        </p:txBody>
+      </p:sp>
+      <p:sp>
+        <p:nvSpPr>
+          <p:cNvPr id="6" name="Rectangle 5"/>
+          <p:cNvSpPr/>
+          <p:nvPr/>
+        </p:nvSpPr>
+        <p:spPr>
+          <a:xfrm>
+            <a:off x="640080" y="1828800"/>
+            <a:ext cx="3383280" cy="1737360"/>
+          </a:xfrm>
+          <a:prstGeom prst="rect">
+            <a:avLst/>
+          </a:prstGeom>
+          <a:solidFill>
+            <a:srgbClr val="0F9B86"/>
+          </a:solidFill>
+          <a:ln>
+            <a:noFill/>
+          </a:ln>
+          <a:effectLst/>
+        </p:spPr>
+        <p:style>
+          <a:lnRef idx="1">
+            <a:schemeClr val="accent1"/>
+          </a:lnRef>
+          <a:fillRef idx="3">
+            <a:schemeClr val="accent1"/>
+          </a:fillRef>
+          <a:effectRef idx="2">
+            <a:schemeClr val="accent1"/>
+          </a:effectRef>
+          <a:fontRef idx="minor">
+            <a:schemeClr val="lt1"/>
+          </a:fontRef>
+        </p:style>
+        <p:txBody>
+          <a:bodyPr rtlCol="0" anchor="ctr"/>
+          <a:lstStyle/>
+          <a:p>
+            <a:pPr algn="ctr"/>
+          </a:p>
+        </p:txBody>
+      </p:sp>
+      <p:sp>
+        <p:nvSpPr>
+          <p:cNvPr id="7" name="TextBox 6"/>
+          <p:cNvSpPr txBox="1"/>
+          <p:nvPr/>
+        </p:nvSpPr>
+        <p:spPr>
+          <a:xfrm>
+            <a:off x="640080" y="2011680"/>
+            <a:ext cx="3383280" cy="822960"/>
+          </a:xfrm>
+          <a:prstGeom prst="rect">
+            <a:avLst/>
+          </a:prstGeom>
+          <a:noFill/>
+        </p:spPr>
+        <p:txBody>
+          <a:bodyPr wrap="square" anchor="t">
+            <a:spAutoFit/>
+          </a:bodyPr>
+          <a:lstStyle/>
+          <a:p>
+            <a:pPr algn="ctr"/>
+            <a:r>
+              <a:rPr sz="3400" b="1">
+                <a:solidFill>
+                  <a:srgbClr val="FFFFFF"/>
+                </a:solidFill>
+                <a:latin typeface="Calibri"/>
+              </a:rPr>
+              <a:t>14</a:t>
+            </a:r>
+          </a:p>
+        </p:txBody>
+      </p:sp>
+      <p:sp>
+        <p:nvSpPr>
+          <p:cNvPr id="8" name="TextBox 7"/>
+          <p:cNvSpPr txBox="1"/>
+          <p:nvPr/>
+        </p:nvSpPr>
+        <p:spPr>
+          <a:xfrm>
+            <a:off x="640080" y="2834640"/>
+            <a:ext cx="3383280" cy="640080"/>
+          </a:xfrm>
+          <a:prstGeom prst="rect">
+            <a:avLst/>
+          </a:prstGeom>
+          <a:noFill/>
+        </p:spPr>
+        <p:txBody>
+          <a:bodyPr wrap="square" anchor="t">
+            <a:spAutoFit/>
+          </a:bodyPr>
+          <a:lstStyle/>
+          <a:p>
+            <a:pPr algn="ctr"/>
+            <a:r>
+              <a:rPr sz="1400" b="0">
+                <a:solidFill>
+                  <a:srgbClr val="FFFFFF"/>
+                </a:solidFill>
+                <a:latin typeface="Calibri"/>
+              </a:rPr>
+              <a:t>Colleges onboarded</a:t>
+            </a:r>
+          </a:p>
+        </p:txBody>
+      </p:sp>
+      <p:sp>
+        <p:nvSpPr>
+          <p:cNvPr id="9" name="Rectangle 8"/>
+          <p:cNvSpPr/>
+          <p:nvPr/>
+        </p:nvSpPr>
+        <p:spPr>
+          <a:xfrm>
+            <a:off x="4389120" y="1828800"/>
+            <a:ext cx="3383280" cy="1737360"/>
           </a:xfrm>
           <a:prstGeom prst="rect">
             <a:avLst/>
@@ -3575,14 +4177,646 @@
       </p:sp>
       <p:sp>
         <p:nvSpPr>
-          <p:cNvPr id="6" name="TextBox 5"/>
+          <p:cNvPr id="10" name="TextBox 9"/>
           <p:cNvSpPr txBox="1"/>
           <p:nvPr/>
         </p:nvSpPr>
         <p:spPr>
           <a:xfrm>
-            <a:off x="914400" y="4526280"/>
-            <a:ext cx="10332720" cy="1188720"/>
+            <a:off x="4389120" y="2011680"/>
+            <a:ext cx="3383280" cy="822960"/>
+          </a:xfrm>
+          <a:prstGeom prst="rect">
+            <a:avLst/>
+          </a:prstGeom>
+          <a:noFill/>
+        </p:spPr>
+        <p:txBody>
+          <a:bodyPr wrap="square" anchor="t">
+            <a:spAutoFit/>
+          </a:bodyPr>
+          <a:lstStyle/>
+          <a:p>
+            <a:pPr algn="ctr"/>
+            <a:r>
+              <a:rPr sz="3400" b="1">
+                <a:solidFill>
+                  <a:srgbClr val="FFFFFF"/>
+                </a:solidFill>
+                <a:latin typeface="Calibri"/>
+              </a:rPr>
+              <a:t>38,200</a:t>
+            </a:r>
+          </a:p>
+        </p:txBody>
+      </p:sp>
+      <p:sp>
+        <p:nvSpPr>
+          <p:cNvPr id="11" name="TextBox 10"/>
+          <p:cNvSpPr txBox="1"/>
+          <p:nvPr/>
+        </p:nvSpPr>
+        <p:spPr>
+          <a:xfrm>
+            <a:off x="4389120" y="2834640"/>
+            <a:ext cx="3383280" cy="640080"/>
+          </a:xfrm>
+          <a:prstGeom prst="rect">
+            <a:avLst/>
+          </a:prstGeom>
+          <a:noFill/>
+        </p:spPr>
+        <p:txBody>
+          <a:bodyPr wrap="square" anchor="t">
+            <a:spAutoFit/>
+          </a:bodyPr>
+          <a:lstStyle/>
+          <a:p>
+            <a:pPr algn="ctr"/>
+            <a:r>
+              <a:rPr sz="1400" b="0">
+                <a:solidFill>
+                  <a:srgbClr val="FFFFFF"/>
+                </a:solidFill>
+                <a:latin typeface="Calibri"/>
+              </a:rPr>
+              <a:t>Lives reached</a:t>
+            </a:r>
+          </a:p>
+        </p:txBody>
+      </p:sp>
+      <p:sp>
+        <p:nvSpPr>
+          <p:cNvPr id="12" name="Rectangle 11"/>
+          <p:cNvSpPr/>
+          <p:nvPr/>
+        </p:nvSpPr>
+        <p:spPr>
+          <a:xfrm>
+            <a:off x="8138159" y="1828800"/>
+            <a:ext cx="3383280" cy="1737360"/>
+          </a:xfrm>
+          <a:prstGeom prst="rect">
+            <a:avLst/>
+          </a:prstGeom>
+          <a:solidFill>
+            <a:srgbClr val="0F9B86"/>
+          </a:solidFill>
+          <a:ln>
+            <a:noFill/>
+          </a:ln>
+          <a:effectLst/>
+        </p:spPr>
+        <p:style>
+          <a:lnRef idx="1">
+            <a:schemeClr val="accent1"/>
+          </a:lnRef>
+          <a:fillRef idx="3">
+            <a:schemeClr val="accent1"/>
+          </a:fillRef>
+          <a:effectRef idx="2">
+            <a:schemeClr val="accent1"/>
+          </a:effectRef>
+          <a:fontRef idx="minor">
+            <a:schemeClr val="lt1"/>
+          </a:fontRef>
+        </p:style>
+        <p:txBody>
+          <a:bodyPr rtlCol="0" anchor="ctr"/>
+          <a:lstStyle/>
+          <a:p>
+            <a:pPr algn="ctr"/>
+          </a:p>
+        </p:txBody>
+      </p:sp>
+      <p:sp>
+        <p:nvSpPr>
+          <p:cNvPr id="13" name="TextBox 12"/>
+          <p:cNvSpPr txBox="1"/>
+          <p:nvPr/>
+        </p:nvSpPr>
+        <p:spPr>
+          <a:xfrm>
+            <a:off x="8138159" y="2011680"/>
+            <a:ext cx="3383280" cy="822960"/>
+          </a:xfrm>
+          <a:prstGeom prst="rect">
+            <a:avLst/>
+          </a:prstGeom>
+          <a:noFill/>
+        </p:spPr>
+        <p:txBody>
+          <a:bodyPr wrap="square" anchor="t">
+            <a:spAutoFit/>
+          </a:bodyPr>
+          <a:lstStyle/>
+          <a:p>
+            <a:pPr algn="ctr"/>
+            <a:r>
+              <a:rPr sz="3400" b="1">
+                <a:solidFill>
+                  <a:srgbClr val="FFFFFF"/>
+                </a:solidFill>
+                <a:latin typeface="Calibri"/>
+              </a:rPr>
+              <a:t>1,284</a:t>
+            </a:r>
+          </a:p>
+        </p:txBody>
+      </p:sp>
+      <p:sp>
+        <p:nvSpPr>
+          <p:cNvPr id="14" name="TextBox 13"/>
+          <p:cNvSpPr txBox="1"/>
+          <p:nvPr/>
+        </p:nvSpPr>
+        <p:spPr>
+          <a:xfrm>
+            <a:off x="8138159" y="2834640"/>
+            <a:ext cx="3383280" cy="640080"/>
+          </a:xfrm>
+          <a:prstGeom prst="rect">
+            <a:avLst/>
+          </a:prstGeom>
+          <a:noFill/>
+        </p:spPr>
+        <p:txBody>
+          <a:bodyPr wrap="square" anchor="t">
+            <a:spAutoFit/>
+          </a:bodyPr>
+          <a:lstStyle/>
+          <a:p>
+            <a:pPr algn="ctr"/>
+            <a:r>
+              <a:rPr sz="1400" b="0">
+                <a:solidFill>
+                  <a:srgbClr val="FFFFFF"/>
+                </a:solidFill>
+                <a:latin typeface="Calibri"/>
+              </a:rPr>
+              <a:t>Check-ins (30d)</a:t>
+            </a:r>
+          </a:p>
+        </p:txBody>
+      </p:sp>
+      <p:sp>
+        <p:nvSpPr>
+          <p:cNvPr id="15" name="Rectangle 14"/>
+          <p:cNvSpPr/>
+          <p:nvPr/>
+        </p:nvSpPr>
+        <p:spPr>
+          <a:xfrm>
+            <a:off x="640080" y="3840480"/>
+            <a:ext cx="3383280" cy="1737360"/>
+          </a:xfrm>
+          <a:prstGeom prst="rect">
+            <a:avLst/>
+          </a:prstGeom>
+          <a:solidFill>
+            <a:srgbClr val="0B7D6C"/>
+          </a:solidFill>
+          <a:ln>
+            <a:noFill/>
+          </a:ln>
+          <a:effectLst/>
+        </p:spPr>
+        <p:style>
+          <a:lnRef idx="1">
+            <a:schemeClr val="accent1"/>
+          </a:lnRef>
+          <a:fillRef idx="3">
+            <a:schemeClr val="accent1"/>
+          </a:fillRef>
+          <a:effectRef idx="2">
+            <a:schemeClr val="accent1"/>
+          </a:effectRef>
+          <a:fontRef idx="minor">
+            <a:schemeClr val="lt1"/>
+          </a:fontRef>
+        </p:style>
+        <p:txBody>
+          <a:bodyPr rtlCol="0" anchor="ctr"/>
+          <a:lstStyle/>
+          <a:p>
+            <a:pPr algn="ctr"/>
+          </a:p>
+        </p:txBody>
+      </p:sp>
+      <p:sp>
+        <p:nvSpPr>
+          <p:cNvPr id="16" name="TextBox 15"/>
+          <p:cNvSpPr txBox="1"/>
+          <p:nvPr/>
+        </p:nvSpPr>
+        <p:spPr>
+          <a:xfrm>
+            <a:off x="640080" y="4023360"/>
+            <a:ext cx="3383280" cy="822960"/>
+          </a:xfrm>
+          <a:prstGeom prst="rect">
+            <a:avLst/>
+          </a:prstGeom>
+          <a:noFill/>
+        </p:spPr>
+        <p:txBody>
+          <a:bodyPr wrap="square" anchor="t">
+            <a:spAutoFit/>
+          </a:bodyPr>
+          <a:lstStyle/>
+          <a:p>
+            <a:pPr algn="ctr"/>
+            <a:r>
+              <a:rPr sz="3400" b="1">
+                <a:solidFill>
+                  <a:srgbClr val="FFFFFF"/>
+                </a:solidFill>
+                <a:latin typeface="Calibri"/>
+              </a:rPr>
+              <a:t>612</a:t>
+            </a:r>
+          </a:p>
+        </p:txBody>
+      </p:sp>
+      <p:sp>
+        <p:nvSpPr>
+          <p:cNvPr id="17" name="TextBox 16"/>
+          <p:cNvSpPr txBox="1"/>
+          <p:nvPr/>
+        </p:nvSpPr>
+        <p:spPr>
+          <a:xfrm>
+            <a:off x="640080" y="4846320"/>
+            <a:ext cx="3383280" cy="640080"/>
+          </a:xfrm>
+          <a:prstGeom prst="rect">
+            <a:avLst/>
+          </a:prstGeom>
+          <a:noFill/>
+        </p:spPr>
+        <p:txBody>
+          <a:bodyPr wrap="square" anchor="t">
+            <a:spAutoFit/>
+          </a:bodyPr>
+          <a:lstStyle/>
+          <a:p>
+            <a:pPr algn="ctr"/>
+            <a:r>
+              <a:rPr sz="1400" b="0">
+                <a:solidFill>
+                  <a:srgbClr val="FFFFFF"/>
+                </a:solidFill>
+                <a:latin typeface="Calibri"/>
+              </a:rPr>
+              <a:t>Routed to peer</a:t>
+            </a:r>
+          </a:p>
+        </p:txBody>
+      </p:sp>
+      <p:sp>
+        <p:nvSpPr>
+          <p:cNvPr id="18" name="Rectangle 17"/>
+          <p:cNvSpPr/>
+          <p:nvPr/>
+        </p:nvSpPr>
+        <p:spPr>
+          <a:xfrm>
+            <a:off x="4389120" y="3840480"/>
+            <a:ext cx="3383280" cy="1737360"/>
+          </a:xfrm>
+          <a:prstGeom prst="rect">
+            <a:avLst/>
+          </a:prstGeom>
+          <a:solidFill>
+            <a:srgbClr val="0F9B86"/>
+          </a:solidFill>
+          <a:ln>
+            <a:noFill/>
+          </a:ln>
+          <a:effectLst/>
+        </p:spPr>
+        <p:style>
+          <a:lnRef idx="1">
+            <a:schemeClr val="accent1"/>
+          </a:lnRef>
+          <a:fillRef idx="3">
+            <a:schemeClr val="accent1"/>
+          </a:fillRef>
+          <a:effectRef idx="2">
+            <a:schemeClr val="accent1"/>
+          </a:effectRef>
+          <a:fontRef idx="minor">
+            <a:schemeClr val="lt1"/>
+          </a:fontRef>
+        </p:style>
+        <p:txBody>
+          <a:bodyPr rtlCol="0" anchor="ctr"/>
+          <a:lstStyle/>
+          <a:p>
+            <a:pPr algn="ctr"/>
+          </a:p>
+        </p:txBody>
+      </p:sp>
+      <p:sp>
+        <p:nvSpPr>
+          <p:cNvPr id="19" name="TextBox 18"/>
+          <p:cNvSpPr txBox="1"/>
+          <p:nvPr/>
+        </p:nvSpPr>
+        <p:spPr>
+          <a:xfrm>
+            <a:off x="4389120" y="4023360"/>
+            <a:ext cx="3383280" cy="822960"/>
+          </a:xfrm>
+          <a:prstGeom prst="rect">
+            <a:avLst/>
+          </a:prstGeom>
+          <a:noFill/>
+        </p:spPr>
+        <p:txBody>
+          <a:bodyPr wrap="square" anchor="t">
+            <a:spAutoFit/>
+          </a:bodyPr>
+          <a:lstStyle/>
+          <a:p>
+            <a:pPr algn="ctr"/>
+            <a:r>
+              <a:rPr sz="3400" b="1">
+                <a:solidFill>
+                  <a:srgbClr val="FFFFFF"/>
+                </a:solidFill>
+                <a:latin typeface="Calibri"/>
+              </a:rPr>
+              <a:t>298</a:t>
+            </a:r>
+          </a:p>
+        </p:txBody>
+      </p:sp>
+      <p:sp>
+        <p:nvSpPr>
+          <p:cNvPr id="20" name="TextBox 19"/>
+          <p:cNvSpPr txBox="1"/>
+          <p:nvPr/>
+        </p:nvSpPr>
+        <p:spPr>
+          <a:xfrm>
+            <a:off x="4389120" y="4846320"/>
+            <a:ext cx="3383280" cy="640080"/>
+          </a:xfrm>
+          <a:prstGeom prst="rect">
+            <a:avLst/>
+          </a:prstGeom>
+          <a:noFill/>
+        </p:spPr>
+        <p:txBody>
+          <a:bodyPr wrap="square" anchor="t">
+            <a:spAutoFit/>
+          </a:bodyPr>
+          <a:lstStyle/>
+          <a:p>
+            <a:pPr algn="ctr"/>
+            <a:r>
+              <a:rPr sz="1400" b="0">
+                <a:solidFill>
+                  <a:srgbClr val="FFFFFF"/>
+                </a:solidFill>
+                <a:latin typeface="Calibri"/>
+              </a:rPr>
+              <a:t>Routed to counselor</a:t>
+            </a:r>
+          </a:p>
+        </p:txBody>
+      </p:sp>
+      <p:sp>
+        <p:nvSpPr>
+          <p:cNvPr id="21" name="Rectangle 20"/>
+          <p:cNvSpPr/>
+          <p:nvPr/>
+        </p:nvSpPr>
+        <p:spPr>
+          <a:xfrm>
+            <a:off x="8138159" y="3840480"/>
+            <a:ext cx="3383280" cy="1737360"/>
+          </a:xfrm>
+          <a:prstGeom prst="rect">
+            <a:avLst/>
+          </a:prstGeom>
+          <a:solidFill>
+            <a:srgbClr val="0B7D6C"/>
+          </a:solidFill>
+          <a:ln>
+            <a:noFill/>
+          </a:ln>
+          <a:effectLst/>
+        </p:spPr>
+        <p:style>
+          <a:lnRef idx="1">
+            <a:schemeClr val="accent1"/>
+          </a:lnRef>
+          <a:fillRef idx="3">
+            <a:schemeClr val="accent1"/>
+          </a:fillRef>
+          <a:effectRef idx="2">
+            <a:schemeClr val="accent1"/>
+          </a:effectRef>
+          <a:fontRef idx="minor">
+            <a:schemeClr val="lt1"/>
+          </a:fontRef>
+        </p:style>
+        <p:txBody>
+          <a:bodyPr rtlCol="0" anchor="ctr"/>
+          <a:lstStyle/>
+          <a:p>
+            <a:pPr algn="ctr"/>
+          </a:p>
+        </p:txBody>
+      </p:sp>
+      <p:sp>
+        <p:nvSpPr>
+          <p:cNvPr id="22" name="TextBox 21"/>
+          <p:cNvSpPr txBox="1"/>
+          <p:nvPr/>
+        </p:nvSpPr>
+        <p:spPr>
+          <a:xfrm>
+            <a:off x="8138159" y="4023360"/>
+            <a:ext cx="3383280" cy="822960"/>
+          </a:xfrm>
+          <a:prstGeom prst="rect">
+            <a:avLst/>
+          </a:prstGeom>
+          <a:noFill/>
+        </p:spPr>
+        <p:txBody>
+          <a:bodyPr wrap="square" anchor="t">
+            <a:spAutoFit/>
+          </a:bodyPr>
+          <a:lstStyle/>
+          <a:p>
+            <a:pPr algn="ctr"/>
+            <a:r>
+              <a:rPr sz="3400" b="1">
+                <a:solidFill>
+                  <a:srgbClr val="FFFFFF"/>
+                </a:solidFill>
+                <a:latin typeface="Calibri"/>
+              </a:rPr>
+              <a:t>41</a:t>
+            </a:r>
+          </a:p>
+        </p:txBody>
+      </p:sp>
+      <p:sp>
+        <p:nvSpPr>
+          <p:cNvPr id="23" name="TextBox 22"/>
+          <p:cNvSpPr txBox="1"/>
+          <p:nvPr/>
+        </p:nvSpPr>
+        <p:spPr>
+          <a:xfrm>
+            <a:off x="8138159" y="4846320"/>
+            <a:ext cx="3383280" cy="640080"/>
+          </a:xfrm>
+          <a:prstGeom prst="rect">
+            <a:avLst/>
+          </a:prstGeom>
+          <a:noFill/>
+        </p:spPr>
+        <p:txBody>
+          <a:bodyPr wrap="square" anchor="t">
+            <a:spAutoFit/>
+          </a:bodyPr>
+          <a:lstStyle/>
+          <a:p>
+            <a:pPr algn="ctr"/>
+            <a:r>
+              <a:rPr sz="1400" b="0">
+                <a:solidFill>
+                  <a:srgbClr val="FFFFFF"/>
+                </a:solidFill>
+                <a:latin typeface="Calibri"/>
+              </a:rPr>
+              <a:t>Crisis escalations</a:t>
+            </a:r>
+          </a:p>
+        </p:txBody>
+      </p:sp>
+    </p:spTree>
+  </p:cSld>
+  <p:clrMapOvr>
+    <a:masterClrMapping/>
+  </p:clrMapOvr>
+</p:sld>
+</file>
+
+<file path=ppt/slides/slide12.xml><?xml version="1.0" encoding="utf-8"?>
+<p:sld xmlns:a="http://schemas.openxmlformats.org/drawingml/2006/main" xmlns:p="http://schemas.openxmlformats.org/presentationml/2006/main" xmlns:r="http://schemas.openxmlformats.org/officeDocument/2006/relationships">
+  <p:cSld>
+    <p:spTree>
+      <p:nvGrpSpPr>
+        <p:cNvPr id="1" name=""/>
+        <p:cNvGrpSpPr/>
+        <p:nvPr/>
+      </p:nvGrpSpPr>
+      <p:grpSpPr/>
+      <p:sp>
+        <p:nvSpPr>
+          <p:cNvPr id="2" name="Rectangle 1"/>
+          <p:cNvSpPr/>
+          <p:nvPr/>
+        </p:nvSpPr>
+        <p:spPr>
+          <a:xfrm>
+            <a:off x="0" y="0"/>
+            <a:ext cx="12191695" cy="6858000"/>
+          </a:xfrm>
+          <a:prstGeom prst="rect">
+            <a:avLst/>
+          </a:prstGeom>
+          <a:solidFill>
+            <a:srgbClr val="FFFFFF"/>
+          </a:solidFill>
+          <a:ln>
+            <a:noFill/>
+          </a:ln>
+          <a:effectLst/>
+        </p:spPr>
+        <p:style>
+          <a:lnRef idx="1">
+            <a:schemeClr val="accent1"/>
+          </a:lnRef>
+          <a:fillRef idx="3">
+            <a:schemeClr val="accent1"/>
+          </a:fillRef>
+          <a:effectRef idx="2">
+            <a:schemeClr val="accent1"/>
+          </a:effectRef>
+          <a:fontRef idx="minor">
+            <a:schemeClr val="lt1"/>
+          </a:fontRef>
+        </p:style>
+        <p:txBody>
+          <a:bodyPr rtlCol="0" anchor="ctr"/>
+          <a:lstStyle/>
+          <a:p>
+            <a:pPr algn="ctr"/>
+          </a:p>
+        </p:txBody>
+      </p:sp>
+      <p:sp>
+        <p:nvSpPr>
+          <p:cNvPr id="3" name="Rectangle 2"/>
+          <p:cNvSpPr/>
+          <p:nvPr/>
+        </p:nvSpPr>
+        <p:spPr>
+          <a:xfrm>
+            <a:off x="0" y="0"/>
+            <a:ext cx="12191695" cy="1051560"/>
+          </a:xfrm>
+          <a:prstGeom prst="rect">
+            <a:avLst/>
+          </a:prstGeom>
+          <a:solidFill>
+            <a:srgbClr val="0F9B86"/>
+          </a:solidFill>
+          <a:ln>
+            <a:noFill/>
+          </a:ln>
+          <a:effectLst/>
+        </p:spPr>
+        <p:style>
+          <a:lnRef idx="1">
+            <a:schemeClr val="accent1"/>
+          </a:lnRef>
+          <a:fillRef idx="3">
+            <a:schemeClr val="accent1"/>
+          </a:fillRef>
+          <a:effectRef idx="2">
+            <a:schemeClr val="accent1"/>
+          </a:effectRef>
+          <a:fontRef idx="minor">
+            <a:schemeClr val="lt1"/>
+          </a:fontRef>
+        </p:style>
+        <p:txBody>
+          <a:bodyPr rtlCol="0" anchor="ctr"/>
+          <a:lstStyle/>
+          <a:p>
+            <a:pPr algn="ctr"/>
+          </a:p>
+        </p:txBody>
+      </p:sp>
+      <p:sp>
+        <p:nvSpPr>
+          <p:cNvPr id="4" name="TextBox 3"/>
+          <p:cNvSpPr txBox="1"/>
+          <p:nvPr/>
+        </p:nvSpPr>
+        <p:spPr>
+          <a:xfrm>
+            <a:off x="457200" y="164592"/>
+            <a:ext cx="10972800" cy="731520"/>
           </a:xfrm>
           <a:prstGeom prst="rect">
             <a:avLst/>
@@ -3597,13 +4831,398 @@
           <a:p>
             <a:pPr algn="l"/>
             <a:r>
+              <a:rPr sz="3000" b="1">
+                <a:solidFill>
+                  <a:srgbClr val="FFFFFF"/>
+                </a:solidFill>
+                <a:latin typeface="Calibri"/>
+              </a:rPr>
+              <a:t>Why It's Credible</a:t>
+            </a:r>
+          </a:p>
+        </p:txBody>
+      </p:sp>
+      <p:sp>
+        <p:nvSpPr>
+          <p:cNvPr id="5" name="TextBox 4"/>
+          <p:cNvSpPr txBox="1"/>
+          <p:nvPr/>
+        </p:nvSpPr>
+        <p:spPr>
+          <a:xfrm>
+            <a:off x="457200" y="1143000"/>
+            <a:ext cx="10972800" cy="365760"/>
+          </a:xfrm>
+          <a:prstGeom prst="rect">
+            <a:avLst/>
+          </a:prstGeom>
+          <a:noFill/>
+        </p:spPr>
+        <p:txBody>
+          <a:bodyPr wrap="square" anchor="t">
+            <a:spAutoFit/>
+          </a:bodyPr>
+          <a:lstStyle/>
+          <a:p>
+            <a:pPr algn="l"/>
+            <a:r>
+              <a:rPr sz="1400" b="1">
+                <a:solidFill>
+                  <a:srgbClr val="5B6B6E"/>
+                </a:solidFill>
+                <a:latin typeface="Calibri"/>
+              </a:rPr>
+              <a:t>FRAMEWORKS &amp; TRUST ANCHORS</a:t>
+            </a:r>
+          </a:p>
+        </p:txBody>
+      </p:sp>
+      <p:sp>
+        <p:nvSpPr>
+          <p:cNvPr id="6" name="TextBox 5"/>
+          <p:cNvSpPr txBox="1"/>
+          <p:nvPr/>
+        </p:nvSpPr>
+        <p:spPr>
+          <a:xfrm>
+            <a:off x="548640" y="1828800"/>
+            <a:ext cx="10515600" cy="4389120"/>
+          </a:xfrm>
+          <a:prstGeom prst="rect">
+            <a:avLst/>
+          </a:prstGeom>
+          <a:noFill/>
+        </p:spPr>
+        <p:txBody>
+          <a:bodyPr wrap="square">
+            <a:spAutoFit/>
+          </a:bodyPr>
+          <a:lstStyle/>
+          <a:p>
+            <a:pPr>
+              <a:spcAft>
+                <a:spcPts val="1400"/>
+              </a:spcAft>
+            </a:pPr>
+            <a:r>
+              <a:rPr sz="1800">
+                <a:solidFill>
+                  <a:srgbClr val="1F2A2E"/>
+                </a:solidFill>
+                <a:latin typeface="Calibri"/>
+              </a:rPr>
+              <a:t>• Peer Listener certification aligned with NIMHANS &amp; iCall training frameworks</a:t>
+            </a:r>
+          </a:p>
+          <a:p>
+            <a:pPr>
+              <a:spcAft>
+                <a:spcPts val="1400"/>
+              </a:spcAft>
+            </a:pPr>
+            <a:r>
+              <a:rPr sz="1800">
+                <a:solidFill>
+                  <a:srgbClr val="1F2A2E"/>
+                </a:solidFill>
+                <a:latin typeface="Calibri"/>
+              </a:rPr>
+              <a:t>• Crisis routing uses verified national helplines: Tele-MANAS 14416, iCall (TISS), Vandrevala</a:t>
+            </a:r>
+          </a:p>
+          <a:p>
+            <a:pPr>
+              <a:spcAft>
+                <a:spcPts val="1400"/>
+              </a:spcAft>
+            </a:pPr>
+            <a:r>
+              <a:rPr sz="1800">
+                <a:solidFill>
+                  <a:srgbClr val="1F2A2E"/>
+                </a:solidFill>
+                <a:latin typeface="Calibri"/>
+              </a:rPr>
+              <a:t>• Anonymous-first mirrors global best practice (7 Cups, Crisis Text Line) adapted for India</a:t>
+            </a:r>
+          </a:p>
+          <a:p>
+            <a:pPr>
+              <a:spcAft>
+                <a:spcPts val="1400"/>
+              </a:spcAft>
+            </a:pPr>
+            <a:r>
+              <a:rPr sz="1800">
+                <a:solidFill>
+                  <a:srgbClr val="1F2A2E"/>
+                </a:solidFill>
+                <a:latin typeface="Calibri"/>
+              </a:rPr>
+              <a:t>• Resource library in Hindi, English, Marathi &amp; Gujarati — targets worse vernacular stigma</a:t>
+            </a:r>
+          </a:p>
+          <a:p>
+            <a:pPr>
+              <a:spcAft>
+                <a:spcPts val="1400"/>
+              </a:spcAft>
+            </a:pPr>
+            <a:r>
+              <a:rPr sz="1800">
+                <a:solidFill>
+                  <a:srgbClr val="1F2A2E"/>
+                </a:solidFill>
+                <a:latin typeface="Calibri"/>
+              </a:rPr>
+              <a:t>• Safety built-in: high-risk language auto-escalates, never routes around crisis</a:t>
+            </a:r>
+          </a:p>
+        </p:txBody>
+      </p:sp>
+    </p:spTree>
+  </p:cSld>
+  <p:clrMapOvr>
+    <a:masterClrMapping/>
+  </p:clrMapOvr>
+</p:sld>
+</file>
+
+<file path=ppt/slides/slide13.xml><?xml version="1.0" encoding="utf-8"?>
+<p:sld xmlns:a="http://schemas.openxmlformats.org/drawingml/2006/main" xmlns:p="http://schemas.openxmlformats.org/presentationml/2006/main" xmlns:r="http://schemas.openxmlformats.org/officeDocument/2006/relationships">
+  <p:cSld>
+    <p:spTree>
+      <p:nvGrpSpPr>
+        <p:cNvPr id="1" name=""/>
+        <p:cNvGrpSpPr/>
+        <p:nvPr/>
+      </p:nvGrpSpPr>
+      <p:grpSpPr/>
+      <p:sp>
+        <p:nvSpPr>
+          <p:cNvPr id="2" name="Rectangle 1"/>
+          <p:cNvSpPr/>
+          <p:nvPr/>
+        </p:nvSpPr>
+        <p:spPr>
+          <a:xfrm>
+            <a:off x="0" y="0"/>
+            <a:ext cx="12191695" cy="6858000"/>
+          </a:xfrm>
+          <a:prstGeom prst="rect">
+            <a:avLst/>
+          </a:prstGeom>
+          <a:solidFill>
+            <a:srgbClr val="0F9B86"/>
+          </a:solidFill>
+          <a:ln>
+            <a:noFill/>
+          </a:ln>
+          <a:effectLst/>
+        </p:spPr>
+        <p:style>
+          <a:lnRef idx="1">
+            <a:schemeClr val="accent1"/>
+          </a:lnRef>
+          <a:fillRef idx="3">
+            <a:schemeClr val="accent1"/>
+          </a:fillRef>
+          <a:effectRef idx="2">
+            <a:schemeClr val="accent1"/>
+          </a:effectRef>
+          <a:fontRef idx="minor">
+            <a:schemeClr val="lt1"/>
+          </a:fontRef>
+        </p:style>
+        <p:txBody>
+          <a:bodyPr rtlCol="0" anchor="ctr"/>
+          <a:lstStyle/>
+          <a:p>
+            <a:pPr algn="ctr"/>
+          </a:p>
+        </p:txBody>
+      </p:sp>
+      <p:sp>
+        <p:nvSpPr>
+          <p:cNvPr id="3" name="TextBox 2"/>
+          <p:cNvSpPr txBox="1"/>
+          <p:nvPr/>
+        </p:nvSpPr>
+        <p:spPr>
+          <a:xfrm>
+            <a:off x="731520" y="731520"/>
+            <a:ext cx="10698480" cy="731520"/>
+          </a:xfrm>
+          <a:prstGeom prst="rect">
+            <a:avLst/>
+          </a:prstGeom>
+          <a:noFill/>
+        </p:spPr>
+        <p:txBody>
+          <a:bodyPr wrap="square" anchor="t">
+            <a:spAutoFit/>
+          </a:bodyPr>
+          <a:lstStyle/>
+          <a:p>
+            <a:pPr algn="l"/>
+            <a:r>
+              <a:rPr sz="3400" b="1">
+                <a:solidFill>
+                  <a:srgbClr val="FFFFFF"/>
+                </a:solidFill>
+                <a:latin typeface="Calibri"/>
+              </a:rPr>
+              <a:t>The Ask</a:t>
+            </a:r>
+          </a:p>
+        </p:txBody>
+      </p:sp>
+      <p:sp>
+        <p:nvSpPr>
+          <p:cNvPr id="4" name="TextBox 3"/>
+          <p:cNvSpPr txBox="1"/>
+          <p:nvPr/>
+        </p:nvSpPr>
+        <p:spPr>
+          <a:xfrm>
+            <a:off x="731520" y="1737360"/>
+            <a:ext cx="10515600" cy="2377440"/>
+          </a:xfrm>
+          <a:prstGeom prst="rect">
+            <a:avLst/>
+          </a:prstGeom>
+          <a:noFill/>
+        </p:spPr>
+        <p:txBody>
+          <a:bodyPr wrap="square">
+            <a:spAutoFit/>
+          </a:bodyPr>
+          <a:lstStyle/>
+          <a:p>
+            <a:pPr>
+              <a:spcAft>
+                <a:spcPts val="1200"/>
+              </a:spcAft>
+            </a:pPr>
+            <a:r>
+              <a:rPr sz="1800">
+                <a:solidFill>
+                  <a:srgbClr val="FFFFFF"/>
+                </a:solidFill>
+                <a:latin typeface="Calibri"/>
+              </a:rPr>
+              <a:t>• Pilot with 3 colleges next semester — measure check-in → counselor conversion</a:t>
+            </a:r>
+          </a:p>
+          <a:p>
+            <a:pPr>
+              <a:spcAft>
+                <a:spcPts val="1200"/>
+              </a:spcAft>
+            </a:pPr>
+            <a:r>
+              <a:rPr sz="1800">
+                <a:solidFill>
+                  <a:srgbClr val="FFFFFF"/>
+                </a:solidFill>
+                <a:latin typeface="Calibri"/>
+              </a:rPr>
+              <a:t>• Partnership intro to a telehealth/counselor network for the shared pool</a:t>
+            </a:r>
+          </a:p>
+          <a:p>
+            <a:pPr>
+              <a:spcAft>
+                <a:spcPts val="1200"/>
+              </a:spcAft>
+            </a:pPr>
+            <a:r>
+              <a:rPr sz="1800">
+                <a:solidFill>
+                  <a:srgbClr val="FFFFFF"/>
+                </a:solidFill>
+                <a:latin typeface="Calibri"/>
+              </a:rPr>
+              <a:t>• Mentorship on campus wellness-fund / CSR funding path</a:t>
+            </a:r>
+          </a:p>
+        </p:txBody>
+      </p:sp>
+      <p:sp>
+        <p:nvSpPr>
+          <p:cNvPr id="5" name="Rectangle 4"/>
+          <p:cNvSpPr/>
+          <p:nvPr/>
+        </p:nvSpPr>
+        <p:spPr>
+          <a:xfrm>
+            <a:off x="731520" y="4389120"/>
+            <a:ext cx="10698480" cy="1463040"/>
+          </a:xfrm>
+          <a:prstGeom prst="rect">
+            <a:avLst/>
+          </a:prstGeom>
+          <a:solidFill>
+            <a:srgbClr val="0B7D6C"/>
+          </a:solidFill>
+          <a:ln>
+            <a:noFill/>
+          </a:ln>
+          <a:effectLst/>
+        </p:spPr>
+        <p:style>
+          <a:lnRef idx="1">
+            <a:schemeClr val="accent1"/>
+          </a:lnRef>
+          <a:fillRef idx="3">
+            <a:schemeClr val="accent1"/>
+          </a:fillRef>
+          <a:effectRef idx="2">
+            <a:schemeClr val="accent1"/>
+          </a:effectRef>
+          <a:fontRef idx="minor">
+            <a:schemeClr val="lt1"/>
+          </a:fontRef>
+        </p:style>
+        <p:txBody>
+          <a:bodyPr rtlCol="0" anchor="ctr"/>
+          <a:lstStyle/>
+          <a:p>
+            <a:pPr algn="ctr"/>
+          </a:p>
+        </p:txBody>
+      </p:sp>
+      <p:sp>
+        <p:nvSpPr>
+          <p:cNvPr id="6" name="TextBox 5"/>
+          <p:cNvSpPr txBox="1"/>
+          <p:nvPr/>
+        </p:nvSpPr>
+        <p:spPr>
+          <a:xfrm>
+            <a:off x="914400" y="4526280"/>
+            <a:ext cx="10332720" cy="1188720"/>
+          </a:xfrm>
+          <a:prstGeom prst="rect">
+            <a:avLst/>
+          </a:prstGeom>
+          <a:noFill/>
+        </p:spPr>
+        <p:txBody>
+          <a:bodyPr wrap="square" anchor="ctr">
+            <a:spAutoFit/>
+          </a:bodyPr>
+          <a:lstStyle/>
+          <a:p>
+            <a:pPr algn="l"/>
+            <a:r>
               <a:rPr sz="2000" b="1">
                 <a:solidFill>
                   <a:srgbClr val="FFFFFF"/>
                 </a:solidFill>
                 <a:latin typeface="Calibri"/>
               </a:rPr>
-              <a:t>MANNMITRA — मन मित्र. A friend for your mind.
+              <a:t>MANNMITRA — मन मित्‍र. A friend for your mind.
 Light first step. Real trust. No dead ends.</a:t>
             </a:r>
           </a:p>
@@ -5439,7 +7058,7 @@
                 </a:solidFill>
                 <a:latin typeface="Calibri"/>
               </a:rPr>
-              <a:t>Live Demo Flow</a:t>
+              <a:t>Full Product — What's Inside</a:t>
             </a:r>
           </a:p>
         </p:txBody>
@@ -5474,140 +7093,21 @@
                 </a:solidFill>
                 <a:latin typeface="Calibri"/>
               </a:rPr>
-              <a:t>60-SECOND CLICKABLE STORY</a:t>
-            </a:r>
-          </a:p>
-        </p:txBody>
-      </p:sp>
-      <p:sp>
-        <p:nvSpPr>
-          <p:cNvPr id="6" name="TextBox 5"/>
-          <p:cNvSpPr txBox="1"/>
-          <p:nvPr/>
-        </p:nvSpPr>
-        <p:spPr>
-          <a:xfrm>
-            <a:off x="640080" y="1828800"/>
-            <a:ext cx="6583680" cy="4572000"/>
-          </a:xfrm>
-          <a:prstGeom prst="rect">
-            <a:avLst/>
-          </a:prstGeom>
-          <a:noFill/>
-        </p:spPr>
-        <p:txBody>
-          <a:bodyPr wrap="square">
-            <a:spAutoFit/>
-          </a:bodyPr>
-          <a:lstStyle/>
-          <a:p>
-            <a:pPr>
-              <a:spcAft>
-                <a:spcPts val="1200"/>
-              </a:spcAft>
-            </a:pPr>
-            <a:r>
-              <a:rPr sz="1800">
-                <a:solidFill>
-                  <a:srgbClr val="1F2A2E"/>
-                </a:solidFill>
-                <a:latin typeface="Calibri"/>
-              </a:rPr>
-              <a:t>• Landing → 'Start anonymously' (no signup)</a:t>
-            </a:r>
-          </a:p>
-          <a:p>
-            <a:pPr>
-              <a:spcAft>
-                <a:spcPts val="1200"/>
-              </a:spcAft>
-            </a:pPr>
-            <a:r>
-              <a:rPr sz="1800">
-                <a:solidFill>
-                  <a:srgbClr val="1F2A2E"/>
-                </a:solidFill>
-                <a:latin typeface="Calibri"/>
-              </a:rPr>
-              <a:t>• Mood slider + 3 questions → rule-based triage</a:t>
-            </a:r>
-          </a:p>
-          <a:p>
-            <a:pPr>
-              <a:spcAft>
-                <a:spcPts val="1200"/>
-              </a:spcAft>
-            </a:pPr>
-            <a:r>
-              <a:rPr sz="1800">
-                <a:solidFill>
-                  <a:srgbClr val="1F2A2E"/>
-                </a:solidFill>
-                <a:latin typeface="Calibri"/>
-              </a:rPr>
-              <a:t>• Low/medium → routed to Peer Support room</a:t>
-            </a:r>
-          </a:p>
-          <a:p>
-            <a:pPr>
-              <a:spcAft>
-                <a:spcPts val="1200"/>
-              </a:spcAft>
-            </a:pPr>
-            <a:r>
-              <a:rPr sz="1800">
-                <a:solidFill>
-                  <a:srgbClr val="1F2A2E"/>
-                </a:solidFill>
-                <a:latin typeface="Calibri"/>
-              </a:rPr>
-              <a:t>• Type a risk phrase → Crisis overlay auto-triggers</a:t>
-            </a:r>
-          </a:p>
-          <a:p>
-            <a:pPr>
-              <a:spcAft>
-                <a:spcPts val="1200"/>
-              </a:spcAft>
-            </a:pPr>
-            <a:r>
-              <a:rPr sz="1800">
-                <a:solidFill>
-                  <a:srgbClr val="1F2A2E"/>
-                </a:solidFill>
-                <a:latin typeface="Calibri"/>
-              </a:rPr>
-              <a:t>• Crisis page → one-tap Tele-MANAS / iCall / Vandrevala</a:t>
-            </a:r>
-          </a:p>
-          <a:p>
-            <a:pPr>
-              <a:spcAft>
-                <a:spcPts val="1200"/>
-              </a:spcAft>
-            </a:pPr>
-            <a:r>
-              <a:rPr sz="1800">
-                <a:solidFill>
-                  <a:srgbClr val="1F2A2E"/>
-                </a:solidFill>
-                <a:latin typeface="Calibri"/>
-              </a:rPr>
-              <a:t>• Privacy page → anonymous ID, zero faculty/parent view</a:t>
-            </a:r>
-          </a:p>
-        </p:txBody>
-      </p:sp>
-      <p:sp>
-        <p:nvSpPr>
-          <p:cNvPr id="7" name="Rectangle 6"/>
+              <a:t>ONE PROTOTYPE, MANY SURFACES</a:t>
+            </a:r>
+          </a:p>
+        </p:txBody>
+      </p:sp>
+      <p:sp>
+        <p:nvSpPr>
+          <p:cNvPr id="6" name="Rectangle 5"/>
           <p:cNvSpPr/>
           <p:nvPr/>
         </p:nvSpPr>
         <p:spPr>
           <a:xfrm>
-            <a:off x="7680960" y="1828800"/>
-            <a:ext cx="3931920" cy="4206240"/>
+            <a:off x="457200" y="1691640"/>
+            <a:ext cx="5577840" cy="603504"/>
           </a:xfrm>
           <a:prstGeom prst="rect">
             <a:avLst/>
@@ -5644,14 +7144,14 @@
       </p:sp>
       <p:sp>
         <p:nvSpPr>
-          <p:cNvPr id="8" name="TextBox 7"/>
+          <p:cNvPr id="7" name="TextBox 6"/>
           <p:cNvSpPr txBox="1"/>
           <p:nvPr/>
         </p:nvSpPr>
         <p:spPr>
           <a:xfrm>
-            <a:off x="7863840" y="2011680"/>
-            <a:ext cx="3566160" cy="457200"/>
+            <a:off x="566928" y="1728216"/>
+            <a:ext cx="5394960" cy="548640"/>
           </a:xfrm>
           <a:prstGeom prst="rect">
             <a:avLst/>
@@ -5659,21 +7159,65 @@
           <a:noFill/>
         </p:spPr>
         <p:txBody>
-          <a:bodyPr wrap="square" anchor="t">
+          <a:bodyPr wrap="square" anchor="ctr">
             <a:spAutoFit/>
           </a:bodyPr>
           <a:lstStyle/>
           <a:p>
             <a:pPr algn="l"/>
             <a:r>
-              <a:rPr sz="1600" b="1">
-                <a:solidFill>
-                  <a:srgbClr val="0B7D6C"/>
-                </a:solidFill>
-                <a:latin typeface="Calibri"/>
-              </a:rPr>
-              <a:t>Try it live:</a:t>
-            </a:r>
+              <a:rPr sz="1300" b="0">
+                <a:solidFill>
+                  <a:srgbClr val="1F2A2E"/>
+                </a:solidFill>
+                <a:latin typeface="Calibri"/>
+              </a:rPr>
+              <a:t>🤖 AI triage  —  mood + 3 Q's → severity &amp; routing (LLM-ready)</a:t>
+            </a:r>
+          </a:p>
+        </p:txBody>
+      </p:sp>
+      <p:sp>
+        <p:nvSpPr>
+          <p:cNvPr id="8" name="Rectangle 7"/>
+          <p:cNvSpPr/>
+          <p:nvPr/>
+        </p:nvSpPr>
+        <p:spPr>
+          <a:xfrm>
+            <a:off x="457200" y="2404872"/>
+            <a:ext cx="5577840" cy="603504"/>
+          </a:xfrm>
+          <a:prstGeom prst="rect">
+            <a:avLst/>
+          </a:prstGeom>
+          <a:solidFill>
+            <a:srgbClr val="FDF8F1"/>
+          </a:solidFill>
+          <a:ln>
+            <a:noFill/>
+          </a:ln>
+          <a:effectLst/>
+        </p:spPr>
+        <p:style>
+          <a:lnRef idx="1">
+            <a:schemeClr val="accent1"/>
+          </a:lnRef>
+          <a:fillRef idx="3">
+            <a:schemeClr val="accent1"/>
+          </a:fillRef>
+          <a:effectRef idx="2">
+            <a:schemeClr val="accent1"/>
+          </a:effectRef>
+          <a:fontRef idx="minor">
+            <a:schemeClr val="lt1"/>
+          </a:fontRef>
+        </p:style>
+        <p:txBody>
+          <a:bodyPr rtlCol="0" anchor="ctr"/>
+          <a:lstStyle/>
+          <a:p>
+            <a:pPr algn="ctr"/>
           </a:p>
         </p:txBody>
       </p:sp>
@@ -5685,8 +7229,8 @@
         </p:nvSpPr>
         <p:spPr>
           <a:xfrm>
-            <a:off x="7863840" y="2560320"/>
-            <a:ext cx="3566160" cy="3291840"/>
+            <a:off x="566928" y="2441448"/>
+            <a:ext cx="5394960" cy="548640"/>
           </a:xfrm>
           <a:prstGeom prst="rect">
             <a:avLst/>
@@ -5694,7 +7238,7 @@
           <a:noFill/>
         </p:spPr>
         <p:txBody>
-          <a:bodyPr wrap="square" anchor="t">
+          <a:bodyPr wrap="square" anchor="ctr">
             <a:spAutoFit/>
           </a:bodyPr>
           <a:lstStyle/>
@@ -5707,12 +7251,797 @@
                 </a:solidFill>
                 <a:latin typeface="Calibri"/>
               </a:rPr>
-              <a:t>Open index.html → checkin.html
-The triage engine (triage.js) is a pure function:
-score({mood, text, answers})
-  → severity: low | medium | high
-  → route: self | peer | crisis
-Same interface a real LLM slots into later.</a:t>
+              <a:t>🤝 Peer support  —  anonymous rooms + 1:1 listener + chat</a:t>
+            </a:r>
+          </a:p>
+        </p:txBody>
+      </p:sp>
+      <p:sp>
+        <p:nvSpPr>
+          <p:cNvPr id="10" name="Rectangle 9"/>
+          <p:cNvSpPr/>
+          <p:nvPr/>
+        </p:nvSpPr>
+        <p:spPr>
+          <a:xfrm>
+            <a:off x="457200" y="3118104"/>
+            <a:ext cx="5577840" cy="603504"/>
+          </a:xfrm>
+          <a:prstGeom prst="rect">
+            <a:avLst/>
+          </a:prstGeom>
+          <a:solidFill>
+            <a:srgbClr val="FDF8F1"/>
+          </a:solidFill>
+          <a:ln>
+            <a:noFill/>
+          </a:ln>
+          <a:effectLst/>
+        </p:spPr>
+        <p:style>
+          <a:lnRef idx="1">
+            <a:schemeClr val="accent1"/>
+          </a:lnRef>
+          <a:fillRef idx="3">
+            <a:schemeClr val="accent1"/>
+          </a:fillRef>
+          <a:effectRef idx="2">
+            <a:schemeClr val="accent1"/>
+          </a:effectRef>
+          <a:fontRef idx="minor">
+            <a:schemeClr val="lt1"/>
+          </a:fontRef>
+        </p:style>
+        <p:txBody>
+          <a:bodyPr rtlCol="0" anchor="ctr"/>
+          <a:lstStyle/>
+          <a:p>
+            <a:pPr algn="ctr"/>
+          </a:p>
+        </p:txBody>
+      </p:sp>
+      <p:sp>
+        <p:nvSpPr>
+          <p:cNvPr id="11" name="TextBox 10"/>
+          <p:cNvSpPr txBox="1"/>
+          <p:nvPr/>
+        </p:nvSpPr>
+        <p:spPr>
+          <a:xfrm>
+            <a:off x="566928" y="3154680"/>
+            <a:ext cx="5394960" cy="548640"/>
+          </a:xfrm>
+          <a:prstGeom prst="rect">
+            <a:avLst/>
+          </a:prstGeom>
+          <a:noFill/>
+        </p:spPr>
+        <p:txBody>
+          <a:bodyPr wrap="square" anchor="ctr">
+            <a:spAutoFit/>
+          </a:bodyPr>
+          <a:lstStyle/>
+          <a:p>
+            <a:pPr algn="l"/>
+            <a:r>
+              <a:rPr sz="1300" b="0">
+                <a:solidFill>
+                  <a:srgbClr val="1F2A2E"/>
+                </a:solidFill>
+                <a:latin typeface="Calibri"/>
+              </a:rPr>
+              <a:t>🎨 Dashboard  —  mood chart, streak, badges, insights</a:t>
+            </a:r>
+          </a:p>
+        </p:txBody>
+      </p:sp>
+      <p:sp>
+        <p:nvSpPr>
+          <p:cNvPr id="12" name="Rectangle 11"/>
+          <p:cNvSpPr/>
+          <p:nvPr/>
+        </p:nvSpPr>
+        <p:spPr>
+          <a:xfrm>
+            <a:off x="457200" y="3831336"/>
+            <a:ext cx="5577840" cy="603504"/>
+          </a:xfrm>
+          <a:prstGeom prst="rect">
+            <a:avLst/>
+          </a:prstGeom>
+          <a:solidFill>
+            <a:srgbClr val="FDF8F1"/>
+          </a:solidFill>
+          <a:ln>
+            <a:noFill/>
+          </a:ln>
+          <a:effectLst/>
+        </p:spPr>
+        <p:style>
+          <a:lnRef idx="1">
+            <a:schemeClr val="accent1"/>
+          </a:lnRef>
+          <a:fillRef idx="3">
+            <a:schemeClr val="accent1"/>
+          </a:fillRef>
+          <a:effectRef idx="2">
+            <a:schemeClr val="accent1"/>
+          </a:effectRef>
+          <a:fontRef idx="minor">
+            <a:schemeClr val="lt1"/>
+          </a:fontRef>
+        </p:style>
+        <p:txBody>
+          <a:bodyPr rtlCol="0" anchor="ctr"/>
+          <a:lstStyle/>
+          <a:p>
+            <a:pPr algn="ctr"/>
+          </a:p>
+        </p:txBody>
+      </p:sp>
+      <p:sp>
+        <p:nvSpPr>
+          <p:cNvPr id="13" name="TextBox 12"/>
+          <p:cNvSpPr txBox="1"/>
+          <p:nvPr/>
+        </p:nvSpPr>
+        <p:spPr>
+          <a:xfrm>
+            <a:off x="566928" y="3867912"/>
+            <a:ext cx="5394960" cy="548640"/>
+          </a:xfrm>
+          <a:prstGeom prst="rect">
+            <a:avLst/>
+          </a:prstGeom>
+          <a:noFill/>
+        </p:spPr>
+        <p:txBody>
+          <a:bodyPr wrap="square" anchor="ctr">
+            <a:spAutoFit/>
+          </a:bodyPr>
+          <a:lstStyle/>
+          <a:p>
+            <a:pPr algn="l"/>
+            <a:r>
+              <a:rPr sz="1300" b="0">
+                <a:solidFill>
+                  <a:srgbClr val="1F2A2E"/>
+                </a:solidFill>
+                <a:latin typeface="Calibri"/>
+              </a:rPr>
+              <a:t>📝 Journal &amp; 🫂 CBT  —  private entries + thought record</a:t>
+            </a:r>
+          </a:p>
+        </p:txBody>
+      </p:sp>
+      <p:sp>
+        <p:nvSpPr>
+          <p:cNvPr id="14" name="Rectangle 13"/>
+          <p:cNvSpPr/>
+          <p:nvPr/>
+        </p:nvSpPr>
+        <p:spPr>
+          <a:xfrm>
+            <a:off x="457200" y="4544568"/>
+            <a:ext cx="5577840" cy="603504"/>
+          </a:xfrm>
+          <a:prstGeom prst="rect">
+            <a:avLst/>
+          </a:prstGeom>
+          <a:solidFill>
+            <a:srgbClr val="FDF8F1"/>
+          </a:solidFill>
+          <a:ln>
+            <a:noFill/>
+          </a:ln>
+          <a:effectLst/>
+        </p:spPr>
+        <p:style>
+          <a:lnRef idx="1">
+            <a:schemeClr val="accent1"/>
+          </a:lnRef>
+          <a:fillRef idx="3">
+            <a:schemeClr val="accent1"/>
+          </a:fillRef>
+          <a:effectRef idx="2">
+            <a:schemeClr val="accent1"/>
+          </a:effectRef>
+          <a:fontRef idx="minor">
+            <a:schemeClr val="lt1"/>
+          </a:fontRef>
+        </p:style>
+        <p:txBody>
+          <a:bodyPr rtlCol="0" anchor="ctr"/>
+          <a:lstStyle/>
+          <a:p>
+            <a:pPr algn="ctr"/>
+          </a:p>
+        </p:txBody>
+      </p:sp>
+      <p:sp>
+        <p:nvSpPr>
+          <p:cNvPr id="15" name="TextBox 14"/>
+          <p:cNvSpPr txBox="1"/>
+          <p:nvPr/>
+        </p:nvSpPr>
+        <p:spPr>
+          <a:xfrm>
+            <a:off x="566928" y="4581144"/>
+            <a:ext cx="5394960" cy="548640"/>
+          </a:xfrm>
+          <a:prstGeom prst="rect">
+            <a:avLst/>
+          </a:prstGeom>
+          <a:noFill/>
+        </p:spPr>
+        <p:txBody>
+          <a:bodyPr wrap="square" anchor="ctr">
+            <a:spAutoFit/>
+          </a:bodyPr>
+          <a:lstStyle/>
+          <a:p>
+            <a:pPr algn="l"/>
+            <a:r>
+              <a:rPr sz="1300" b="0">
+                <a:solidFill>
+                  <a:srgbClr val="1F2A2E"/>
+                </a:solidFill>
+                <a:latin typeface="Calibri"/>
+              </a:rPr>
+              <a:t>🧭 Breathing  —  animated 4-4-4-4 box breathing</a:t>
+            </a:r>
+          </a:p>
+        </p:txBody>
+      </p:sp>
+      <p:sp>
+        <p:nvSpPr>
+          <p:cNvPr id="16" name="Rectangle 15"/>
+          <p:cNvSpPr/>
+          <p:nvPr/>
+        </p:nvSpPr>
+        <p:spPr>
+          <a:xfrm>
+            <a:off x="457200" y="5257800"/>
+            <a:ext cx="5577840" cy="603504"/>
+          </a:xfrm>
+          <a:prstGeom prst="rect">
+            <a:avLst/>
+          </a:prstGeom>
+          <a:solidFill>
+            <a:srgbClr val="FDF8F1"/>
+          </a:solidFill>
+          <a:ln>
+            <a:noFill/>
+          </a:ln>
+          <a:effectLst/>
+        </p:spPr>
+        <p:style>
+          <a:lnRef idx="1">
+            <a:schemeClr val="accent1"/>
+          </a:lnRef>
+          <a:fillRef idx="3">
+            <a:schemeClr val="accent1"/>
+          </a:fillRef>
+          <a:effectRef idx="2">
+            <a:schemeClr val="accent1"/>
+          </a:effectRef>
+          <a:fontRef idx="minor">
+            <a:schemeClr val="lt1"/>
+          </a:fontRef>
+        </p:style>
+        <p:txBody>
+          <a:bodyPr rtlCol="0" anchor="ctr"/>
+          <a:lstStyle/>
+          <a:p>
+            <a:pPr algn="ctr"/>
+          </a:p>
+        </p:txBody>
+      </p:sp>
+      <p:sp>
+        <p:nvSpPr>
+          <p:cNvPr id="17" name="TextBox 16"/>
+          <p:cNvSpPr txBox="1"/>
+          <p:nvPr/>
+        </p:nvSpPr>
+        <p:spPr>
+          <a:xfrm>
+            <a:off x="566928" y="5294376"/>
+            <a:ext cx="5394960" cy="548640"/>
+          </a:xfrm>
+          <a:prstGeom prst="rect">
+            <a:avLst/>
+          </a:prstGeom>
+          <a:noFill/>
+        </p:spPr>
+        <p:txBody>
+          <a:bodyPr wrap="square" anchor="ctr">
+            <a:spAutoFit/>
+          </a:bodyPr>
+          <a:lstStyle/>
+          <a:p>
+            <a:pPr algn="l"/>
+            <a:r>
+              <a:rPr sz="1300" b="0">
+                <a:solidFill>
+                  <a:srgbClr val="1F2A2E"/>
+                </a:solidFill>
+                <a:latin typeface="Calibri"/>
+              </a:rPr>
+              <a:t>💬 Community  —  anonymous feed + kind reactions</a:t>
+            </a:r>
+          </a:p>
+        </p:txBody>
+      </p:sp>
+      <p:sp>
+        <p:nvSpPr>
+          <p:cNvPr id="18" name="Rectangle 17"/>
+          <p:cNvSpPr/>
+          <p:nvPr/>
+        </p:nvSpPr>
+        <p:spPr>
+          <a:xfrm>
+            <a:off x="6309360" y="1691640"/>
+            <a:ext cx="5577840" cy="603504"/>
+          </a:xfrm>
+          <a:prstGeom prst="rect">
+            <a:avLst/>
+          </a:prstGeom>
+          <a:solidFill>
+            <a:srgbClr val="FDF8F1"/>
+          </a:solidFill>
+          <a:ln>
+            <a:noFill/>
+          </a:ln>
+          <a:effectLst/>
+        </p:spPr>
+        <p:style>
+          <a:lnRef idx="1">
+            <a:schemeClr val="accent1"/>
+          </a:lnRef>
+          <a:fillRef idx="3">
+            <a:schemeClr val="accent1"/>
+          </a:fillRef>
+          <a:effectRef idx="2">
+            <a:schemeClr val="accent1"/>
+          </a:effectRef>
+          <a:fontRef idx="minor">
+            <a:schemeClr val="lt1"/>
+          </a:fontRef>
+        </p:style>
+        <p:txBody>
+          <a:bodyPr rtlCol="0" anchor="ctr"/>
+          <a:lstStyle/>
+          <a:p>
+            <a:pPr algn="ctr"/>
+          </a:p>
+        </p:txBody>
+      </p:sp>
+      <p:sp>
+        <p:nvSpPr>
+          <p:cNvPr id="19" name="TextBox 18"/>
+          <p:cNvSpPr txBox="1"/>
+          <p:nvPr/>
+        </p:nvSpPr>
+        <p:spPr>
+          <a:xfrm>
+            <a:off x="6419088" y="1728216"/>
+            <a:ext cx="5394960" cy="548640"/>
+          </a:xfrm>
+          <a:prstGeom prst="rect">
+            <a:avLst/>
+          </a:prstGeom>
+          <a:noFill/>
+        </p:spPr>
+        <p:txBody>
+          <a:bodyPr wrap="square" anchor="ctr">
+            <a:spAutoFit/>
+          </a:bodyPr>
+          <a:lstStyle/>
+          <a:p>
+            <a:pPr algn="l"/>
+            <a:r>
+              <a:rPr sz="1300" b="0">
+                <a:solidFill>
+                  <a:srgbClr val="1F2A2E"/>
+                </a:solidFill>
+                <a:latin typeface="Calibri"/>
+              </a:rPr>
+              <a:t>🚨 SOS button  —  hold-to-call → crisis overlay</a:t>
+            </a:r>
+          </a:p>
+        </p:txBody>
+      </p:sp>
+      <p:sp>
+        <p:nvSpPr>
+          <p:cNvPr id="20" name="Rectangle 19"/>
+          <p:cNvSpPr/>
+          <p:nvPr/>
+        </p:nvSpPr>
+        <p:spPr>
+          <a:xfrm>
+            <a:off x="6309360" y="2404872"/>
+            <a:ext cx="5577840" cy="603504"/>
+          </a:xfrm>
+          <a:prstGeom prst="rect">
+            <a:avLst/>
+          </a:prstGeom>
+          <a:solidFill>
+            <a:srgbClr val="FDF8F1"/>
+          </a:solidFill>
+          <a:ln>
+            <a:noFill/>
+          </a:ln>
+          <a:effectLst/>
+        </p:spPr>
+        <p:style>
+          <a:lnRef idx="1">
+            <a:schemeClr val="accent1"/>
+          </a:lnRef>
+          <a:fillRef idx="3">
+            <a:schemeClr val="accent1"/>
+          </a:fillRef>
+          <a:effectRef idx="2">
+            <a:schemeClr val="accent1"/>
+          </a:effectRef>
+          <a:fontRef idx="minor">
+            <a:schemeClr val="lt1"/>
+          </a:fontRef>
+        </p:style>
+        <p:txBody>
+          <a:bodyPr rtlCol="0" anchor="ctr"/>
+          <a:lstStyle/>
+          <a:p>
+            <a:pPr algn="ctr"/>
+          </a:p>
+        </p:txBody>
+      </p:sp>
+      <p:sp>
+        <p:nvSpPr>
+          <p:cNvPr id="21" name="TextBox 20"/>
+          <p:cNvSpPr txBox="1"/>
+          <p:nvPr/>
+        </p:nvSpPr>
+        <p:spPr>
+          <a:xfrm>
+            <a:off x="6419088" y="2441448"/>
+            <a:ext cx="5394960" cy="548640"/>
+          </a:xfrm>
+          <a:prstGeom prst="rect">
+            <a:avLst/>
+          </a:prstGeom>
+          <a:noFill/>
+        </p:spPr>
+        <p:txBody>
+          <a:bodyPr wrap="square" anchor="ctr">
+            <a:spAutoFit/>
+          </a:bodyPr>
+          <a:lstStyle/>
+          <a:p>
+            <a:pPr algn="l"/>
+            <a:r>
+              <a:rPr sz="1300" b="0">
+                <a:solidFill>
+                  <a:srgbClr val="1F2A2E"/>
+                </a:solidFill>
+                <a:latin typeface="Calibri"/>
+              </a:rPr>
+              <a:t>🧑 Counselor + Admin  —  shared pool, anon ledger, impact</a:t>
+            </a:r>
+          </a:p>
+        </p:txBody>
+      </p:sp>
+      <p:sp>
+        <p:nvSpPr>
+          <p:cNvPr id="22" name="Rectangle 21"/>
+          <p:cNvSpPr/>
+          <p:nvPr/>
+        </p:nvSpPr>
+        <p:spPr>
+          <a:xfrm>
+            <a:off x="6309360" y="3118104"/>
+            <a:ext cx="5577840" cy="603504"/>
+          </a:xfrm>
+          <a:prstGeom prst="rect">
+            <a:avLst/>
+          </a:prstGeom>
+          <a:solidFill>
+            <a:srgbClr val="FDF8F1"/>
+          </a:solidFill>
+          <a:ln>
+            <a:noFill/>
+          </a:ln>
+          <a:effectLst/>
+        </p:spPr>
+        <p:style>
+          <a:lnRef idx="1">
+            <a:schemeClr val="accent1"/>
+          </a:lnRef>
+          <a:fillRef idx="3">
+            <a:schemeClr val="accent1"/>
+          </a:fillRef>
+          <a:effectRef idx="2">
+            <a:schemeClr val="accent1"/>
+          </a:effectRef>
+          <a:fontRef idx="minor">
+            <a:schemeClr val="lt1"/>
+          </a:fontRef>
+        </p:style>
+        <p:txBody>
+          <a:bodyPr rtlCol="0" anchor="ctr"/>
+          <a:lstStyle/>
+          <a:p>
+            <a:pPr algn="ctr"/>
+          </a:p>
+        </p:txBody>
+      </p:sp>
+      <p:sp>
+        <p:nvSpPr>
+          <p:cNvPr id="23" name="TextBox 22"/>
+          <p:cNvSpPr txBox="1"/>
+          <p:nvPr/>
+        </p:nvSpPr>
+        <p:spPr>
+          <a:xfrm>
+            <a:off x="6419088" y="3154680"/>
+            <a:ext cx="5394960" cy="548640"/>
+          </a:xfrm>
+          <a:prstGeom prst="rect">
+            <a:avLst/>
+          </a:prstGeom>
+          <a:noFill/>
+        </p:spPr>
+        <p:txBody>
+          <a:bodyPr wrap="square" anchor="ctr">
+            <a:spAutoFit/>
+          </a:bodyPr>
+          <a:lstStyle/>
+          <a:p>
+            <a:pPr algn="l"/>
+            <a:r>
+              <a:rPr sz="1300" b="0">
+                <a:solidFill>
+                  <a:srgbClr val="1F2A2E"/>
+                </a:solidFill>
+                <a:latin typeface="Calibri"/>
+              </a:rPr>
+              <a:t>🌍 i18n EN/HI/MR/GU  —  language switch across app</a:t>
+            </a:r>
+          </a:p>
+        </p:txBody>
+      </p:sp>
+      <p:sp>
+        <p:nvSpPr>
+          <p:cNvPr id="24" name="Rectangle 23"/>
+          <p:cNvSpPr/>
+          <p:nvPr/>
+        </p:nvSpPr>
+        <p:spPr>
+          <a:xfrm>
+            <a:off x="6309360" y="3831336"/>
+            <a:ext cx="5577840" cy="603504"/>
+          </a:xfrm>
+          <a:prstGeom prst="rect">
+            <a:avLst/>
+          </a:prstGeom>
+          <a:solidFill>
+            <a:srgbClr val="FDF8F1"/>
+          </a:solidFill>
+          <a:ln>
+            <a:noFill/>
+          </a:ln>
+          <a:effectLst/>
+        </p:spPr>
+        <p:style>
+          <a:lnRef idx="1">
+            <a:schemeClr val="accent1"/>
+          </a:lnRef>
+          <a:fillRef idx="3">
+            <a:schemeClr val="accent1"/>
+          </a:fillRef>
+          <a:effectRef idx="2">
+            <a:schemeClr val="accent1"/>
+          </a:effectRef>
+          <a:fontRef idx="minor">
+            <a:schemeClr val="lt1"/>
+          </a:fontRef>
+        </p:style>
+        <p:txBody>
+          <a:bodyPr rtlCol="0" anchor="ctr"/>
+          <a:lstStyle/>
+          <a:p>
+            <a:pPr algn="ctr"/>
+          </a:p>
+        </p:txBody>
+      </p:sp>
+      <p:sp>
+        <p:nvSpPr>
+          <p:cNvPr id="25" name="TextBox 24"/>
+          <p:cNvSpPr txBox="1"/>
+          <p:nvPr/>
+        </p:nvSpPr>
+        <p:spPr>
+          <a:xfrm>
+            <a:off x="6419088" y="3867912"/>
+            <a:ext cx="5394960" cy="548640"/>
+          </a:xfrm>
+          <a:prstGeom prst="rect">
+            <a:avLst/>
+          </a:prstGeom>
+          <a:noFill/>
+        </p:spPr>
+        <p:txBody>
+          <a:bodyPr wrap="square" anchor="ctr">
+            <a:spAutoFit/>
+          </a:bodyPr>
+          <a:lstStyle/>
+          <a:p>
+            <a:pPr algn="l"/>
+            <a:r>
+              <a:rPr sz="1300" b="0">
+                <a:solidFill>
+                  <a:srgbClr val="1F2A2E"/>
+                </a:solidFill>
+                <a:latin typeface="Calibri"/>
+              </a:rPr>
+              <a:t>🌙 Dark + Contrast  —  themes persisted locally</a:t>
+            </a:r>
+          </a:p>
+        </p:txBody>
+      </p:sp>
+      <p:sp>
+        <p:nvSpPr>
+          <p:cNvPr id="26" name="Rectangle 25"/>
+          <p:cNvSpPr/>
+          <p:nvPr/>
+        </p:nvSpPr>
+        <p:spPr>
+          <a:xfrm>
+            <a:off x="6309360" y="4544568"/>
+            <a:ext cx="5577840" cy="603504"/>
+          </a:xfrm>
+          <a:prstGeom prst="rect">
+            <a:avLst/>
+          </a:prstGeom>
+          <a:solidFill>
+            <a:srgbClr val="FDF8F1"/>
+          </a:solidFill>
+          <a:ln>
+            <a:noFill/>
+          </a:ln>
+          <a:effectLst/>
+        </p:spPr>
+        <p:style>
+          <a:lnRef idx="1">
+            <a:schemeClr val="accent1"/>
+          </a:lnRef>
+          <a:fillRef idx="3">
+            <a:schemeClr val="accent1"/>
+          </a:fillRef>
+          <a:effectRef idx="2">
+            <a:schemeClr val="accent1"/>
+          </a:effectRef>
+          <a:fontRef idx="minor">
+            <a:schemeClr val="lt1"/>
+          </a:fontRef>
+        </p:style>
+        <p:txBody>
+          <a:bodyPr rtlCol="0" anchor="ctr"/>
+          <a:lstStyle/>
+          <a:p>
+            <a:pPr algn="ctr"/>
+          </a:p>
+        </p:txBody>
+      </p:sp>
+      <p:sp>
+        <p:nvSpPr>
+          <p:cNvPr id="27" name="TextBox 26"/>
+          <p:cNvSpPr txBox="1"/>
+          <p:nvPr/>
+        </p:nvSpPr>
+        <p:spPr>
+          <a:xfrm>
+            <a:off x="6419088" y="4581144"/>
+            <a:ext cx="5394960" cy="548640"/>
+          </a:xfrm>
+          <a:prstGeom prst="rect">
+            <a:avLst/>
+          </a:prstGeom>
+          <a:noFill/>
+        </p:spPr>
+        <p:txBody>
+          <a:bodyPr wrap="square" anchor="ctr">
+            <a:spAutoFit/>
+          </a:bodyPr>
+          <a:lstStyle/>
+          <a:p>
+            <a:pPr algn="l"/>
+            <a:r>
+              <a:rPr sz="1300" b="0">
+                <a:solidFill>
+                  <a:srgbClr val="1F2A2E"/>
+                </a:solidFill>
+                <a:latin typeface="Calibri"/>
+              </a:rPr>
+              <a:t>🛡 Privacy + My Data  —  delete-all, admin-blind</a:t>
+            </a:r>
+          </a:p>
+        </p:txBody>
+      </p:sp>
+      <p:sp>
+        <p:nvSpPr>
+          <p:cNvPr id="28" name="Rectangle 27"/>
+          <p:cNvSpPr/>
+          <p:nvPr/>
+        </p:nvSpPr>
+        <p:spPr>
+          <a:xfrm>
+            <a:off x="6309360" y="5257800"/>
+            <a:ext cx="5577840" cy="603504"/>
+          </a:xfrm>
+          <a:prstGeom prst="rect">
+            <a:avLst/>
+          </a:prstGeom>
+          <a:solidFill>
+            <a:srgbClr val="FDF8F1"/>
+          </a:solidFill>
+          <a:ln>
+            <a:noFill/>
+          </a:ln>
+          <a:effectLst/>
+        </p:spPr>
+        <p:style>
+          <a:lnRef idx="1">
+            <a:schemeClr val="accent1"/>
+          </a:lnRef>
+          <a:fillRef idx="3">
+            <a:schemeClr val="accent1"/>
+          </a:fillRef>
+          <a:effectRef idx="2">
+            <a:schemeClr val="accent1"/>
+          </a:effectRef>
+          <a:fontRef idx="minor">
+            <a:schemeClr val="lt1"/>
+          </a:fontRef>
+        </p:style>
+        <p:txBody>
+          <a:bodyPr rtlCol="0" anchor="ctr"/>
+          <a:lstStyle/>
+          <a:p>
+            <a:pPr algn="ctr"/>
+          </a:p>
+        </p:txBody>
+      </p:sp>
+      <p:sp>
+        <p:nvSpPr>
+          <p:cNvPr id="29" name="TextBox 28"/>
+          <p:cNvSpPr txBox="1"/>
+          <p:nvPr/>
+        </p:nvSpPr>
+        <p:spPr>
+          <a:xfrm>
+            <a:off x="6419088" y="5294376"/>
+            <a:ext cx="5394960" cy="548640"/>
+          </a:xfrm>
+          <a:prstGeom prst="rect">
+            <a:avLst/>
+          </a:prstGeom>
+          <a:noFill/>
+        </p:spPr>
+        <p:txBody>
+          <a:bodyPr wrap="square" anchor="ctr">
+            <a:spAutoFit/>
+          </a:bodyPr>
+          <a:lstStyle/>
+          <a:p>
+            <a:pPr algn="l"/>
+            <a:r>
+              <a:rPr sz="1300" b="0">
+                <a:solidFill>
+                  <a:srgbClr val="1F2A2E"/>
+                </a:solidFill>
+                <a:latin typeface="Calibri"/>
+              </a:rPr>
+              <a:t>⚙ Gamification  —  streaks &amp; achievement badges</a:t>
             </a:r>
           </a:p>
         </p:txBody>
@@ -5853,7 +8182,7 @@
                 </a:solidFill>
                 <a:latin typeface="Calibri"/>
               </a:rPr>
-              <a:t>Architecture</a:t>
+              <a:t>Live Demo Flow</a:t>
             </a:r>
           </a:p>
         </p:txBody>
@@ -5888,7 +8217,7 @@
                 </a:solidFill>
                 <a:latin typeface="Calibri"/>
               </a:rPr>
-              <a:t>FROM DEMO TO PRODUCTION</a:t>
+              <a:t>60-SECOND CLICKABLE STORY</a:t>
             </a:r>
           </a:p>
         </p:txBody>
@@ -5901,8 +8230,8 @@
         </p:nvSpPr>
         <p:spPr>
           <a:xfrm>
-            <a:off x="548640" y="1737360"/>
-            <a:ext cx="5486400" cy="4572000"/>
+            <a:off x="640080" y="1828800"/>
+            <a:ext cx="6583680" cy="4572000"/>
           </a:xfrm>
           <a:prstGeom prst="rect">
             <a:avLst/>
@@ -5917,113 +8246,113 @@
           <a:p>
             <a:pPr>
               <a:spcAft>
-                <a:spcPts val="800"/>
+                <a:spcPts val="1100"/>
               </a:spcAft>
             </a:pPr>
             <a:r>
-              <a:rPr sz="1500">
+              <a:rPr sz="1600">
                 <a:solidFill>
                   <a:srgbClr val="1F2A2E"/>
                 </a:solidFill>
                 <a:latin typeface="Calibri"/>
               </a:rPr>
-              <a:t>• Client: HTML/JS pages + global Crisis Overlay</a:t>
+              <a:t>• Landing → 'Start anonymously' (no signup, onboarding tour)</a:t>
             </a:r>
           </a:p>
           <a:p>
             <a:pPr>
               <a:spcAft>
-                <a:spcPts val="800"/>
+                <a:spcPts val="1100"/>
               </a:spcAft>
             </a:pPr>
             <a:r>
-              <a:rPr sz="1500">
+              <a:rPr sz="1600">
                 <a:solidFill>
                   <a:srgbClr val="1F2A2E"/>
                 </a:solidFill>
                 <a:latin typeface="Calibri"/>
               </a:rPr>
-              <a:t>• Anonymous session store — zero PII (opaque anon_id)</a:t>
+              <a:t>• Mood slider + 3 questions → rule-based triage</a:t>
             </a:r>
           </a:p>
           <a:p>
             <a:pPr>
               <a:spcAft>
-                <a:spcPts val="800"/>
+                <a:spcPts val="1100"/>
               </a:spcAft>
             </a:pPr>
             <a:r>
-              <a:rPr sz="1500">
+              <a:rPr sz="1600">
                 <a:solidFill>
                   <a:srgbClr val="1F2A2E"/>
                 </a:solidFill>
                 <a:latin typeface="Calibri"/>
               </a:rPr>
-              <a:t>• 4 services: Triage · Peer Match · Booking · Crisis</a:t>
-            </a:r>
-          </a:p>
-          <a:p>
-            <a:pPr lvl="1">
+              <a:t>• Low/medium → routed to Peer Support room</a:t>
+            </a:r>
+          </a:p>
+          <a:p>
+            <a:pPr>
               <a:spcAft>
-                <a:spcPts val="800"/>
+                <a:spcPts val="1100"/>
               </a:spcAft>
             </a:pPr>
             <a:r>
-              <a:rPr sz="1500">
+              <a:rPr sz="1600">
                 <a:solidFill>
                   <a:srgbClr val="1F2A2E"/>
                 </a:solidFill>
                 <a:latin typeface="Calibri"/>
               </a:rPr>
-              <a:t>– Demo: rule-based triage + localStorage</a:t>
-            </a:r>
-          </a:p>
-          <a:p>
-            <a:pPr lvl="1">
+              <a:t>• Type a risk phrase → Crisis overlay auto-triggers</a:t>
+            </a:r>
+          </a:p>
+          <a:p>
+            <a:pPr>
               <a:spcAft>
-                <a:spcPts val="800"/>
+                <a:spcPts val="1100"/>
               </a:spcAft>
             </a:pPr>
             <a:r>
-              <a:rPr sz="1500">
+              <a:rPr sz="1600">
                 <a:solidFill>
                   <a:srgbClr val="1F2A2E"/>
                 </a:solidFill>
                 <a:latin typeface="Calibri"/>
               </a:rPr>
-              <a:t>– Prod: FastAPI + LLM (Gemini) behind score()</a:t>
+              <a:t>• SOS hold-to-call button → instant helplines</a:t>
             </a:r>
           </a:p>
           <a:p>
             <a:pPr>
               <a:spcAft>
-                <a:spcPts val="800"/>
+                <a:spcPts val="1100"/>
               </a:spcAft>
             </a:pPr>
             <a:r>
-              <a:rPr sz="1500">
+              <a:rPr sz="1600">
                 <a:solidFill>
                   <a:srgbClr val="1F2A2E"/>
                 </a:solidFill>
                 <a:latin typeface="Calibri"/>
               </a:rPr>
-              <a:t>• Data: hashed logs, TTL auto-delete, encrypted</a:t>
+              <a:t>• Dashboard: streak, badges, 'lowest on Monday' insight</a:t>
             </a:r>
           </a:p>
           <a:p>
             <a:pPr>
               <a:spcAft>
-                <a:spcPts val="800"/>
+                <a:spcPts val="1100"/>
               </a:spcAft>
             </a:pPr>
             <a:r>
-              <a:rPr sz="1500">
+              <a:rPr sz="1600">
                 <a:solidFill>
                   <a:srgbClr val="1F2A2E"/>
                 </a:solidFill>
                 <a:latin typeface="Calibri"/>
               </a:rPr>
-              <a:t>• Helpline registry: iCall / Vandrevala / Tele-MANAS</a:t>
+              <a:t>• CBT + Community + Counselor/Admin + Privacy 'My Data'</a:t>
             </a:r>
           </a:p>
         </p:txBody>
@@ -6036,8 +8365,8 @@
         </p:nvSpPr>
         <p:spPr>
           <a:xfrm>
-            <a:off x="6400800" y="1828800"/>
-            <a:ext cx="5212080" cy="4023360"/>
+            <a:off x="7680960" y="1828800"/>
+            <a:ext cx="3931920" cy="4206240"/>
           </a:xfrm>
           <a:prstGeom prst="rect">
             <a:avLst/>
@@ -6080,8 +8409,8 @@
         </p:nvSpPr>
         <p:spPr>
           <a:xfrm>
-            <a:off x="6583680" y="1965960"/>
-            <a:ext cx="4846320" cy="365760"/>
+            <a:off x="7863840" y="2011680"/>
+            <a:ext cx="3566160" cy="457200"/>
           </a:xfrm>
           <a:prstGeom prst="rect">
             <a:avLst/>
@@ -6102,65 +8431,21 @@
                 </a:solidFill>
                 <a:latin typeface="Calibri"/>
               </a:rPr>
-              <a:t>Trust Funnel</a:t>
-            </a:r>
-          </a:p>
-        </p:txBody>
-      </p:sp>
-      <p:sp>
-        <p:nvSpPr>
-          <p:cNvPr id="9" name="Rectangle 8"/>
-          <p:cNvSpPr/>
-          <p:nvPr/>
-        </p:nvSpPr>
-        <p:spPr>
-          <a:xfrm>
-            <a:off x="6675120" y="2468880"/>
-            <a:ext cx="4663440" cy="685800"/>
-          </a:xfrm>
-          <a:prstGeom prst="rect">
-            <a:avLst/>
-          </a:prstGeom>
-          <a:solidFill>
-            <a:srgbClr val="0F9B86"/>
-          </a:solidFill>
-          <a:ln>
-            <a:noFill/>
-          </a:ln>
-          <a:effectLst/>
-        </p:spPr>
-        <p:style>
-          <a:lnRef idx="1">
-            <a:schemeClr val="accent1"/>
-          </a:lnRef>
-          <a:fillRef idx="3">
-            <a:schemeClr val="accent1"/>
-          </a:fillRef>
-          <a:effectRef idx="2">
-            <a:schemeClr val="accent1"/>
-          </a:effectRef>
-          <a:fontRef idx="minor">
-            <a:schemeClr val="lt1"/>
-          </a:fontRef>
-        </p:style>
-        <p:txBody>
-          <a:bodyPr rtlCol="0" anchor="ctr"/>
-          <a:lstStyle/>
-          <a:p>
-            <a:pPr algn="ctr"/>
-          </a:p>
-        </p:txBody>
-      </p:sp>
-      <p:sp>
-        <p:nvSpPr>
-          <p:cNvPr id="10" name="TextBox 9"/>
+              <a:t>Try it live:</a:t>
+            </a:r>
+          </a:p>
+        </p:txBody>
+      </p:sp>
+      <p:sp>
+        <p:nvSpPr>
+          <p:cNvPr id="9" name="TextBox 8"/>
           <p:cNvSpPr txBox="1"/>
           <p:nvPr/>
         </p:nvSpPr>
         <p:spPr>
           <a:xfrm>
-            <a:off x="6858000" y="2468880"/>
-            <a:ext cx="4297680" cy="685800"/>
+            <a:off x="7863840" y="2560320"/>
+            <a:ext cx="3566160" cy="3291840"/>
           </a:xfrm>
           <a:prstGeom prst="rect">
             <a:avLst/>
@@ -6168,257 +8453,25 @@
           <a:noFill/>
         </p:spPr>
         <p:txBody>
-          <a:bodyPr wrap="square" anchor="ctr">
+          <a:bodyPr wrap="square" anchor="t">
             <a:spAutoFit/>
           </a:bodyPr>
           <a:lstStyle/>
           <a:p>
             <a:pPr algn="l"/>
             <a:r>
-              <a:rPr sz="1400" b="1">
-                <a:solidFill>
-                  <a:srgbClr val="FFFFFF"/>
-                </a:solidFill>
-                <a:latin typeface="Calibri"/>
-              </a:rPr>
-              <a:t>Browser (anon)</a:t>
-            </a:r>
-          </a:p>
-        </p:txBody>
-      </p:sp>
-      <p:sp>
-        <p:nvSpPr>
-          <p:cNvPr id="11" name="Rectangle 10"/>
-          <p:cNvSpPr/>
-          <p:nvPr/>
-        </p:nvSpPr>
-        <p:spPr>
-          <a:xfrm>
-            <a:off x="6675120" y="3337560"/>
-            <a:ext cx="4663440" cy="685800"/>
-          </a:xfrm>
-          <a:prstGeom prst="rect">
-            <a:avLst/>
-          </a:prstGeom>
-          <a:solidFill>
-            <a:srgbClr val="0B7D6C"/>
-          </a:solidFill>
-          <a:ln>
-            <a:noFill/>
-          </a:ln>
-          <a:effectLst/>
-        </p:spPr>
-        <p:style>
-          <a:lnRef idx="1">
-            <a:schemeClr val="accent1"/>
-          </a:lnRef>
-          <a:fillRef idx="3">
-            <a:schemeClr val="accent1"/>
-          </a:fillRef>
-          <a:effectRef idx="2">
-            <a:schemeClr val="accent1"/>
-          </a:effectRef>
-          <a:fontRef idx="minor">
-            <a:schemeClr val="lt1"/>
-          </a:fontRef>
-        </p:style>
-        <p:txBody>
-          <a:bodyPr rtlCol="0" anchor="ctr"/>
-          <a:lstStyle/>
-          <a:p>
-            <a:pPr algn="ctr"/>
-          </a:p>
-        </p:txBody>
-      </p:sp>
-      <p:sp>
-        <p:nvSpPr>
-          <p:cNvPr id="12" name="TextBox 11"/>
-          <p:cNvSpPr txBox="1"/>
-          <p:nvPr/>
-        </p:nvSpPr>
-        <p:spPr>
-          <a:xfrm>
-            <a:off x="6858000" y="3337560"/>
-            <a:ext cx="4297680" cy="685800"/>
-          </a:xfrm>
-          <a:prstGeom prst="rect">
-            <a:avLst/>
-          </a:prstGeom>
-          <a:noFill/>
-        </p:spPr>
-        <p:txBody>
-          <a:bodyPr wrap="square" anchor="ctr">
-            <a:spAutoFit/>
-          </a:bodyPr>
-          <a:lstStyle/>
-          <a:p>
-            <a:pPr algn="l"/>
-            <a:r>
-              <a:rPr sz="1400" b="1">
-                <a:solidFill>
-                  <a:srgbClr val="FFFFFF"/>
-                </a:solidFill>
-                <a:latin typeface="Calibri"/>
-              </a:rPr>
-              <a:t>API / BFF</a:t>
-            </a:r>
-          </a:p>
-        </p:txBody>
-      </p:sp>
-      <p:sp>
-        <p:nvSpPr>
-          <p:cNvPr id="13" name="Rectangle 12"/>
-          <p:cNvSpPr/>
-          <p:nvPr/>
-        </p:nvSpPr>
-        <p:spPr>
-          <a:xfrm>
-            <a:off x="6675120" y="4206240"/>
-            <a:ext cx="4663440" cy="685800"/>
-          </a:xfrm>
-          <a:prstGeom prst="rect">
-            <a:avLst/>
-          </a:prstGeom>
-          <a:solidFill>
-            <a:srgbClr val="0F9B86"/>
-          </a:solidFill>
-          <a:ln>
-            <a:noFill/>
-          </a:ln>
-          <a:effectLst/>
-        </p:spPr>
-        <p:style>
-          <a:lnRef idx="1">
-            <a:schemeClr val="accent1"/>
-          </a:lnRef>
-          <a:fillRef idx="3">
-            <a:schemeClr val="accent1"/>
-          </a:fillRef>
-          <a:effectRef idx="2">
-            <a:schemeClr val="accent1"/>
-          </a:effectRef>
-          <a:fontRef idx="minor">
-            <a:schemeClr val="lt1"/>
-          </a:fontRef>
-        </p:style>
-        <p:txBody>
-          <a:bodyPr rtlCol="0" anchor="ctr"/>
-          <a:lstStyle/>
-          <a:p>
-            <a:pPr algn="ctr"/>
-          </a:p>
-        </p:txBody>
-      </p:sp>
-      <p:sp>
-        <p:nvSpPr>
-          <p:cNvPr id="14" name="TextBox 13"/>
-          <p:cNvSpPr txBox="1"/>
-          <p:nvPr/>
-        </p:nvSpPr>
-        <p:spPr>
-          <a:xfrm>
-            <a:off x="6858000" y="4206240"/>
-            <a:ext cx="4297680" cy="685800"/>
-          </a:xfrm>
-          <a:prstGeom prst="rect">
-            <a:avLst/>
-          </a:prstGeom>
-          <a:noFill/>
-        </p:spPr>
-        <p:txBody>
-          <a:bodyPr wrap="square" anchor="ctr">
-            <a:spAutoFit/>
-          </a:bodyPr>
-          <a:lstStyle/>
-          <a:p>
-            <a:pPr algn="l"/>
-            <a:r>
-              <a:rPr sz="1400" b="1">
-                <a:solidFill>
-                  <a:srgbClr val="FFFFFF"/>
-                </a:solidFill>
-                <a:latin typeface="Calibri"/>
-              </a:rPr>
-              <a:t>Triage · Peer · Booking · Crisis</a:t>
-            </a:r>
-          </a:p>
-        </p:txBody>
-      </p:sp>
-      <p:sp>
-        <p:nvSpPr>
-          <p:cNvPr id="15" name="Rectangle 14"/>
-          <p:cNvSpPr/>
-          <p:nvPr/>
-        </p:nvSpPr>
-        <p:spPr>
-          <a:xfrm>
-            <a:off x="6675120" y="5074920"/>
-            <a:ext cx="4663440" cy="685800"/>
-          </a:xfrm>
-          <a:prstGeom prst="rect">
-            <a:avLst/>
-          </a:prstGeom>
-          <a:solidFill>
-            <a:srgbClr val="0B7D6C"/>
-          </a:solidFill>
-          <a:ln>
-            <a:noFill/>
-          </a:ln>
-          <a:effectLst/>
-        </p:spPr>
-        <p:style>
-          <a:lnRef idx="1">
-            <a:schemeClr val="accent1"/>
-          </a:lnRef>
-          <a:fillRef idx="3">
-            <a:schemeClr val="accent1"/>
-          </a:fillRef>
-          <a:effectRef idx="2">
-            <a:schemeClr val="accent1"/>
-          </a:effectRef>
-          <a:fontRef idx="minor">
-            <a:schemeClr val="lt1"/>
-          </a:fontRef>
-        </p:style>
-        <p:txBody>
-          <a:bodyPr rtlCol="0" anchor="ctr"/>
-          <a:lstStyle/>
-          <a:p>
-            <a:pPr algn="ctr"/>
-          </a:p>
-        </p:txBody>
-      </p:sp>
-      <p:sp>
-        <p:nvSpPr>
-          <p:cNvPr id="16" name="TextBox 15"/>
-          <p:cNvSpPr txBox="1"/>
-          <p:nvPr/>
-        </p:nvSpPr>
-        <p:spPr>
-          <a:xfrm>
-            <a:off x="6858000" y="5074920"/>
-            <a:ext cx="4297680" cy="685800"/>
-          </a:xfrm>
-          <a:prstGeom prst="rect">
-            <a:avLst/>
-          </a:prstGeom>
-          <a:noFill/>
-        </p:spPr>
-        <p:txBody>
-          <a:bodyPr wrap="square" anchor="ctr">
-            <a:spAutoFit/>
-          </a:bodyPr>
-          <a:lstStyle/>
-          <a:p>
-            <a:pPr algn="l"/>
-            <a:r>
-              <a:rPr sz="1400" b="1">
-                <a:solidFill>
-                  <a:srgbClr val="FFFFFF"/>
-                </a:solidFill>
-                <a:latin typeface="Calibri"/>
-              </a:rPr>
-              <a:t>Encrypted Data Layer</a:t>
+              <a:rPr sz="1200" b="0">
+                <a:solidFill>
+                  <a:srgbClr val="1F2A2E"/>
+                </a:solidFill>
+                <a:latin typeface="Calibri"/>
+              </a:rPr>
+              <a:t>Open index.html → checkin.html
+triage.js is a pure function:
+score({mood, text, answers})
+  → severity: low | medium | high
+  → route: self | peer | crisis
+Same interface a real LLM slots into later.</a:t>
             </a:r>
           </a:p>
         </p:txBody>
@@ -6559,7 +8612,7 @@
                 </a:solidFill>
                 <a:latin typeface="Calibri"/>
               </a:rPr>
-              <a:t>Privacy by Design</a:t>
+              <a:t>Architecture</a:t>
             </a:r>
           </a:p>
         </p:txBody>
@@ -6594,21 +8647,156 @@
                 </a:solidFill>
                 <a:latin typeface="Calibri"/>
               </a:rPr>
-              <a:t>JUDGES ASK — WE SHOW</a:t>
-            </a:r>
-          </a:p>
-        </p:txBody>
-      </p:sp>
-      <p:sp>
-        <p:nvSpPr>
-          <p:cNvPr id="6" name="Rectangle 5"/>
+              <a:t>FROM DEMO TO PRODUCTION</a:t>
+            </a:r>
+          </a:p>
+        </p:txBody>
+      </p:sp>
+      <p:sp>
+        <p:nvSpPr>
+          <p:cNvPr id="6" name="TextBox 5"/>
+          <p:cNvSpPr txBox="1"/>
+          <p:nvPr/>
+        </p:nvSpPr>
+        <p:spPr>
+          <a:xfrm>
+            <a:off x="548640" y="1737360"/>
+            <a:ext cx="5486400" cy="4572000"/>
+          </a:xfrm>
+          <a:prstGeom prst="rect">
+            <a:avLst/>
+          </a:prstGeom>
+          <a:noFill/>
+        </p:spPr>
+        <p:txBody>
+          <a:bodyPr wrap="square">
+            <a:spAutoFit/>
+          </a:bodyPr>
+          <a:lstStyle/>
+          <a:p>
+            <a:pPr>
+              <a:spcAft>
+                <a:spcPts val="800"/>
+              </a:spcAft>
+            </a:pPr>
+            <a:r>
+              <a:rPr sz="1500">
+                <a:solidFill>
+                  <a:srgbClr val="1F2A2E"/>
+                </a:solidFill>
+                <a:latin typeface="Calibri"/>
+              </a:rPr>
+              <a:t>• Client: HTML/JS + global Crisis/SOS overlay</a:t>
+            </a:r>
+          </a:p>
+          <a:p>
+            <a:pPr>
+              <a:spcAft>
+                <a:spcPts val="800"/>
+              </a:spcAft>
+            </a:pPr>
+            <a:r>
+              <a:rPr sz="1500">
+                <a:solidFill>
+                  <a:srgbClr val="1F2A2E"/>
+                </a:solidFill>
+                <a:latin typeface="Calibri"/>
+              </a:rPr>
+              <a:t>• Anonymous session store — zero PII (opaque anon_id)</a:t>
+            </a:r>
+          </a:p>
+          <a:p>
+            <a:pPr>
+              <a:spcAft>
+                <a:spcPts val="800"/>
+              </a:spcAft>
+            </a:pPr>
+            <a:r>
+              <a:rPr sz="1500">
+                <a:solidFill>
+                  <a:srgbClr val="1F2A2E"/>
+                </a:solidFill>
+                <a:latin typeface="Calibri"/>
+              </a:rPr>
+              <a:t>• 4 services: Triage · Peer Match · Booking · Crisis</a:t>
+            </a:r>
+          </a:p>
+          <a:p>
+            <a:pPr lvl="1">
+              <a:spcAft>
+                <a:spcPts val="800"/>
+              </a:spcAft>
+            </a:pPr>
+            <a:r>
+              <a:rPr sz="1500">
+                <a:solidFill>
+                  <a:srgbClr val="1F2A2E"/>
+                </a:solidFill>
+                <a:latin typeface="Calibri"/>
+              </a:rPr>
+              <a:t>– Demo: rule-based triage + localStorage</a:t>
+            </a:r>
+          </a:p>
+          <a:p>
+            <a:pPr lvl="1">
+              <a:spcAft>
+                <a:spcPts val="800"/>
+              </a:spcAft>
+            </a:pPr>
+            <a:r>
+              <a:rPr sz="1500">
+                <a:solidFill>
+                  <a:srgbClr val="1F2A2E"/>
+                </a:solidFill>
+                <a:latin typeface="Calibri"/>
+              </a:rPr>
+              <a:t>– Prod: FastAPI + LLM (Gemini) behind score()</a:t>
+            </a:r>
+          </a:p>
+          <a:p>
+            <a:pPr>
+              <a:spcAft>
+                <a:spcPts val="800"/>
+              </a:spcAft>
+            </a:pPr>
+            <a:r>
+              <a:rPr sz="1500">
+                <a:solidFill>
+                  <a:srgbClr val="1F2A2E"/>
+                </a:solidFill>
+                <a:latin typeface="Calibri"/>
+              </a:rPr>
+              <a:t>• Data: hashed logs, TTL auto-delete, encrypted</a:t>
+            </a:r>
+          </a:p>
+          <a:p>
+            <a:pPr>
+              <a:spcAft>
+                <a:spcPts val="800"/>
+              </a:spcAft>
+            </a:pPr>
+            <a:r>
+              <a:rPr sz="1500">
+                <a:solidFill>
+                  <a:srgbClr val="1F2A2E"/>
+                </a:solidFill>
+                <a:latin typeface="Calibri"/>
+              </a:rPr>
+              <a:t>• Helpline registry: iCall / Vandrevala / Tele-MANAS</a:t>
+            </a:r>
+          </a:p>
+        </p:txBody>
+      </p:sp>
+      <p:sp>
+        <p:nvSpPr>
+          <p:cNvPr id="7" name="Rectangle 6"/>
           <p:cNvSpPr/>
           <p:nvPr/>
         </p:nvSpPr>
         <p:spPr>
           <a:xfrm>
-            <a:off x="548640" y="1828800"/>
-            <a:ext cx="3520440" cy="1783080"/>
+            <a:off x="6400800" y="1828800"/>
+            <a:ext cx="5212080" cy="4023360"/>
           </a:xfrm>
           <a:prstGeom prst="rect">
             <a:avLst/>
@@ -6645,14 +8833,14 @@
       </p:sp>
       <p:sp>
         <p:nvSpPr>
-          <p:cNvPr id="7" name="TextBox 6"/>
+          <p:cNvPr id="8" name="TextBox 7"/>
           <p:cNvSpPr txBox="1"/>
           <p:nvPr/>
         </p:nvSpPr>
         <p:spPr>
           <a:xfrm>
-            <a:off x="731520" y="1965960"/>
-            <a:ext cx="3200400" cy="457200"/>
+            <a:off x="6583680" y="1965960"/>
+            <a:ext cx="4846320" cy="365760"/>
           </a:xfrm>
           <a:prstGeom prst="rect">
             <a:avLst/>
@@ -6673,42 +8861,7 @@
                 </a:solidFill>
                 <a:latin typeface="Calibri"/>
               </a:rPr>
-              <a:t>Anonymous ID</a:t>
-            </a:r>
-          </a:p>
-        </p:txBody>
-      </p:sp>
-      <p:sp>
-        <p:nvSpPr>
-          <p:cNvPr id="8" name="TextBox 7"/>
-          <p:cNvSpPr txBox="1"/>
-          <p:nvPr/>
-        </p:nvSpPr>
-        <p:spPr>
-          <a:xfrm>
-            <a:off x="731520" y="2468880"/>
-            <a:ext cx="3200400" cy="1005840"/>
-          </a:xfrm>
-          <a:prstGeom prst="rect">
-            <a:avLst/>
-          </a:prstGeom>
-          <a:noFill/>
-        </p:spPr>
-        <p:txBody>
-          <a:bodyPr wrap="square" anchor="t">
-            <a:spAutoFit/>
-          </a:bodyPr>
-          <a:lstStyle/>
-          <a:p>
-            <a:pPr algn="l"/>
-            <a:r>
-              <a:rPr sz="1300" b="0">
-                <a:solidFill>
-                  <a:srgbClr val="1F2A2E"/>
-                </a:solidFill>
-                <a:latin typeface="Calibri"/>
-              </a:rPr>
-              <a:t>No name/email/phone. Opaque anon_id only.</a:t>
+              <a:t>Trust Funnel</a:t>
             </a:r>
           </a:p>
         </p:txBody>
@@ -6721,14 +8874,14 @@
         </p:nvSpPr>
         <p:spPr>
           <a:xfrm>
-            <a:off x="4297679" y="1828800"/>
-            <a:ext cx="3520440" cy="1783080"/>
+            <a:off x="6675120" y="2468880"/>
+            <a:ext cx="4663440" cy="685800"/>
           </a:xfrm>
           <a:prstGeom prst="rect">
             <a:avLst/>
           </a:prstGeom>
           <a:solidFill>
-            <a:srgbClr val="FDF8F1"/>
+            <a:srgbClr val="0F9B86"/>
           </a:solidFill>
           <a:ln>
             <a:noFill/>
@@ -6765,8 +8918,8 @@
         </p:nvSpPr>
         <p:spPr>
           <a:xfrm>
-            <a:off x="4480559" y="1965960"/>
-            <a:ext cx="3200400" cy="457200"/>
+            <a:off x="6858000" y="2468880"/>
+            <a:ext cx="4297680" cy="685800"/>
           </a:xfrm>
           <a:prstGeom prst="rect">
             <a:avLst/>
@@ -6774,75 +8927,40 @@
           <a:noFill/>
         </p:spPr>
         <p:txBody>
-          <a:bodyPr wrap="square" anchor="t">
+          <a:bodyPr wrap="square" anchor="ctr">
             <a:spAutoFit/>
           </a:bodyPr>
           <a:lstStyle/>
           <a:p>
             <a:pPr algn="l"/>
             <a:r>
-              <a:rPr sz="1600" b="1">
-                <a:solidFill>
-                  <a:srgbClr val="0B7D6C"/>
-                </a:solidFill>
-                <a:latin typeface="Calibri"/>
-              </a:rPr>
-              <a:t>Blind booking</a:t>
-            </a:r>
-          </a:p>
-        </p:txBody>
-      </p:sp>
-      <p:sp>
-        <p:nvSpPr>
-          <p:cNvPr id="11" name="TextBox 10"/>
-          <p:cNvSpPr txBox="1"/>
-          <p:nvPr/>
-        </p:nvSpPr>
-        <p:spPr>
-          <a:xfrm>
-            <a:off x="4480559" y="2468880"/>
-            <a:ext cx="3200400" cy="1005840"/>
-          </a:xfrm>
-          <a:prstGeom prst="rect">
-            <a:avLst/>
-          </a:prstGeom>
-          <a:noFill/>
-        </p:spPr>
-        <p:txBody>
-          <a:bodyPr wrap="square" anchor="t">
-            <a:spAutoFit/>
-          </a:bodyPr>
-          <a:lstStyle/>
-          <a:p>
-            <a:pPr algn="l"/>
-            <a:r>
-              <a:rPr sz="1300" b="0">
-                <a:solidFill>
-                  <a:srgbClr val="1F2A2E"/>
-                </a:solidFill>
-                <a:latin typeface="Calibri"/>
-              </a:rPr>
-              <a:t>Admin sees ID + slot. No faculty/parent view.</a:t>
-            </a:r>
-          </a:p>
-        </p:txBody>
-      </p:sp>
-      <p:sp>
-        <p:nvSpPr>
-          <p:cNvPr id="12" name="Rectangle 11"/>
+              <a:rPr sz="1400" b="1">
+                <a:solidFill>
+                  <a:srgbClr val="FFFFFF"/>
+                </a:solidFill>
+                <a:latin typeface="Calibri"/>
+              </a:rPr>
+              <a:t>Browser (anon)</a:t>
+            </a:r>
+          </a:p>
+        </p:txBody>
+      </p:sp>
+      <p:sp>
+        <p:nvSpPr>
+          <p:cNvPr id="11" name="Rectangle 10"/>
           <p:cNvSpPr/>
           <p:nvPr/>
         </p:nvSpPr>
         <p:spPr>
           <a:xfrm>
-            <a:off x="8046719" y="1828800"/>
-            <a:ext cx="3520440" cy="1783080"/>
+            <a:off x="6675120" y="3337560"/>
+            <a:ext cx="4663440" cy="685800"/>
           </a:xfrm>
           <a:prstGeom prst="rect">
             <a:avLst/>
           </a:prstGeom>
           <a:solidFill>
-            <a:srgbClr val="FDF8F1"/>
+            <a:srgbClr val="0B7D6C"/>
           </a:solidFill>
           <a:ln>
             <a:noFill/>
@@ -6873,14 +8991,14 @@
       </p:sp>
       <p:sp>
         <p:nvSpPr>
-          <p:cNvPr id="13" name="TextBox 12"/>
+          <p:cNvPr id="12" name="TextBox 11"/>
           <p:cNvSpPr txBox="1"/>
           <p:nvPr/>
         </p:nvSpPr>
         <p:spPr>
           <a:xfrm>
-            <a:off x="8229599" y="1965960"/>
-            <a:ext cx="3200400" cy="457200"/>
+            <a:off x="6858000" y="3337560"/>
+            <a:ext cx="4297680" cy="685800"/>
           </a:xfrm>
           <a:prstGeom prst="rect">
             <a:avLst/>
@@ -6888,75 +9006,40 @@
           <a:noFill/>
         </p:spPr>
         <p:txBody>
-          <a:bodyPr wrap="square" anchor="t">
+          <a:bodyPr wrap="square" anchor="ctr">
             <a:spAutoFit/>
           </a:bodyPr>
           <a:lstStyle/>
           <a:p>
             <a:pPr algn="l"/>
             <a:r>
-              <a:rPr sz="1600" b="1">
-                <a:solidFill>
-                  <a:srgbClr val="0B7D6C"/>
-                </a:solidFill>
-                <a:latin typeface="Calibri"/>
-              </a:rPr>
-              <a:t>Local-first demo</a:t>
-            </a:r>
-          </a:p>
-        </p:txBody>
-      </p:sp>
-      <p:sp>
-        <p:nvSpPr>
-          <p:cNvPr id="14" name="TextBox 13"/>
-          <p:cNvSpPr txBox="1"/>
-          <p:nvPr/>
-        </p:nvSpPr>
-        <p:spPr>
-          <a:xfrm>
-            <a:off x="8229599" y="2468880"/>
-            <a:ext cx="3200400" cy="1005840"/>
-          </a:xfrm>
-          <a:prstGeom prst="rect">
-            <a:avLst/>
-          </a:prstGeom>
-          <a:noFill/>
-        </p:spPr>
-        <p:txBody>
-          <a:bodyPr wrap="square" anchor="t">
-            <a:spAutoFit/>
-          </a:bodyPr>
-          <a:lstStyle/>
-          <a:p>
-            <a:pPr algn="l"/>
-            <a:r>
-              <a:rPr sz="1300" b="0">
-                <a:solidFill>
-                  <a:srgbClr val="1F2A2E"/>
-                </a:solidFill>
-                <a:latin typeface="Calibri"/>
-              </a:rPr>
-              <a:t>Check-in state stays on device.</a:t>
-            </a:r>
-          </a:p>
-        </p:txBody>
-      </p:sp>
-      <p:sp>
-        <p:nvSpPr>
-          <p:cNvPr id="15" name="Rectangle 14"/>
+              <a:rPr sz="1400" b="1">
+                <a:solidFill>
+                  <a:srgbClr val="FFFFFF"/>
+                </a:solidFill>
+                <a:latin typeface="Calibri"/>
+              </a:rPr>
+              <a:t>API / BFF</a:t>
+            </a:r>
+          </a:p>
+        </p:txBody>
+      </p:sp>
+      <p:sp>
+        <p:nvSpPr>
+          <p:cNvPr id="13" name="Rectangle 12"/>
           <p:cNvSpPr/>
           <p:nvPr/>
         </p:nvSpPr>
         <p:spPr>
           <a:xfrm>
-            <a:off x="548640" y="3840480"/>
-            <a:ext cx="3520440" cy="1783080"/>
+            <a:off x="6675120" y="4206240"/>
+            <a:ext cx="4663440" cy="685800"/>
           </a:xfrm>
           <a:prstGeom prst="rect">
             <a:avLst/>
           </a:prstGeom>
           <a:solidFill>
-            <a:srgbClr val="FDF8F1"/>
+            <a:srgbClr val="0F9B86"/>
           </a:solidFill>
           <a:ln>
             <a:noFill/>
@@ -6987,14 +9070,14 @@
       </p:sp>
       <p:sp>
         <p:nvSpPr>
-          <p:cNvPr id="16" name="TextBox 15"/>
+          <p:cNvPr id="14" name="TextBox 13"/>
           <p:cNvSpPr txBox="1"/>
           <p:nvPr/>
         </p:nvSpPr>
         <p:spPr>
           <a:xfrm>
-            <a:off x="731520" y="3977640"/>
-            <a:ext cx="3200400" cy="457200"/>
+            <a:off x="6858000" y="4206240"/>
+            <a:ext cx="4297680" cy="685800"/>
           </a:xfrm>
           <a:prstGeom prst="rect">
             <a:avLst/>
@@ -7002,75 +9085,40 @@
           <a:noFill/>
         </p:spPr>
         <p:txBody>
-          <a:bodyPr wrap="square" anchor="t">
+          <a:bodyPr wrap="square" anchor="ctr">
             <a:spAutoFit/>
           </a:bodyPr>
           <a:lstStyle/>
           <a:p>
             <a:pPr algn="l"/>
             <a:r>
-              <a:rPr sz="1600" b="1">
-                <a:solidFill>
-                  <a:srgbClr val="0B7D6C"/>
-                </a:solidFill>
-                <a:latin typeface="Calibri"/>
-              </a:rPr>
-              <a:t>Auto-purge</a:t>
-            </a:r>
-          </a:p>
-        </p:txBody>
-      </p:sp>
-      <p:sp>
-        <p:nvSpPr>
-          <p:cNvPr id="17" name="TextBox 16"/>
-          <p:cNvSpPr txBox="1"/>
-          <p:nvPr/>
-        </p:nvSpPr>
-        <p:spPr>
-          <a:xfrm>
-            <a:off x="731520" y="4480560"/>
-            <a:ext cx="3200400" cy="1005840"/>
-          </a:xfrm>
-          <a:prstGeom prst="rect">
-            <a:avLst/>
-          </a:prstGeom>
-          <a:noFill/>
-        </p:spPr>
-        <p:txBody>
-          <a:bodyPr wrap="square" anchor="t">
-            <a:spAutoFit/>
-          </a:bodyPr>
-          <a:lstStyle/>
-          <a:p>
-            <a:pPr algn="l"/>
-            <a:r>
-              <a:rPr sz="1300" b="0">
-                <a:solidFill>
-                  <a:srgbClr val="1F2A2E"/>
-                </a:solidFill>
-                <a:latin typeface="Calibri"/>
-              </a:rPr>
-              <a:t>Hashed logs, short TTL in production.</a:t>
-            </a:r>
-          </a:p>
-        </p:txBody>
-      </p:sp>
-      <p:sp>
-        <p:nvSpPr>
-          <p:cNvPr id="18" name="Rectangle 17"/>
+              <a:rPr sz="1400" b="1">
+                <a:solidFill>
+                  <a:srgbClr val="FFFFFF"/>
+                </a:solidFill>
+                <a:latin typeface="Calibri"/>
+              </a:rPr>
+              <a:t>Triage · Peer · Booking · Crisis</a:t>
+            </a:r>
+          </a:p>
+        </p:txBody>
+      </p:sp>
+      <p:sp>
+        <p:nvSpPr>
+          <p:cNvPr id="15" name="Rectangle 14"/>
           <p:cNvSpPr/>
           <p:nvPr/>
         </p:nvSpPr>
         <p:spPr>
           <a:xfrm>
-            <a:off x="4297679" y="3840480"/>
-            <a:ext cx="3520440" cy="1783080"/>
+            <a:off x="6675120" y="5074920"/>
+            <a:ext cx="4663440" cy="685800"/>
           </a:xfrm>
           <a:prstGeom prst="rect">
             <a:avLst/>
           </a:prstGeom>
           <a:solidFill>
-            <a:srgbClr val="FDF8F1"/>
+            <a:srgbClr val="0B7D6C"/>
           </a:solidFill>
           <a:ln>
             <a:noFill/>
@@ -7101,14 +9149,14 @@
       </p:sp>
       <p:sp>
         <p:nvSpPr>
-          <p:cNvPr id="19" name="TextBox 18"/>
+          <p:cNvPr id="16" name="TextBox 15"/>
           <p:cNvSpPr txBox="1"/>
           <p:nvPr/>
         </p:nvSpPr>
         <p:spPr>
           <a:xfrm>
-            <a:off x="4480559" y="3977640"/>
-            <a:ext cx="3200400" cy="457200"/>
+            <a:off x="6858000" y="5074920"/>
+            <a:ext cx="4297680" cy="685800"/>
           </a:xfrm>
           <a:prstGeom prst="rect">
             <a:avLst/>
@@ -7116,169 +9164,20 @@
           <a:noFill/>
         </p:spPr>
         <p:txBody>
-          <a:bodyPr wrap="square" anchor="t">
+          <a:bodyPr wrap="square" anchor="ctr">
             <a:spAutoFit/>
           </a:bodyPr>
           <a:lstStyle/>
           <a:p>
             <a:pPr algn="l"/>
             <a:r>
-              <a:rPr sz="1600" b="1">
-                <a:solidFill>
-                  <a:srgbClr val="0B7D6C"/>
-                </a:solidFill>
-                <a:latin typeface="Calibri"/>
-              </a:rPr>
-              <a:t>Consent-gated</a:t>
-            </a:r>
-          </a:p>
-        </p:txBody>
-      </p:sp>
-      <p:sp>
-        <p:nvSpPr>
-          <p:cNvPr id="20" name="TextBox 19"/>
-          <p:cNvSpPr txBox="1"/>
-          <p:nvPr/>
-        </p:nvSpPr>
-        <p:spPr>
-          <a:xfrm>
-            <a:off x="4480559" y="4480560"/>
-            <a:ext cx="3200400" cy="1005840"/>
-          </a:xfrm>
-          <a:prstGeom prst="rect">
-            <a:avLst/>
-          </a:prstGeom>
-          <a:noFill/>
-        </p:spPr>
-        <p:txBody>
-          <a:bodyPr wrap="square" anchor="t">
-            <a:spAutoFit/>
-          </a:bodyPr>
-          <a:lstStyle/>
-          <a:p>
-            <a:pPr algn="l"/>
-            <a:r>
-              <a:rPr sz="1300" b="0">
-                <a:solidFill>
-                  <a:srgbClr val="1F2A2E"/>
-                </a:solidFill>
-                <a:latin typeface="Calibri"/>
-              </a:rPr>
-              <a:t>Identities revealed only by you.</a:t>
-            </a:r>
-          </a:p>
-        </p:txBody>
-      </p:sp>
-      <p:sp>
-        <p:nvSpPr>
-          <p:cNvPr id="21" name="Rectangle 20"/>
-          <p:cNvSpPr/>
-          <p:nvPr/>
-        </p:nvSpPr>
-        <p:spPr>
-          <a:xfrm>
-            <a:off x="8046719" y="3840480"/>
-            <a:ext cx="3520440" cy="1783080"/>
-          </a:xfrm>
-          <a:prstGeom prst="rect">
-            <a:avLst/>
-          </a:prstGeom>
-          <a:solidFill>
-            <a:srgbClr val="FDF8F1"/>
-          </a:solidFill>
-          <a:ln>
-            <a:noFill/>
-          </a:ln>
-          <a:effectLst/>
-        </p:spPr>
-        <p:style>
-          <a:lnRef idx="1">
-            <a:schemeClr val="accent1"/>
-          </a:lnRef>
-          <a:fillRef idx="3">
-            <a:schemeClr val="accent1"/>
-          </a:fillRef>
-          <a:effectRef idx="2">
-            <a:schemeClr val="accent1"/>
-          </a:effectRef>
-          <a:fontRef idx="minor">
-            <a:schemeClr val="lt1"/>
-          </a:fontRef>
-        </p:style>
-        <p:txBody>
-          <a:bodyPr rtlCol="0" anchor="ctr"/>
-          <a:lstStyle/>
-          <a:p>
-            <a:pPr algn="ctr"/>
-          </a:p>
-        </p:txBody>
-      </p:sp>
-      <p:sp>
-        <p:nvSpPr>
-          <p:cNvPr id="22" name="TextBox 21"/>
-          <p:cNvSpPr txBox="1"/>
-          <p:nvPr/>
-        </p:nvSpPr>
-        <p:spPr>
-          <a:xfrm>
-            <a:off x="8229599" y="3977640"/>
-            <a:ext cx="3200400" cy="457200"/>
-          </a:xfrm>
-          <a:prstGeom prst="rect">
-            <a:avLst/>
-          </a:prstGeom>
-          <a:noFill/>
-        </p:spPr>
-        <p:txBody>
-          <a:bodyPr wrap="square" anchor="t">
-            <a:spAutoFit/>
-          </a:bodyPr>
-          <a:lstStyle/>
-          <a:p>
-            <a:pPr algn="l"/>
-            <a:r>
-              <a:rPr sz="1600" b="1">
-                <a:solidFill>
-                  <a:srgbClr val="0B7D6C"/>
-                </a:solidFill>
-                <a:latin typeface="Calibri"/>
-              </a:rPr>
-              <a:t>Encrypted</a:t>
-            </a:r>
-          </a:p>
-        </p:txBody>
-      </p:sp>
-      <p:sp>
-        <p:nvSpPr>
-          <p:cNvPr id="23" name="TextBox 22"/>
-          <p:cNvSpPr txBox="1"/>
-          <p:nvPr/>
-        </p:nvSpPr>
-        <p:spPr>
-          <a:xfrm>
-            <a:off x="8229599" y="4480560"/>
-            <a:ext cx="3200400" cy="1005840"/>
-          </a:xfrm>
-          <a:prstGeom prst="rect">
-            <a:avLst/>
-          </a:prstGeom>
-          <a:noFill/>
-        </p:spPr>
-        <p:txBody>
-          <a:bodyPr wrap="square" anchor="t">
-            <a:spAutoFit/>
-          </a:bodyPr>
-          <a:lstStyle/>
-          <a:p>
-            <a:pPr algn="l"/>
-            <a:r>
-              <a:rPr sz="1300" b="0">
-                <a:solidFill>
-                  <a:srgbClr val="1F2A2E"/>
-                </a:solidFill>
-                <a:latin typeface="Calibri"/>
-              </a:rPr>
-              <a:t>TLS + column-level encryption at rest.</a:t>
+              <a:rPr sz="1400" b="1">
+                <a:solidFill>
+                  <a:srgbClr val="FFFFFF"/>
+                </a:solidFill>
+                <a:latin typeface="Calibri"/>
+              </a:rPr>
+              <a:t>Encrypted Data Layer</a:t>
             </a:r>
           </a:p>
         </p:txBody>
@@ -7419,7 +9318,7 @@
                 </a:solidFill>
                 <a:latin typeface="Calibri"/>
               </a:rPr>
-              <a:t>Scalability &amp; Business</a:t>
+              <a:t>Privacy &amp; Safety by Design</a:t>
             </a:r>
           </a:p>
         </p:txBody>
@@ -7454,162 +9353,27 @@
                 </a:solidFill>
                 <a:latin typeface="Calibri"/>
               </a:rPr>
-              <a:t>B2B2C MODEL</a:t>
-            </a:r>
-          </a:p>
-        </p:txBody>
-      </p:sp>
-      <p:sp>
-        <p:nvSpPr>
-          <p:cNvPr id="6" name="TextBox 5"/>
-          <p:cNvSpPr txBox="1"/>
-          <p:nvPr/>
-        </p:nvSpPr>
-        <p:spPr>
-          <a:xfrm>
-            <a:off x="548640" y="1737360"/>
-            <a:ext cx="5577840" cy="4572000"/>
-          </a:xfrm>
-          <a:prstGeom prst="rect">
-            <a:avLst/>
-          </a:prstGeom>
-          <a:noFill/>
-        </p:spPr>
-        <p:txBody>
-          <a:bodyPr wrap="square">
-            <a:spAutoFit/>
-          </a:bodyPr>
-          <a:lstStyle/>
-          <a:p>
-            <a:pPr>
-              <a:spcAft>
-                <a:spcPts val="1000"/>
-              </a:spcAft>
-            </a:pPr>
-            <a:r>
-              <a:rPr sz="1700">
-                <a:solidFill>
-                  <a:srgbClr val="1F2A2E"/>
-                </a:solidFill>
-                <a:latin typeface="Calibri"/>
-              </a:rPr>
-              <a:t>• Sell to colleges as a subscription</a:t>
-            </a:r>
-          </a:p>
-          <a:p>
-            <a:pPr lvl="1">
-              <a:spcAft>
-                <a:spcPts val="1000"/>
-              </a:spcAft>
-            </a:pPr>
-            <a:r>
-              <a:rPr sz="1700">
-                <a:solidFill>
-                  <a:srgbClr val="1F2A2E"/>
-                </a:solidFill>
-                <a:latin typeface="Calibri"/>
-              </a:rPr>
-              <a:t>– Cheaper than hiring 5 in-house counselors each</a:t>
-            </a:r>
-          </a:p>
-          <a:p>
-            <a:pPr>
-              <a:spcAft>
-                <a:spcPts val="1000"/>
-              </a:spcAft>
-            </a:pPr>
-            <a:r>
-              <a:rPr sz="1700">
-                <a:solidFill>
-                  <a:srgbClr val="1F2A2E"/>
-                </a:solidFill>
-                <a:latin typeface="Calibri"/>
-              </a:rPr>
-              <a:t>• Shared counselor pool across colleges</a:t>
-            </a:r>
-          </a:p>
-          <a:p>
-            <a:pPr lvl="1">
-              <a:spcAft>
-                <a:spcPts val="1000"/>
-              </a:spcAft>
-            </a:pPr>
-            <a:r>
-              <a:rPr sz="1700">
-                <a:solidFill>
-                  <a:srgbClr val="1F2A2E"/>
-                </a:solidFill>
-                <a:latin typeface="Calibri"/>
-              </a:rPr>
-              <a:t>– One network serves many campuses → solves shortage</a:t>
-            </a:r>
-          </a:p>
-          <a:p>
-            <a:pPr>
-              <a:spcAft>
-                <a:spcPts val="1000"/>
-              </a:spcAft>
-            </a:pPr>
-            <a:r>
-              <a:rPr sz="1700">
-                <a:solidFill>
-                  <a:srgbClr val="1F2A2E"/>
-                </a:solidFill>
-                <a:latin typeface="Calibri"/>
-              </a:rPr>
-              <a:t>• Peer volunteers self-replenish each batch</a:t>
-            </a:r>
-          </a:p>
-          <a:p>
-            <a:pPr lvl="1">
-              <a:spcAft>
-                <a:spcPts val="1000"/>
-              </a:spcAft>
-            </a:pPr>
-            <a:r>
-              <a:rPr sz="1700">
-                <a:solidFill>
-                  <a:srgbClr val="1F2A2E"/>
-                </a:solidFill>
-                <a:latin typeface="Calibri"/>
-              </a:rPr>
-              <a:t>– Near-free, compounding supply of listeners</a:t>
-            </a:r>
-          </a:p>
-          <a:p>
-            <a:pPr>
-              <a:spcAft>
-                <a:spcPts val="1000"/>
-              </a:spcAft>
-            </a:pPr>
-            <a:r>
-              <a:rPr sz="1700">
-                <a:solidFill>
-                  <a:srgbClr val="1F2A2E"/>
-                </a:solidFill>
-                <a:latin typeface="Calibri"/>
-              </a:rPr>
-              <a:t>• CSR / wellness-fund subsidies for low-income camps</a:t>
-            </a:r>
-          </a:p>
-        </p:txBody>
-      </p:sp>
-      <p:sp>
-        <p:nvSpPr>
-          <p:cNvPr id="7" name="Rectangle 6"/>
+              <a:t>JUDGES ASK — WE SHOW</a:t>
+            </a:r>
+          </a:p>
+        </p:txBody>
+      </p:sp>
+      <p:sp>
+        <p:nvSpPr>
+          <p:cNvPr id="6" name="Rectangle 5"/>
           <p:cNvSpPr/>
           <p:nvPr/>
         </p:nvSpPr>
         <p:spPr>
           <a:xfrm>
-            <a:off x="6400800" y="1828800"/>
-            <a:ext cx="5212080" cy="4023360"/>
+            <a:off x="457200" y="1828800"/>
+            <a:ext cx="2670048" cy="1783080"/>
           </a:xfrm>
           <a:prstGeom prst="rect">
             <a:avLst/>
           </a:prstGeom>
           <a:solidFill>
-            <a:srgbClr val="0F9B86"/>
+            <a:srgbClr val="FDF8F1"/>
           </a:solidFill>
           <a:ln>
             <a:noFill/>
@@ -7640,14 +9404,14 @@
       </p:sp>
       <p:sp>
         <p:nvSpPr>
-          <p:cNvPr id="8" name="TextBox 7"/>
+          <p:cNvPr id="7" name="TextBox 6"/>
           <p:cNvSpPr txBox="1"/>
           <p:nvPr/>
         </p:nvSpPr>
         <p:spPr>
           <a:xfrm>
-            <a:off x="6583680" y="2011680"/>
-            <a:ext cx="4846320" cy="457200"/>
+            <a:off x="640080" y="1965960"/>
+            <a:ext cx="2377440" cy="457200"/>
           </a:xfrm>
           <a:prstGeom prst="rect">
             <a:avLst/>
@@ -7662,27 +9426,27 @@
           <a:p>
             <a:pPr algn="l"/>
             <a:r>
-              <a:rPr sz="1800" b="1">
-                <a:solidFill>
-                  <a:srgbClr val="FFFFFF"/>
-                </a:solidFill>
-                <a:latin typeface="Calibri"/>
-              </a:rPr>
-              <a:t>Unit economics</a:t>
-            </a:r>
-          </a:p>
-        </p:txBody>
-      </p:sp>
-      <p:sp>
-        <p:nvSpPr>
-          <p:cNvPr id="9" name="TextBox 8"/>
+              <a:rPr sz="1500" b="1">
+                <a:solidFill>
+                  <a:srgbClr val="0B7D6C"/>
+                </a:solidFill>
+                <a:latin typeface="Calibri"/>
+              </a:rPr>
+              <a:t>Anonymous ID</a:t>
+            </a:r>
+          </a:p>
+        </p:txBody>
+      </p:sp>
+      <p:sp>
+        <p:nvSpPr>
+          <p:cNvPr id="8" name="TextBox 7"/>
           <p:cNvSpPr txBox="1"/>
           <p:nvPr/>
         </p:nvSpPr>
         <p:spPr>
           <a:xfrm>
-            <a:off x="6583680" y="2651760"/>
-            <a:ext cx="4846320" cy="3108960"/>
+            <a:off x="640080" y="2468880"/>
+            <a:ext cx="2377440" cy="1005840"/>
           </a:xfrm>
           <a:prstGeom prst="rect">
             <a:avLst/>
@@ -7690,72 +9454,818 @@
           <a:noFill/>
         </p:spPr>
         <p:txBody>
-          <a:bodyPr wrap="square">
+          <a:bodyPr wrap="square" anchor="t">
             <a:spAutoFit/>
           </a:bodyPr>
           <a:lstStyle/>
           <a:p>
-            <a:pPr>
-              <a:spcAft>
-                <a:spcPts val="1000"/>
-              </a:spcAft>
-            </a:pPr>
-            <a:r>
-              <a:rPr sz="1500">
-                <a:solidFill>
-                  <a:srgbClr val="FFFFFF"/>
-                </a:solidFill>
-                <a:latin typeface="Calibri"/>
-              </a:rPr>
-              <a:t>• College pays per-student/yr subscription</a:t>
-            </a:r>
-          </a:p>
-          <a:p>
-            <a:pPr>
-              <a:spcAft>
-                <a:spcPts val="1000"/>
-              </a:spcAft>
-            </a:pPr>
-            <a:r>
-              <a:rPr sz="1500">
-                <a:solidFill>
-                  <a:srgbClr val="FFFFFF"/>
-                </a:solidFill>
-                <a:latin typeface="Calibri"/>
-              </a:rPr>
-              <a:t>• Counselor cost amortized across N colleges</a:t>
-            </a:r>
-          </a:p>
-          <a:p>
-            <a:pPr>
-              <a:spcAft>
-                <a:spcPts val="1000"/>
-              </a:spcAft>
-            </a:pPr>
-            <a:r>
-              <a:rPr sz="1500">
-                <a:solidFill>
-                  <a:srgbClr val="FFFFFF"/>
-                </a:solidFill>
-                <a:latin typeface="Calibri"/>
-              </a:rPr>
-              <a:t>• Peer layer = ~0 marginal cost</a:t>
-            </a:r>
-          </a:p>
-          <a:p>
-            <a:pPr>
-              <a:spcAft>
-                <a:spcPts val="1000"/>
-              </a:spcAft>
-            </a:pPr>
-            <a:r>
-              <a:rPr sz="1500">
-                <a:solidFill>
-                  <a:srgbClr val="FFFFFF"/>
-                </a:solidFill>
-                <a:latin typeface="Calibri"/>
-              </a:rPr>
-              <a:t>• Retention via trust, not forced signup</a:t>
+            <a:pPr algn="l"/>
+            <a:r>
+              <a:rPr sz="1200" b="0">
+                <a:solidFill>
+                  <a:srgbClr val="1F2A2E"/>
+                </a:solidFill>
+                <a:latin typeface="Calibri"/>
+              </a:rPr>
+              <a:t>No name/email/phone. Opaque anon_id only.</a:t>
+            </a:r>
+          </a:p>
+        </p:txBody>
+      </p:sp>
+      <p:sp>
+        <p:nvSpPr>
+          <p:cNvPr id="9" name="Rectangle 8"/>
+          <p:cNvSpPr/>
+          <p:nvPr/>
+        </p:nvSpPr>
+        <p:spPr>
+          <a:xfrm>
+            <a:off x="3310128" y="1828800"/>
+            <a:ext cx="2670048" cy="1783080"/>
+          </a:xfrm>
+          <a:prstGeom prst="rect">
+            <a:avLst/>
+          </a:prstGeom>
+          <a:solidFill>
+            <a:srgbClr val="FDF8F1"/>
+          </a:solidFill>
+          <a:ln>
+            <a:noFill/>
+          </a:ln>
+          <a:effectLst/>
+        </p:spPr>
+        <p:style>
+          <a:lnRef idx="1">
+            <a:schemeClr val="accent1"/>
+          </a:lnRef>
+          <a:fillRef idx="3">
+            <a:schemeClr val="accent1"/>
+          </a:fillRef>
+          <a:effectRef idx="2">
+            <a:schemeClr val="accent1"/>
+          </a:effectRef>
+          <a:fontRef idx="minor">
+            <a:schemeClr val="lt1"/>
+          </a:fontRef>
+        </p:style>
+        <p:txBody>
+          <a:bodyPr rtlCol="0" anchor="ctr"/>
+          <a:lstStyle/>
+          <a:p>
+            <a:pPr algn="ctr"/>
+          </a:p>
+        </p:txBody>
+      </p:sp>
+      <p:sp>
+        <p:nvSpPr>
+          <p:cNvPr id="10" name="TextBox 9"/>
+          <p:cNvSpPr txBox="1"/>
+          <p:nvPr/>
+        </p:nvSpPr>
+        <p:spPr>
+          <a:xfrm>
+            <a:off x="3493008" y="1965960"/>
+            <a:ext cx="2377440" cy="457200"/>
+          </a:xfrm>
+          <a:prstGeom prst="rect">
+            <a:avLst/>
+          </a:prstGeom>
+          <a:noFill/>
+        </p:spPr>
+        <p:txBody>
+          <a:bodyPr wrap="square" anchor="t">
+            <a:spAutoFit/>
+          </a:bodyPr>
+          <a:lstStyle/>
+          <a:p>
+            <a:pPr algn="l"/>
+            <a:r>
+              <a:rPr sz="1500" b="1">
+                <a:solidFill>
+                  <a:srgbClr val="0B7D6C"/>
+                </a:solidFill>
+                <a:latin typeface="Calibri"/>
+              </a:rPr>
+              <a:t>Blind booking</a:t>
+            </a:r>
+          </a:p>
+        </p:txBody>
+      </p:sp>
+      <p:sp>
+        <p:nvSpPr>
+          <p:cNvPr id="11" name="TextBox 10"/>
+          <p:cNvSpPr txBox="1"/>
+          <p:nvPr/>
+        </p:nvSpPr>
+        <p:spPr>
+          <a:xfrm>
+            <a:off x="3493008" y="2468880"/>
+            <a:ext cx="2377440" cy="1005840"/>
+          </a:xfrm>
+          <a:prstGeom prst="rect">
+            <a:avLst/>
+          </a:prstGeom>
+          <a:noFill/>
+        </p:spPr>
+        <p:txBody>
+          <a:bodyPr wrap="square" anchor="t">
+            <a:spAutoFit/>
+          </a:bodyPr>
+          <a:lstStyle/>
+          <a:p>
+            <a:pPr algn="l"/>
+            <a:r>
+              <a:rPr sz="1200" b="0">
+                <a:solidFill>
+                  <a:srgbClr val="1F2A2E"/>
+                </a:solidFill>
+                <a:latin typeface="Calibri"/>
+              </a:rPr>
+              <a:t>Admin sees ID + slot. No faculty/parent view.</a:t>
+            </a:r>
+          </a:p>
+        </p:txBody>
+      </p:sp>
+      <p:sp>
+        <p:nvSpPr>
+          <p:cNvPr id="12" name="Rectangle 11"/>
+          <p:cNvSpPr/>
+          <p:nvPr/>
+        </p:nvSpPr>
+        <p:spPr>
+          <a:xfrm>
+            <a:off x="6163056" y="1828800"/>
+            <a:ext cx="2670048" cy="1783080"/>
+          </a:xfrm>
+          <a:prstGeom prst="rect">
+            <a:avLst/>
+          </a:prstGeom>
+          <a:solidFill>
+            <a:srgbClr val="FDF8F1"/>
+          </a:solidFill>
+          <a:ln>
+            <a:noFill/>
+          </a:ln>
+          <a:effectLst/>
+        </p:spPr>
+        <p:style>
+          <a:lnRef idx="1">
+            <a:schemeClr val="accent1"/>
+          </a:lnRef>
+          <a:fillRef idx="3">
+            <a:schemeClr val="accent1"/>
+          </a:fillRef>
+          <a:effectRef idx="2">
+            <a:schemeClr val="accent1"/>
+          </a:effectRef>
+          <a:fontRef idx="minor">
+            <a:schemeClr val="lt1"/>
+          </a:fontRef>
+        </p:style>
+        <p:txBody>
+          <a:bodyPr rtlCol="0" anchor="ctr"/>
+          <a:lstStyle/>
+          <a:p>
+            <a:pPr algn="ctr"/>
+          </a:p>
+        </p:txBody>
+      </p:sp>
+      <p:sp>
+        <p:nvSpPr>
+          <p:cNvPr id="13" name="TextBox 12"/>
+          <p:cNvSpPr txBox="1"/>
+          <p:nvPr/>
+        </p:nvSpPr>
+        <p:spPr>
+          <a:xfrm>
+            <a:off x="6345936" y="1965960"/>
+            <a:ext cx="2377440" cy="457200"/>
+          </a:xfrm>
+          <a:prstGeom prst="rect">
+            <a:avLst/>
+          </a:prstGeom>
+          <a:noFill/>
+        </p:spPr>
+        <p:txBody>
+          <a:bodyPr wrap="square" anchor="t">
+            <a:spAutoFit/>
+          </a:bodyPr>
+          <a:lstStyle/>
+          <a:p>
+            <a:pPr algn="l"/>
+            <a:r>
+              <a:rPr sz="1500" b="1">
+                <a:solidFill>
+                  <a:srgbClr val="0B7D6C"/>
+                </a:solidFill>
+                <a:latin typeface="Calibri"/>
+              </a:rPr>
+              <a:t>Local-first demo</a:t>
+            </a:r>
+          </a:p>
+        </p:txBody>
+      </p:sp>
+      <p:sp>
+        <p:nvSpPr>
+          <p:cNvPr id="14" name="TextBox 13"/>
+          <p:cNvSpPr txBox="1"/>
+          <p:nvPr/>
+        </p:nvSpPr>
+        <p:spPr>
+          <a:xfrm>
+            <a:off x="6345936" y="2468880"/>
+            <a:ext cx="2377440" cy="1005840"/>
+          </a:xfrm>
+          <a:prstGeom prst="rect">
+            <a:avLst/>
+          </a:prstGeom>
+          <a:noFill/>
+        </p:spPr>
+        <p:txBody>
+          <a:bodyPr wrap="square" anchor="t">
+            <a:spAutoFit/>
+          </a:bodyPr>
+          <a:lstStyle/>
+          <a:p>
+            <a:pPr algn="l"/>
+            <a:r>
+              <a:rPr sz="1200" b="0">
+                <a:solidFill>
+                  <a:srgbClr val="1F2A2E"/>
+                </a:solidFill>
+                <a:latin typeface="Calibri"/>
+              </a:rPr>
+              <a:t>Check-in state stays on device.</a:t>
+            </a:r>
+          </a:p>
+        </p:txBody>
+      </p:sp>
+      <p:sp>
+        <p:nvSpPr>
+          <p:cNvPr id="15" name="Rectangle 14"/>
+          <p:cNvSpPr/>
+          <p:nvPr/>
+        </p:nvSpPr>
+        <p:spPr>
+          <a:xfrm>
+            <a:off x="9015984" y="1828800"/>
+            <a:ext cx="2670048" cy="1783080"/>
+          </a:xfrm>
+          <a:prstGeom prst="rect">
+            <a:avLst/>
+          </a:prstGeom>
+          <a:solidFill>
+            <a:srgbClr val="FDF8F1"/>
+          </a:solidFill>
+          <a:ln>
+            <a:noFill/>
+          </a:ln>
+          <a:effectLst/>
+        </p:spPr>
+        <p:style>
+          <a:lnRef idx="1">
+            <a:schemeClr val="accent1"/>
+          </a:lnRef>
+          <a:fillRef idx="3">
+            <a:schemeClr val="accent1"/>
+          </a:fillRef>
+          <a:effectRef idx="2">
+            <a:schemeClr val="accent1"/>
+          </a:effectRef>
+          <a:fontRef idx="minor">
+            <a:schemeClr val="lt1"/>
+          </a:fontRef>
+        </p:style>
+        <p:txBody>
+          <a:bodyPr rtlCol="0" anchor="ctr"/>
+          <a:lstStyle/>
+          <a:p>
+            <a:pPr algn="ctr"/>
+          </a:p>
+        </p:txBody>
+      </p:sp>
+      <p:sp>
+        <p:nvSpPr>
+          <p:cNvPr id="16" name="TextBox 15"/>
+          <p:cNvSpPr txBox="1"/>
+          <p:nvPr/>
+        </p:nvSpPr>
+        <p:spPr>
+          <a:xfrm>
+            <a:off x="9198864" y="1965960"/>
+            <a:ext cx="2377440" cy="457200"/>
+          </a:xfrm>
+          <a:prstGeom prst="rect">
+            <a:avLst/>
+          </a:prstGeom>
+          <a:noFill/>
+        </p:spPr>
+        <p:txBody>
+          <a:bodyPr wrap="square" anchor="t">
+            <a:spAutoFit/>
+          </a:bodyPr>
+          <a:lstStyle/>
+          <a:p>
+            <a:pPr algn="l"/>
+            <a:r>
+              <a:rPr sz="1500" b="1">
+                <a:solidFill>
+                  <a:srgbClr val="0B7D6C"/>
+                </a:solidFill>
+                <a:latin typeface="Calibri"/>
+              </a:rPr>
+              <a:t>Auto-purge</a:t>
+            </a:r>
+          </a:p>
+        </p:txBody>
+      </p:sp>
+      <p:sp>
+        <p:nvSpPr>
+          <p:cNvPr id="17" name="TextBox 16"/>
+          <p:cNvSpPr txBox="1"/>
+          <p:nvPr/>
+        </p:nvSpPr>
+        <p:spPr>
+          <a:xfrm>
+            <a:off x="9198864" y="2468880"/>
+            <a:ext cx="2377440" cy="1005840"/>
+          </a:xfrm>
+          <a:prstGeom prst="rect">
+            <a:avLst/>
+          </a:prstGeom>
+          <a:noFill/>
+        </p:spPr>
+        <p:txBody>
+          <a:bodyPr wrap="square" anchor="t">
+            <a:spAutoFit/>
+          </a:bodyPr>
+          <a:lstStyle/>
+          <a:p>
+            <a:pPr algn="l"/>
+            <a:r>
+              <a:rPr sz="1200" b="0">
+                <a:solidFill>
+                  <a:srgbClr val="1F2A2E"/>
+                </a:solidFill>
+                <a:latin typeface="Calibri"/>
+              </a:rPr>
+              <a:t>Hashed logs, short TTL in production.</a:t>
+            </a:r>
+          </a:p>
+        </p:txBody>
+      </p:sp>
+      <p:sp>
+        <p:nvSpPr>
+          <p:cNvPr id="18" name="Rectangle 17"/>
+          <p:cNvSpPr/>
+          <p:nvPr/>
+        </p:nvSpPr>
+        <p:spPr>
+          <a:xfrm>
+            <a:off x="457200" y="3840480"/>
+            <a:ext cx="2670048" cy="1783080"/>
+          </a:xfrm>
+          <a:prstGeom prst="rect">
+            <a:avLst/>
+          </a:prstGeom>
+          <a:solidFill>
+            <a:srgbClr val="FDF8F1"/>
+          </a:solidFill>
+          <a:ln>
+            <a:noFill/>
+          </a:ln>
+          <a:effectLst/>
+        </p:spPr>
+        <p:style>
+          <a:lnRef idx="1">
+            <a:schemeClr val="accent1"/>
+          </a:lnRef>
+          <a:fillRef idx="3">
+            <a:schemeClr val="accent1"/>
+          </a:fillRef>
+          <a:effectRef idx="2">
+            <a:schemeClr val="accent1"/>
+          </a:effectRef>
+          <a:fontRef idx="minor">
+            <a:schemeClr val="lt1"/>
+          </a:fontRef>
+        </p:style>
+        <p:txBody>
+          <a:bodyPr rtlCol="0" anchor="ctr"/>
+          <a:lstStyle/>
+          <a:p>
+            <a:pPr algn="ctr"/>
+          </a:p>
+        </p:txBody>
+      </p:sp>
+      <p:sp>
+        <p:nvSpPr>
+          <p:cNvPr id="19" name="TextBox 18"/>
+          <p:cNvSpPr txBox="1"/>
+          <p:nvPr/>
+        </p:nvSpPr>
+        <p:spPr>
+          <a:xfrm>
+            <a:off x="640080" y="3977640"/>
+            <a:ext cx="2377440" cy="457200"/>
+          </a:xfrm>
+          <a:prstGeom prst="rect">
+            <a:avLst/>
+          </a:prstGeom>
+          <a:noFill/>
+        </p:spPr>
+        <p:txBody>
+          <a:bodyPr wrap="square" anchor="t">
+            <a:spAutoFit/>
+          </a:bodyPr>
+          <a:lstStyle/>
+          <a:p>
+            <a:pPr algn="l"/>
+            <a:r>
+              <a:rPr sz="1500" b="1">
+                <a:solidFill>
+                  <a:srgbClr val="0B7D6C"/>
+                </a:solidFill>
+                <a:latin typeface="Calibri"/>
+              </a:rPr>
+              <a:t>Consent-gated</a:t>
+            </a:r>
+          </a:p>
+        </p:txBody>
+      </p:sp>
+      <p:sp>
+        <p:nvSpPr>
+          <p:cNvPr id="20" name="TextBox 19"/>
+          <p:cNvSpPr txBox="1"/>
+          <p:nvPr/>
+        </p:nvSpPr>
+        <p:spPr>
+          <a:xfrm>
+            <a:off x="640080" y="4480560"/>
+            <a:ext cx="2377440" cy="1005840"/>
+          </a:xfrm>
+          <a:prstGeom prst="rect">
+            <a:avLst/>
+          </a:prstGeom>
+          <a:noFill/>
+        </p:spPr>
+        <p:txBody>
+          <a:bodyPr wrap="square" anchor="t">
+            <a:spAutoFit/>
+          </a:bodyPr>
+          <a:lstStyle/>
+          <a:p>
+            <a:pPr algn="l"/>
+            <a:r>
+              <a:rPr sz="1200" b="0">
+                <a:solidFill>
+                  <a:srgbClr val="1F2A2E"/>
+                </a:solidFill>
+                <a:latin typeface="Calibri"/>
+              </a:rPr>
+              <a:t>Identities revealed only by you.</a:t>
+            </a:r>
+          </a:p>
+        </p:txBody>
+      </p:sp>
+      <p:sp>
+        <p:nvSpPr>
+          <p:cNvPr id="21" name="Rectangle 20"/>
+          <p:cNvSpPr/>
+          <p:nvPr/>
+        </p:nvSpPr>
+        <p:spPr>
+          <a:xfrm>
+            <a:off x="3310128" y="3840480"/>
+            <a:ext cx="2670048" cy="1783080"/>
+          </a:xfrm>
+          <a:prstGeom prst="rect">
+            <a:avLst/>
+          </a:prstGeom>
+          <a:solidFill>
+            <a:srgbClr val="FDF8F1"/>
+          </a:solidFill>
+          <a:ln>
+            <a:noFill/>
+          </a:ln>
+          <a:effectLst/>
+        </p:spPr>
+        <p:style>
+          <a:lnRef idx="1">
+            <a:schemeClr val="accent1"/>
+          </a:lnRef>
+          <a:fillRef idx="3">
+            <a:schemeClr val="accent1"/>
+          </a:fillRef>
+          <a:effectRef idx="2">
+            <a:schemeClr val="accent1"/>
+          </a:effectRef>
+          <a:fontRef idx="minor">
+            <a:schemeClr val="lt1"/>
+          </a:fontRef>
+        </p:style>
+        <p:txBody>
+          <a:bodyPr rtlCol="0" anchor="ctr"/>
+          <a:lstStyle/>
+          <a:p>
+            <a:pPr algn="ctr"/>
+          </a:p>
+        </p:txBody>
+      </p:sp>
+      <p:sp>
+        <p:nvSpPr>
+          <p:cNvPr id="22" name="TextBox 21"/>
+          <p:cNvSpPr txBox="1"/>
+          <p:nvPr/>
+        </p:nvSpPr>
+        <p:spPr>
+          <a:xfrm>
+            <a:off x="3493008" y="3977640"/>
+            <a:ext cx="2377440" cy="457200"/>
+          </a:xfrm>
+          <a:prstGeom prst="rect">
+            <a:avLst/>
+          </a:prstGeom>
+          <a:noFill/>
+        </p:spPr>
+        <p:txBody>
+          <a:bodyPr wrap="square" anchor="t">
+            <a:spAutoFit/>
+          </a:bodyPr>
+          <a:lstStyle/>
+          <a:p>
+            <a:pPr algn="l"/>
+            <a:r>
+              <a:rPr sz="1500" b="1">
+                <a:solidFill>
+                  <a:srgbClr val="0B7D6C"/>
+                </a:solidFill>
+                <a:latin typeface="Calibri"/>
+              </a:rPr>
+              <a:t>Encrypted</a:t>
+            </a:r>
+          </a:p>
+        </p:txBody>
+      </p:sp>
+      <p:sp>
+        <p:nvSpPr>
+          <p:cNvPr id="23" name="TextBox 22"/>
+          <p:cNvSpPr txBox="1"/>
+          <p:nvPr/>
+        </p:nvSpPr>
+        <p:spPr>
+          <a:xfrm>
+            <a:off x="3493008" y="4480560"/>
+            <a:ext cx="2377440" cy="1005840"/>
+          </a:xfrm>
+          <a:prstGeom prst="rect">
+            <a:avLst/>
+          </a:prstGeom>
+          <a:noFill/>
+        </p:spPr>
+        <p:txBody>
+          <a:bodyPr wrap="square" anchor="t">
+            <a:spAutoFit/>
+          </a:bodyPr>
+          <a:lstStyle/>
+          <a:p>
+            <a:pPr algn="l"/>
+            <a:r>
+              <a:rPr sz="1200" b="0">
+                <a:solidFill>
+                  <a:srgbClr val="1F2A2E"/>
+                </a:solidFill>
+                <a:latin typeface="Calibri"/>
+              </a:rPr>
+              <a:t>TLS + column-level encryption at rest.</a:t>
+            </a:r>
+          </a:p>
+        </p:txBody>
+      </p:sp>
+      <p:sp>
+        <p:nvSpPr>
+          <p:cNvPr id="24" name="Rectangle 23"/>
+          <p:cNvSpPr/>
+          <p:nvPr/>
+        </p:nvSpPr>
+        <p:spPr>
+          <a:xfrm>
+            <a:off x="6163056" y="3840480"/>
+            <a:ext cx="2670048" cy="1783080"/>
+          </a:xfrm>
+          <a:prstGeom prst="rect">
+            <a:avLst/>
+          </a:prstGeom>
+          <a:solidFill>
+            <a:srgbClr val="FDF8F1"/>
+          </a:solidFill>
+          <a:ln>
+            <a:noFill/>
+          </a:ln>
+          <a:effectLst/>
+        </p:spPr>
+        <p:style>
+          <a:lnRef idx="1">
+            <a:schemeClr val="accent1"/>
+          </a:lnRef>
+          <a:fillRef idx="3">
+            <a:schemeClr val="accent1"/>
+          </a:fillRef>
+          <a:effectRef idx="2">
+            <a:schemeClr val="accent1"/>
+          </a:effectRef>
+          <a:fontRef idx="minor">
+            <a:schemeClr val="lt1"/>
+          </a:fontRef>
+        </p:style>
+        <p:txBody>
+          <a:bodyPr rtlCol="0" anchor="ctr"/>
+          <a:lstStyle/>
+          <a:p>
+            <a:pPr algn="ctr"/>
+          </a:p>
+        </p:txBody>
+      </p:sp>
+      <p:sp>
+        <p:nvSpPr>
+          <p:cNvPr id="25" name="TextBox 24"/>
+          <p:cNvSpPr txBox="1"/>
+          <p:nvPr/>
+        </p:nvSpPr>
+        <p:spPr>
+          <a:xfrm>
+            <a:off x="6345936" y="3977640"/>
+            <a:ext cx="2377440" cy="457200"/>
+          </a:xfrm>
+          <a:prstGeom prst="rect">
+            <a:avLst/>
+          </a:prstGeom>
+          <a:noFill/>
+        </p:spPr>
+        <p:txBody>
+          <a:bodyPr wrap="square" anchor="t">
+            <a:spAutoFit/>
+          </a:bodyPr>
+          <a:lstStyle/>
+          <a:p>
+            <a:pPr algn="l"/>
+            <a:r>
+              <a:rPr sz="1500" b="1">
+                <a:solidFill>
+                  <a:srgbClr val="0B7D6C"/>
+                </a:solidFill>
+                <a:latin typeface="Calibri"/>
+              </a:rPr>
+              <a:t>🚨 SOS + Crisis</a:t>
+            </a:r>
+          </a:p>
+        </p:txBody>
+      </p:sp>
+      <p:sp>
+        <p:nvSpPr>
+          <p:cNvPr id="26" name="TextBox 25"/>
+          <p:cNvSpPr txBox="1"/>
+          <p:nvPr/>
+        </p:nvSpPr>
+        <p:spPr>
+          <a:xfrm>
+            <a:off x="6345936" y="4480560"/>
+            <a:ext cx="2377440" cy="1005840"/>
+          </a:xfrm>
+          <a:prstGeom prst="rect">
+            <a:avLst/>
+          </a:prstGeom>
+          <a:noFill/>
+        </p:spPr>
+        <p:txBody>
+          <a:bodyPr wrap="square" anchor="t">
+            <a:spAutoFit/>
+          </a:bodyPr>
+          <a:lstStyle/>
+          <a:p>
+            <a:pPr algn="l"/>
+            <a:r>
+              <a:rPr sz="1200" b="0">
+                <a:solidFill>
+                  <a:srgbClr val="1F2A2E"/>
+                </a:solidFill>
+                <a:latin typeface="Calibri"/>
+              </a:rPr>
+              <a:t>High-risk language auto-escalates, never routes around.</a:t>
+            </a:r>
+          </a:p>
+        </p:txBody>
+      </p:sp>
+      <p:sp>
+        <p:nvSpPr>
+          <p:cNvPr id="27" name="Rectangle 26"/>
+          <p:cNvSpPr/>
+          <p:nvPr/>
+        </p:nvSpPr>
+        <p:spPr>
+          <a:xfrm>
+            <a:off x="9015984" y="3840480"/>
+            <a:ext cx="2670048" cy="1783080"/>
+          </a:xfrm>
+          <a:prstGeom prst="rect">
+            <a:avLst/>
+          </a:prstGeom>
+          <a:solidFill>
+            <a:srgbClr val="FDF8F1"/>
+          </a:solidFill>
+          <a:ln>
+            <a:noFill/>
+          </a:ln>
+          <a:effectLst/>
+        </p:spPr>
+        <p:style>
+          <a:lnRef idx="1">
+            <a:schemeClr val="accent1"/>
+          </a:lnRef>
+          <a:fillRef idx="3">
+            <a:schemeClr val="accent1"/>
+          </a:fillRef>
+          <a:effectRef idx="2">
+            <a:schemeClr val="accent1"/>
+          </a:effectRef>
+          <a:fontRef idx="minor">
+            <a:schemeClr val="lt1"/>
+          </a:fontRef>
+        </p:style>
+        <p:txBody>
+          <a:bodyPr rtlCol="0" anchor="ctr"/>
+          <a:lstStyle/>
+          <a:p>
+            <a:pPr algn="ctr"/>
+          </a:p>
+        </p:txBody>
+      </p:sp>
+      <p:sp>
+        <p:nvSpPr>
+          <p:cNvPr id="28" name="TextBox 27"/>
+          <p:cNvSpPr txBox="1"/>
+          <p:nvPr/>
+        </p:nvSpPr>
+        <p:spPr>
+          <a:xfrm>
+            <a:off x="9198864" y="3977640"/>
+            <a:ext cx="2377440" cy="457200"/>
+          </a:xfrm>
+          <a:prstGeom prst="rect">
+            <a:avLst/>
+          </a:prstGeom>
+          <a:noFill/>
+        </p:spPr>
+        <p:txBody>
+          <a:bodyPr wrap="square" anchor="t">
+            <a:spAutoFit/>
+          </a:bodyPr>
+          <a:lstStyle/>
+          <a:p>
+            <a:pPr algn="l"/>
+            <a:r>
+              <a:rPr sz="1500" b="1">
+                <a:solidFill>
+                  <a:srgbClr val="0B7D6C"/>
+                </a:solidFill>
+                <a:latin typeface="Calibri"/>
+              </a:rPr>
+              <a:t>🌍 Multilingual</a:t>
+            </a:r>
+          </a:p>
+        </p:txBody>
+      </p:sp>
+      <p:sp>
+        <p:nvSpPr>
+          <p:cNvPr id="29" name="TextBox 28"/>
+          <p:cNvSpPr txBox="1"/>
+          <p:nvPr/>
+        </p:nvSpPr>
+        <p:spPr>
+          <a:xfrm>
+            <a:off x="9198864" y="4480560"/>
+            <a:ext cx="2377440" cy="1005840"/>
+          </a:xfrm>
+          <a:prstGeom prst="rect">
+            <a:avLst/>
+          </a:prstGeom>
+          <a:noFill/>
+        </p:spPr>
+        <p:txBody>
+          <a:bodyPr wrap="square" anchor="t">
+            <a:spAutoFit/>
+          </a:bodyPr>
+          <a:lstStyle/>
+          <a:p>
+            <a:pPr algn="l"/>
+            <a:r>
+              <a:rPr sz="1200" b="0">
+                <a:solidFill>
+                  <a:srgbClr val="1F2A2E"/>
+                </a:solidFill>
+                <a:latin typeface="Calibri"/>
+              </a:rPr>
+              <a:t>Stigma is worse vernacular — EN/HI/MR/GU.</a:t>
             </a:r>
           </a:p>
         </p:txBody>
@@ -7896,7 +10406,7 @@
                 </a:solidFill>
                 <a:latin typeface="Calibri"/>
               </a:rPr>
-              <a:t>Why It's Credible</a:t>
+              <a:t>Built for Bharat</a:t>
             </a:r>
           </a:p>
         </p:txBody>
@@ -7931,7 +10441,7 @@
                 </a:solidFill>
                 <a:latin typeface="Calibri"/>
               </a:rPr>
-              <a:t>FRAMEWORKS &amp; TRUST ANCHORS</a:t>
+              <a:t>MULTILINGUAL + ACCESSIBLE</a:t>
             </a:r>
           </a:p>
         </p:txBody>
@@ -7945,7 +10455,7 @@
         <p:spPr>
           <a:xfrm>
             <a:off x="548640" y="1828800"/>
-            <a:ext cx="10515600" cy="4389120"/>
+            <a:ext cx="5486400" cy="4206240"/>
           </a:xfrm>
           <a:prstGeom prst="rect">
             <a:avLst/>
@@ -7960,81 +10470,263 @@
           <a:p>
             <a:pPr>
               <a:spcAft>
-                <a:spcPts val="1400"/>
+                <a:spcPts val="1200"/>
               </a:spcAft>
             </a:pPr>
             <a:r>
-              <a:rPr sz="1800">
+              <a:rPr sz="1700">
                 <a:solidFill>
                   <a:srgbClr val="1F2A2E"/>
                 </a:solidFill>
                 <a:latin typeface="Calibri"/>
               </a:rPr>
-              <a:t>• Peer Listener certification aligned with NIMHANS &amp; iCall training frameworks</a:t>
+              <a:t>• Language switcher: English, Hindi, Marathi, Gujarati</a:t>
             </a:r>
           </a:p>
           <a:p>
             <a:pPr>
               <a:spcAft>
-                <a:spcPts val="1400"/>
+                <a:spcPts val="1200"/>
               </a:spcAft>
             </a:pPr>
             <a:r>
-              <a:rPr sz="1800">
+              <a:rPr sz="1700">
                 <a:solidFill>
                   <a:srgbClr val="1F2A2E"/>
                 </a:solidFill>
                 <a:latin typeface="Calibri"/>
               </a:rPr>
-              <a:t>• Crisis routing uses verified national helplines: Tele-MANAS 14416, iCall (TISS), Vandrevala</a:t>
+              <a:t>• Resource library published in all four languages</a:t>
             </a:r>
           </a:p>
           <a:p>
             <a:pPr>
               <a:spcAft>
-                <a:spcPts val="1400"/>
+                <a:spcPts val="1200"/>
               </a:spcAft>
             </a:pPr>
             <a:r>
-              <a:rPr sz="1800">
+              <a:rPr sz="1700">
                 <a:solidFill>
                   <a:srgbClr val="1F2A2E"/>
                 </a:solidFill>
                 <a:latin typeface="Calibri"/>
               </a:rPr>
-              <a:t>• Anonymous-first mirrors global best practice (7 Cups, Crisis Text Line) adapted for India</a:t>
+              <a:t>• Crisis keywords detected across languages in triage</a:t>
             </a:r>
           </a:p>
           <a:p>
             <a:pPr>
               <a:spcAft>
-                <a:spcPts val="1400"/>
+                <a:spcPts val="1200"/>
               </a:spcAft>
             </a:pPr>
             <a:r>
-              <a:rPr sz="1800">
+              <a:rPr sz="1700">
                 <a:solidFill>
                   <a:srgbClr val="1F2A2E"/>
                 </a:solidFill>
                 <a:latin typeface="Calibri"/>
               </a:rPr>
-              <a:t>• Resource library in Hindi + English — targets worse stigma in vernacular/non-metro contexts</a:t>
+              <a:t>• Stigma is worse in vernacular, non-metro contexts</a:t>
             </a:r>
           </a:p>
           <a:p>
             <a:pPr>
               <a:spcAft>
-                <a:spcPts val="1400"/>
+                <a:spcPts val="1200"/>
               </a:spcAft>
             </a:pPr>
             <a:r>
-              <a:rPr sz="1800">
+              <a:rPr sz="1700">
                 <a:solidFill>
                   <a:srgbClr val="1F2A2E"/>
                 </a:solidFill>
                 <a:latin typeface="Calibri"/>
               </a:rPr>
-              <a:t>• Safety built-in: high-risk language auto-escalates, never routes around crisis</a:t>
+              <a:t>• High-contrast mode + keyboard focus + ARIA labels</a:t>
+            </a:r>
+          </a:p>
+          <a:p>
+            <a:pPr>
+              <a:spcAft>
+                <a:spcPts val="1200"/>
+              </a:spcAft>
+            </a:pPr>
+            <a:r>
+              <a:rPr sz="1700">
+                <a:solidFill>
+                  <a:srgbClr val="1F2A2E"/>
+                </a:solidFill>
+                <a:latin typeface="Calibri"/>
+              </a:rPr>
+              <a:t>• Dark mode for late-night, low-stimulation use</a:t>
+            </a:r>
+          </a:p>
+        </p:txBody>
+      </p:sp>
+      <p:sp>
+        <p:nvSpPr>
+          <p:cNvPr id="7" name="Rectangle 6"/>
+          <p:cNvSpPr/>
+          <p:nvPr/>
+        </p:nvSpPr>
+        <p:spPr>
+          <a:xfrm>
+            <a:off x="6400800" y="1828800"/>
+            <a:ext cx="5212080" cy="3840480"/>
+          </a:xfrm>
+          <a:prstGeom prst="rect">
+            <a:avLst/>
+          </a:prstGeom>
+          <a:solidFill>
+            <a:srgbClr val="0F9B86"/>
+          </a:solidFill>
+          <a:ln>
+            <a:noFill/>
+          </a:ln>
+          <a:effectLst/>
+        </p:spPr>
+        <p:style>
+          <a:lnRef idx="1">
+            <a:schemeClr val="accent1"/>
+          </a:lnRef>
+          <a:fillRef idx="3">
+            <a:schemeClr val="accent1"/>
+          </a:fillRef>
+          <a:effectRef idx="2">
+            <a:schemeClr val="accent1"/>
+          </a:effectRef>
+          <a:fontRef idx="minor">
+            <a:schemeClr val="lt1"/>
+          </a:fontRef>
+        </p:style>
+        <p:txBody>
+          <a:bodyPr rtlCol="0" anchor="ctr"/>
+          <a:lstStyle/>
+          <a:p>
+            <a:pPr algn="ctr"/>
+          </a:p>
+        </p:txBody>
+      </p:sp>
+      <p:sp>
+        <p:nvSpPr>
+          <p:cNvPr id="8" name="TextBox 7"/>
+          <p:cNvSpPr txBox="1"/>
+          <p:nvPr/>
+        </p:nvSpPr>
+        <p:spPr>
+          <a:xfrm>
+            <a:off x="6675120" y="2103120"/>
+            <a:ext cx="4663440" cy="457200"/>
+          </a:xfrm>
+          <a:prstGeom prst="rect">
+            <a:avLst/>
+          </a:prstGeom>
+          <a:noFill/>
+        </p:spPr>
+        <p:txBody>
+          <a:bodyPr wrap="square" anchor="t">
+            <a:spAutoFit/>
+          </a:bodyPr>
+          <a:lstStyle/>
+          <a:p>
+            <a:pPr algn="l"/>
+            <a:r>
+              <a:rPr sz="1800" b="1">
+                <a:solidFill>
+                  <a:srgbClr val="FFFFFF"/>
+                </a:solidFill>
+                <a:latin typeface="Calibri"/>
+              </a:rPr>
+              <a:t>Languages</a:t>
+            </a:r>
+          </a:p>
+        </p:txBody>
+      </p:sp>
+      <p:sp>
+        <p:nvSpPr>
+          <p:cNvPr id="9" name="TextBox 8"/>
+          <p:cNvSpPr txBox="1"/>
+          <p:nvPr/>
+        </p:nvSpPr>
+        <p:spPr>
+          <a:xfrm>
+            <a:off x="6675120" y="2743200"/>
+            <a:ext cx="4663440" cy="2743200"/>
+          </a:xfrm>
+          <a:prstGeom prst="rect">
+            <a:avLst/>
+          </a:prstGeom>
+          <a:noFill/>
+        </p:spPr>
+        <p:txBody>
+          <a:bodyPr wrap="square">
+            <a:spAutoFit/>
+          </a:bodyPr>
+          <a:lstStyle/>
+          <a:p>
+            <a:pPr>
+              <a:spcAft>
+                <a:spcPts val="1200"/>
+              </a:spcAft>
+            </a:pPr>
+            <a:r>
+              <a:rPr sz="1700">
+                <a:solidFill>
+                  <a:srgbClr val="FFFFFF"/>
+                </a:solidFill>
+                <a:latin typeface="Calibri"/>
+              </a:rPr>
+              <a:t>• English  — EN</a:t>
+            </a:r>
+          </a:p>
+          <a:p>
+            <a:pPr>
+              <a:spcAft>
+                <a:spcPts val="1200"/>
+              </a:spcAft>
+            </a:pPr>
+            <a:r>
+              <a:rPr sz="1700">
+                <a:solidFill>
+                  <a:srgbClr val="FFFFFF"/>
+                </a:solidFill>
+                <a:latin typeface="Calibri"/>
+              </a:rPr>
+              <a:t>• Hindi  — हिन्दी  (HI)</a:t>
+            </a:r>
+          </a:p>
+          <a:p>
+            <a:pPr>
+              <a:spcAft>
+                <a:spcPts val="1200"/>
+              </a:spcAft>
+            </a:pPr>
+            <a:r>
+              <a:rPr sz="1700">
+                <a:solidFill>
+                  <a:srgbClr val="FFFFFF"/>
+                </a:solidFill>
+                <a:latin typeface="Calibri"/>
+              </a:rPr>
+              <a:t>• Marathi  — मराठी  (MR)</a:t>
+            </a:r>
+          </a:p>
+          <a:p>
+            <a:pPr>
+              <a:spcAft>
+                <a:spcPts val="1200"/>
+              </a:spcAft>
+            </a:pPr>
+            <a:r>
+              <a:rPr sz="1700">
+                <a:solidFill>
+                  <a:srgbClr val="FFFFFF"/>
+                </a:solidFill>
+                <a:latin typeface="Calibri"/>
+              </a:rPr>
+              <a:t>• Gujarati  — ગુજરાતી  (GU)</a:t>
             </a:r>
           </a:p>
         </p:txBody>

--- a/pitch/MANNMITRA.pptx
+++ b/pitch/MANNMITRA.pptx
@@ -18,6 +18,7 @@
     <p:sldId id="266" r:id="rId17"/>
     <p:sldId id="267" r:id="rId18"/>
     <p:sldId id="268" r:id="rId19"/>
+    <p:sldId id="269" r:id="rId20"/>
   </p:sldIdLst>
   <p:sldSz cx="12191695" cy="6858000" type="screen4x3"/>
   <p:notesSz cx="6858000" cy="9144000"/>
@@ -3500,7 +3501,7 @@
                 </a:solidFill>
                 <a:latin typeface="Calibri"/>
               </a:rPr>
-              <a:t>Scalability &amp; Business</a:t>
+              <a:t>Built for Bharat</a:t>
             </a:r>
           </a:p>
         </p:txBody>
@@ -3535,7 +3536,7 @@
                 </a:solidFill>
                 <a:latin typeface="Calibri"/>
               </a:rPr>
-              <a:t>B2B2C MODEL</a:t>
+              <a:t>MULTILINGUAL + ACCESSIBLE</a:t>
             </a:r>
           </a:p>
         </p:txBody>
@@ -3548,8 +3549,8 @@
         </p:nvSpPr>
         <p:spPr>
           <a:xfrm>
-            <a:off x="548640" y="1737360"/>
-            <a:ext cx="5577840" cy="4572000"/>
+            <a:off x="548640" y="1828800"/>
+            <a:ext cx="5486400" cy="4206240"/>
           </a:xfrm>
           <a:prstGeom prst="rect">
             <a:avLst/>
@@ -3564,7 +3565,7 @@
           <a:p>
             <a:pPr>
               <a:spcAft>
-                <a:spcPts val="1000"/>
+                <a:spcPts val="1200"/>
               </a:spcAft>
             </a:pPr>
             <a:r>
@@ -3574,13 +3575,13 @@
                 </a:solidFill>
                 <a:latin typeface="Calibri"/>
               </a:rPr>
-              <a:t>• Sell to colleges as a subscription</a:t>
-            </a:r>
-          </a:p>
-          <a:p>
-            <a:pPr lvl="1">
+              <a:t>• Language switcher: English, Hindi, Marathi, Gujarati</a:t>
+            </a:r>
+          </a:p>
+          <a:p>
+            <a:pPr>
               <a:spcAft>
-                <a:spcPts val="1000"/>
+                <a:spcPts val="1200"/>
               </a:spcAft>
             </a:pPr>
             <a:r>
@@ -3590,13 +3591,13 @@
                 </a:solidFill>
                 <a:latin typeface="Calibri"/>
               </a:rPr>
-              <a:t>– Cheaper than hiring 5 in-house counselors each</a:t>
+              <a:t>• Resource library published in all four languages</a:t>
             </a:r>
           </a:p>
           <a:p>
             <a:pPr>
               <a:spcAft>
-                <a:spcPts val="1000"/>
+                <a:spcPts val="1200"/>
               </a:spcAft>
             </a:pPr>
             <a:r>
@@ -3606,13 +3607,13 @@
                 </a:solidFill>
                 <a:latin typeface="Calibri"/>
               </a:rPr>
-              <a:t>• Shared counselor pool across colleges</a:t>
-            </a:r>
-          </a:p>
-          <a:p>
-            <a:pPr lvl="1">
+              <a:t>• Crisis keywords detected across languages in triage</a:t>
+            </a:r>
+          </a:p>
+          <a:p>
+            <a:pPr>
               <a:spcAft>
-                <a:spcPts val="1000"/>
+                <a:spcPts val="1200"/>
               </a:spcAft>
             </a:pPr>
             <a:r>
@@ -3622,13 +3623,13 @@
                 </a:solidFill>
                 <a:latin typeface="Calibri"/>
               </a:rPr>
-              <a:t>– One network serves many campuses → solves shortage</a:t>
+              <a:t>• Stigma is worse in vernacular, non-metro contexts</a:t>
             </a:r>
           </a:p>
           <a:p>
             <a:pPr>
               <a:spcAft>
-                <a:spcPts val="1000"/>
+                <a:spcPts val="1200"/>
               </a:spcAft>
             </a:pPr>
             <a:r>
@@ -3638,13 +3639,13 @@
                 </a:solidFill>
                 <a:latin typeface="Calibri"/>
               </a:rPr>
-              <a:t>• Peer volunteers self-replenish each batch</a:t>
-            </a:r>
-          </a:p>
-          <a:p>
-            <a:pPr lvl="1">
+              <a:t>• High-contrast mode + keyboard focus + ARIA labels</a:t>
+            </a:r>
+          </a:p>
+          <a:p>
+            <a:pPr>
               <a:spcAft>
-                <a:spcPts val="1000"/>
+                <a:spcPts val="1200"/>
               </a:spcAft>
             </a:pPr>
             <a:r>
@@ -3654,23 +3655,7 @@
                 </a:solidFill>
                 <a:latin typeface="Calibri"/>
               </a:rPr>
-              <a:t>– Near-free, compounding supply of listeners</a:t>
-            </a:r>
-          </a:p>
-          <a:p>
-            <a:pPr>
-              <a:spcAft>
-                <a:spcPts val="1000"/>
-              </a:spcAft>
-            </a:pPr>
-            <a:r>
-              <a:rPr sz="1700">
-                <a:solidFill>
-                  <a:srgbClr val="1F2A2E"/>
-                </a:solidFill>
-                <a:latin typeface="Calibri"/>
-              </a:rPr>
-              <a:t>• CSR / wellness-fund subsidies for low-income camps</a:t>
+              <a:t>• Dark mode for late-night, low-stimulation use</a:t>
             </a:r>
           </a:p>
         </p:txBody>
@@ -3684,7 +3669,7 @@
         <p:spPr>
           <a:xfrm>
             <a:off x="6400800" y="1828800"/>
-            <a:ext cx="5212080" cy="4023360"/>
+            <a:ext cx="5212080" cy="3840480"/>
           </a:xfrm>
           <a:prstGeom prst="rect">
             <a:avLst/>
@@ -3727,8 +3712,8 @@
         </p:nvSpPr>
         <p:spPr>
           <a:xfrm>
-            <a:off x="6583680" y="2011680"/>
-            <a:ext cx="4846320" cy="457200"/>
+            <a:off x="6675120" y="2103120"/>
+            <a:ext cx="4663440" cy="457200"/>
           </a:xfrm>
           <a:prstGeom prst="rect">
             <a:avLst/>
@@ -3749,7 +3734,7 @@
                 </a:solidFill>
                 <a:latin typeface="Calibri"/>
               </a:rPr>
-              <a:t>Unit economics</a:t>
+              <a:t>Languages</a:t>
             </a:r>
           </a:p>
         </p:txBody>
@@ -3762,8 +3747,8 @@
         </p:nvSpPr>
         <p:spPr>
           <a:xfrm>
-            <a:off x="6583680" y="2651760"/>
-            <a:ext cx="4846320" cy="3108960"/>
+            <a:off x="6675120" y="2743200"/>
+            <a:ext cx="4663440" cy="2743200"/>
           </a:xfrm>
           <a:prstGeom prst="rect">
             <a:avLst/>
@@ -3778,65 +3763,65 @@
           <a:p>
             <a:pPr>
               <a:spcAft>
-                <a:spcPts val="1000"/>
+                <a:spcPts val="1200"/>
               </a:spcAft>
             </a:pPr>
             <a:r>
-              <a:rPr sz="1500">
+              <a:rPr sz="1700">
                 <a:solidFill>
                   <a:srgbClr val="FFFFFF"/>
                 </a:solidFill>
                 <a:latin typeface="Calibri"/>
               </a:rPr>
-              <a:t>• College pays per-student/yr subscription</a:t>
+              <a:t>• English  — EN</a:t>
             </a:r>
           </a:p>
           <a:p>
             <a:pPr>
               <a:spcAft>
-                <a:spcPts val="1000"/>
+                <a:spcPts val="1200"/>
               </a:spcAft>
             </a:pPr>
             <a:r>
-              <a:rPr sz="1500">
+              <a:rPr sz="1700">
                 <a:solidFill>
                   <a:srgbClr val="FFFFFF"/>
                 </a:solidFill>
                 <a:latin typeface="Calibri"/>
               </a:rPr>
-              <a:t>• Counselor cost amortized across N colleges</a:t>
+              <a:t>• Hindi  — हिन्दी  (HI)</a:t>
             </a:r>
           </a:p>
           <a:p>
             <a:pPr>
               <a:spcAft>
-                <a:spcPts val="1000"/>
+                <a:spcPts val="1200"/>
               </a:spcAft>
             </a:pPr>
             <a:r>
-              <a:rPr sz="1500">
+              <a:rPr sz="1700">
                 <a:solidFill>
                   <a:srgbClr val="FFFFFF"/>
                 </a:solidFill>
                 <a:latin typeface="Calibri"/>
               </a:rPr>
-              <a:t>• Peer layer = ~0 marginal cost</a:t>
+              <a:t>• Marathi  — मराठी  (MR)</a:t>
             </a:r>
           </a:p>
           <a:p>
             <a:pPr>
               <a:spcAft>
-                <a:spcPts val="1000"/>
+                <a:spcPts val="1200"/>
               </a:spcAft>
             </a:pPr>
             <a:r>
-              <a:rPr sz="1500">
+              <a:rPr sz="1700">
                 <a:solidFill>
                   <a:srgbClr val="FFFFFF"/>
                 </a:solidFill>
                 <a:latin typeface="Calibri"/>
               </a:rPr>
-              <a:t>• Retention via trust, not forced signup</a:t>
+              <a:t>• Gujarati  — ગુજરાતી  (GU)</a:t>
             </a:r>
           </a:p>
         </p:txBody>
@@ -3977,7 +3962,7 @@
                 </a:solidFill>
                 <a:latin typeface="Calibri"/>
               </a:rPr>
-              <a:t>Impact (Demo Metrics)</a:t>
+              <a:t>Scalability &amp; Business</a:t>
             </a:r>
           </a:p>
         </p:txBody>
@@ -4012,21 +3997,156 @@
                 </a:solidFill>
                 <a:latin typeface="Calibri"/>
               </a:rPr>
-              <a:t>WHAT SUCCESS LOOKS LIKE</a:t>
-            </a:r>
-          </a:p>
-        </p:txBody>
-      </p:sp>
-      <p:sp>
-        <p:nvSpPr>
-          <p:cNvPr id="6" name="Rectangle 5"/>
+              <a:t>B2B2C MODEL</a:t>
+            </a:r>
+          </a:p>
+        </p:txBody>
+      </p:sp>
+      <p:sp>
+        <p:nvSpPr>
+          <p:cNvPr id="6" name="TextBox 5"/>
+          <p:cNvSpPr txBox="1"/>
+          <p:nvPr/>
+        </p:nvSpPr>
+        <p:spPr>
+          <a:xfrm>
+            <a:off x="548640" y="1737360"/>
+            <a:ext cx="5577840" cy="4572000"/>
+          </a:xfrm>
+          <a:prstGeom prst="rect">
+            <a:avLst/>
+          </a:prstGeom>
+          <a:noFill/>
+        </p:spPr>
+        <p:txBody>
+          <a:bodyPr wrap="square">
+            <a:spAutoFit/>
+          </a:bodyPr>
+          <a:lstStyle/>
+          <a:p>
+            <a:pPr>
+              <a:spcAft>
+                <a:spcPts val="1000"/>
+              </a:spcAft>
+            </a:pPr>
+            <a:r>
+              <a:rPr sz="1700">
+                <a:solidFill>
+                  <a:srgbClr val="1F2A2E"/>
+                </a:solidFill>
+                <a:latin typeface="Calibri"/>
+              </a:rPr>
+              <a:t>• Sell to colleges as a subscription</a:t>
+            </a:r>
+          </a:p>
+          <a:p>
+            <a:pPr lvl="1">
+              <a:spcAft>
+                <a:spcPts val="1000"/>
+              </a:spcAft>
+            </a:pPr>
+            <a:r>
+              <a:rPr sz="1700">
+                <a:solidFill>
+                  <a:srgbClr val="1F2A2E"/>
+                </a:solidFill>
+                <a:latin typeface="Calibri"/>
+              </a:rPr>
+              <a:t>– Cheaper than hiring 5 in-house counselors each</a:t>
+            </a:r>
+          </a:p>
+          <a:p>
+            <a:pPr>
+              <a:spcAft>
+                <a:spcPts val="1000"/>
+              </a:spcAft>
+            </a:pPr>
+            <a:r>
+              <a:rPr sz="1700">
+                <a:solidFill>
+                  <a:srgbClr val="1F2A2E"/>
+                </a:solidFill>
+                <a:latin typeface="Calibri"/>
+              </a:rPr>
+              <a:t>• Shared counselor pool across colleges</a:t>
+            </a:r>
+          </a:p>
+          <a:p>
+            <a:pPr lvl="1">
+              <a:spcAft>
+                <a:spcPts val="1000"/>
+              </a:spcAft>
+            </a:pPr>
+            <a:r>
+              <a:rPr sz="1700">
+                <a:solidFill>
+                  <a:srgbClr val="1F2A2E"/>
+                </a:solidFill>
+                <a:latin typeface="Calibri"/>
+              </a:rPr>
+              <a:t>– One network serves many campuses → solves shortage</a:t>
+            </a:r>
+          </a:p>
+          <a:p>
+            <a:pPr>
+              <a:spcAft>
+                <a:spcPts val="1000"/>
+              </a:spcAft>
+            </a:pPr>
+            <a:r>
+              <a:rPr sz="1700">
+                <a:solidFill>
+                  <a:srgbClr val="1F2A2E"/>
+                </a:solidFill>
+                <a:latin typeface="Calibri"/>
+              </a:rPr>
+              <a:t>• Peer volunteers self-replenish each batch</a:t>
+            </a:r>
+          </a:p>
+          <a:p>
+            <a:pPr lvl="1">
+              <a:spcAft>
+                <a:spcPts val="1000"/>
+              </a:spcAft>
+            </a:pPr>
+            <a:r>
+              <a:rPr sz="1700">
+                <a:solidFill>
+                  <a:srgbClr val="1F2A2E"/>
+                </a:solidFill>
+                <a:latin typeface="Calibri"/>
+              </a:rPr>
+              <a:t>– Near-free, compounding supply of listeners</a:t>
+            </a:r>
+          </a:p>
+          <a:p>
+            <a:pPr>
+              <a:spcAft>
+                <a:spcPts val="1000"/>
+              </a:spcAft>
+            </a:pPr>
+            <a:r>
+              <a:rPr sz="1700">
+                <a:solidFill>
+                  <a:srgbClr val="1F2A2E"/>
+                </a:solidFill>
+                <a:latin typeface="Calibri"/>
+              </a:rPr>
+              <a:t>• CSR / wellness-fund subsidies for low-income camps</a:t>
+            </a:r>
+          </a:p>
+        </p:txBody>
+      </p:sp>
+      <p:sp>
+        <p:nvSpPr>
+          <p:cNvPr id="7" name="Rectangle 6"/>
           <p:cNvSpPr/>
           <p:nvPr/>
         </p:nvSpPr>
         <p:spPr>
           <a:xfrm>
-            <a:off x="640080" y="1828800"/>
-            <a:ext cx="3383280" cy="1737360"/>
+            <a:off x="6400800" y="1828800"/>
+            <a:ext cx="5212080" cy="4023360"/>
           </a:xfrm>
           <a:prstGeom prst="rect">
             <a:avLst/>
@@ -4063,14 +4183,14 @@
       </p:sp>
       <p:sp>
         <p:nvSpPr>
-          <p:cNvPr id="7" name="TextBox 6"/>
+          <p:cNvPr id="8" name="TextBox 7"/>
           <p:cNvSpPr txBox="1"/>
           <p:nvPr/>
         </p:nvSpPr>
         <p:spPr>
           <a:xfrm>
-            <a:off x="640080" y="2011680"/>
-            <a:ext cx="3383280" cy="822960"/>
+            <a:off x="6583680" y="2011680"/>
+            <a:ext cx="4846320" cy="457200"/>
           </a:xfrm>
           <a:prstGeom prst="rect">
             <a:avLst/>
@@ -4083,29 +4203,29 @@
           </a:bodyPr>
           <a:lstStyle/>
           <a:p>
-            <a:pPr algn="ctr"/>
-            <a:r>
-              <a:rPr sz="3400" b="1">
+            <a:pPr algn="l"/>
+            <a:r>
+              <a:rPr sz="1800" b="1">
                 <a:solidFill>
                   <a:srgbClr val="FFFFFF"/>
                 </a:solidFill>
                 <a:latin typeface="Calibri"/>
               </a:rPr>
-              <a:t>14</a:t>
-            </a:r>
-          </a:p>
-        </p:txBody>
-      </p:sp>
-      <p:sp>
-        <p:nvSpPr>
-          <p:cNvPr id="8" name="TextBox 7"/>
+              <a:t>Unit economics</a:t>
+            </a:r>
+          </a:p>
+        </p:txBody>
+      </p:sp>
+      <p:sp>
+        <p:nvSpPr>
+          <p:cNvPr id="9" name="TextBox 8"/>
           <p:cNvSpPr txBox="1"/>
           <p:nvPr/>
         </p:nvSpPr>
         <p:spPr>
           <a:xfrm>
-            <a:off x="640080" y="2834640"/>
-            <a:ext cx="3383280" cy="640080"/>
+            <a:off x="6583680" y="2651760"/>
+            <a:ext cx="4846320" cy="3108960"/>
           </a:xfrm>
           <a:prstGeom prst="rect">
             <a:avLst/>
@@ -4113,590 +4233,72 @@
           <a:noFill/>
         </p:spPr>
         <p:txBody>
-          <a:bodyPr wrap="square" anchor="t">
+          <a:bodyPr wrap="square">
             <a:spAutoFit/>
           </a:bodyPr>
           <a:lstStyle/>
           <a:p>
-            <a:pPr algn="ctr"/>
-            <a:r>
-              <a:rPr sz="1400" b="0">
+            <a:pPr>
+              <a:spcAft>
+                <a:spcPts val="1000"/>
+              </a:spcAft>
+            </a:pPr>
+            <a:r>
+              <a:rPr sz="1500">
                 <a:solidFill>
                   <a:srgbClr val="FFFFFF"/>
                 </a:solidFill>
                 <a:latin typeface="Calibri"/>
               </a:rPr>
-              <a:t>Colleges onboarded</a:t>
-            </a:r>
-          </a:p>
-        </p:txBody>
-      </p:sp>
-      <p:sp>
-        <p:nvSpPr>
-          <p:cNvPr id="9" name="Rectangle 8"/>
-          <p:cNvSpPr/>
-          <p:nvPr/>
-        </p:nvSpPr>
-        <p:spPr>
-          <a:xfrm>
-            <a:off x="4389120" y="1828800"/>
-            <a:ext cx="3383280" cy="1737360"/>
-          </a:xfrm>
-          <a:prstGeom prst="rect">
-            <a:avLst/>
-          </a:prstGeom>
-          <a:solidFill>
-            <a:srgbClr val="0B7D6C"/>
-          </a:solidFill>
-          <a:ln>
-            <a:noFill/>
-          </a:ln>
-          <a:effectLst/>
-        </p:spPr>
-        <p:style>
-          <a:lnRef idx="1">
-            <a:schemeClr val="accent1"/>
-          </a:lnRef>
-          <a:fillRef idx="3">
-            <a:schemeClr val="accent1"/>
-          </a:fillRef>
-          <a:effectRef idx="2">
-            <a:schemeClr val="accent1"/>
-          </a:effectRef>
-          <a:fontRef idx="minor">
-            <a:schemeClr val="lt1"/>
-          </a:fontRef>
-        </p:style>
-        <p:txBody>
-          <a:bodyPr rtlCol="0" anchor="ctr"/>
-          <a:lstStyle/>
-          <a:p>
-            <a:pPr algn="ctr"/>
-          </a:p>
-        </p:txBody>
-      </p:sp>
-      <p:sp>
-        <p:nvSpPr>
-          <p:cNvPr id="10" name="TextBox 9"/>
-          <p:cNvSpPr txBox="1"/>
-          <p:nvPr/>
-        </p:nvSpPr>
-        <p:spPr>
-          <a:xfrm>
-            <a:off x="4389120" y="2011680"/>
-            <a:ext cx="3383280" cy="822960"/>
-          </a:xfrm>
-          <a:prstGeom prst="rect">
-            <a:avLst/>
-          </a:prstGeom>
-          <a:noFill/>
-        </p:spPr>
-        <p:txBody>
-          <a:bodyPr wrap="square" anchor="t">
-            <a:spAutoFit/>
-          </a:bodyPr>
-          <a:lstStyle/>
-          <a:p>
-            <a:pPr algn="ctr"/>
-            <a:r>
-              <a:rPr sz="3400" b="1">
+              <a:t>• College pays per-student/yr subscription</a:t>
+            </a:r>
+          </a:p>
+          <a:p>
+            <a:pPr>
+              <a:spcAft>
+                <a:spcPts val="1000"/>
+              </a:spcAft>
+            </a:pPr>
+            <a:r>
+              <a:rPr sz="1500">
                 <a:solidFill>
                   <a:srgbClr val="FFFFFF"/>
                 </a:solidFill>
                 <a:latin typeface="Calibri"/>
               </a:rPr>
-              <a:t>38,200</a:t>
-            </a:r>
-          </a:p>
-        </p:txBody>
-      </p:sp>
-      <p:sp>
-        <p:nvSpPr>
-          <p:cNvPr id="11" name="TextBox 10"/>
-          <p:cNvSpPr txBox="1"/>
-          <p:nvPr/>
-        </p:nvSpPr>
-        <p:spPr>
-          <a:xfrm>
-            <a:off x="4389120" y="2834640"/>
-            <a:ext cx="3383280" cy="640080"/>
-          </a:xfrm>
-          <a:prstGeom prst="rect">
-            <a:avLst/>
-          </a:prstGeom>
-          <a:noFill/>
-        </p:spPr>
-        <p:txBody>
-          <a:bodyPr wrap="square" anchor="t">
-            <a:spAutoFit/>
-          </a:bodyPr>
-          <a:lstStyle/>
-          <a:p>
-            <a:pPr algn="ctr"/>
-            <a:r>
-              <a:rPr sz="1400" b="0">
+              <a:t>• Counselor cost amortized across N colleges</a:t>
+            </a:r>
+          </a:p>
+          <a:p>
+            <a:pPr>
+              <a:spcAft>
+                <a:spcPts val="1000"/>
+              </a:spcAft>
+            </a:pPr>
+            <a:r>
+              <a:rPr sz="1500">
                 <a:solidFill>
                   <a:srgbClr val="FFFFFF"/>
                 </a:solidFill>
                 <a:latin typeface="Calibri"/>
               </a:rPr>
-              <a:t>Lives reached</a:t>
-            </a:r>
-          </a:p>
-        </p:txBody>
-      </p:sp>
-      <p:sp>
-        <p:nvSpPr>
-          <p:cNvPr id="12" name="Rectangle 11"/>
-          <p:cNvSpPr/>
-          <p:nvPr/>
-        </p:nvSpPr>
-        <p:spPr>
-          <a:xfrm>
-            <a:off x="8138159" y="1828800"/>
-            <a:ext cx="3383280" cy="1737360"/>
-          </a:xfrm>
-          <a:prstGeom prst="rect">
-            <a:avLst/>
-          </a:prstGeom>
-          <a:solidFill>
-            <a:srgbClr val="0F9B86"/>
-          </a:solidFill>
-          <a:ln>
-            <a:noFill/>
-          </a:ln>
-          <a:effectLst/>
-        </p:spPr>
-        <p:style>
-          <a:lnRef idx="1">
-            <a:schemeClr val="accent1"/>
-          </a:lnRef>
-          <a:fillRef idx="3">
-            <a:schemeClr val="accent1"/>
-          </a:fillRef>
-          <a:effectRef idx="2">
-            <a:schemeClr val="accent1"/>
-          </a:effectRef>
-          <a:fontRef idx="minor">
-            <a:schemeClr val="lt1"/>
-          </a:fontRef>
-        </p:style>
-        <p:txBody>
-          <a:bodyPr rtlCol="0" anchor="ctr"/>
-          <a:lstStyle/>
-          <a:p>
-            <a:pPr algn="ctr"/>
-          </a:p>
-        </p:txBody>
-      </p:sp>
-      <p:sp>
-        <p:nvSpPr>
-          <p:cNvPr id="13" name="TextBox 12"/>
-          <p:cNvSpPr txBox="1"/>
-          <p:nvPr/>
-        </p:nvSpPr>
-        <p:spPr>
-          <a:xfrm>
-            <a:off x="8138159" y="2011680"/>
-            <a:ext cx="3383280" cy="822960"/>
-          </a:xfrm>
-          <a:prstGeom prst="rect">
-            <a:avLst/>
-          </a:prstGeom>
-          <a:noFill/>
-        </p:spPr>
-        <p:txBody>
-          <a:bodyPr wrap="square" anchor="t">
-            <a:spAutoFit/>
-          </a:bodyPr>
-          <a:lstStyle/>
-          <a:p>
-            <a:pPr algn="ctr"/>
-            <a:r>
-              <a:rPr sz="3400" b="1">
+              <a:t>• Peer layer = ~0 marginal cost</a:t>
+            </a:r>
+          </a:p>
+          <a:p>
+            <a:pPr>
+              <a:spcAft>
+                <a:spcPts val="1000"/>
+              </a:spcAft>
+            </a:pPr>
+            <a:r>
+              <a:rPr sz="1500">
                 <a:solidFill>
                   <a:srgbClr val="FFFFFF"/>
                 </a:solidFill>
                 <a:latin typeface="Calibri"/>
               </a:rPr>
-              <a:t>1,284</a:t>
-            </a:r>
-          </a:p>
-        </p:txBody>
-      </p:sp>
-      <p:sp>
-        <p:nvSpPr>
-          <p:cNvPr id="14" name="TextBox 13"/>
-          <p:cNvSpPr txBox="1"/>
-          <p:nvPr/>
-        </p:nvSpPr>
-        <p:spPr>
-          <a:xfrm>
-            <a:off x="8138159" y="2834640"/>
-            <a:ext cx="3383280" cy="640080"/>
-          </a:xfrm>
-          <a:prstGeom prst="rect">
-            <a:avLst/>
-          </a:prstGeom>
-          <a:noFill/>
-        </p:spPr>
-        <p:txBody>
-          <a:bodyPr wrap="square" anchor="t">
-            <a:spAutoFit/>
-          </a:bodyPr>
-          <a:lstStyle/>
-          <a:p>
-            <a:pPr algn="ctr"/>
-            <a:r>
-              <a:rPr sz="1400" b="0">
-                <a:solidFill>
-                  <a:srgbClr val="FFFFFF"/>
-                </a:solidFill>
-                <a:latin typeface="Calibri"/>
-              </a:rPr>
-              <a:t>Check-ins (30d)</a:t>
-            </a:r>
-          </a:p>
-        </p:txBody>
-      </p:sp>
-      <p:sp>
-        <p:nvSpPr>
-          <p:cNvPr id="15" name="Rectangle 14"/>
-          <p:cNvSpPr/>
-          <p:nvPr/>
-        </p:nvSpPr>
-        <p:spPr>
-          <a:xfrm>
-            <a:off x="640080" y="3840480"/>
-            <a:ext cx="3383280" cy="1737360"/>
-          </a:xfrm>
-          <a:prstGeom prst="rect">
-            <a:avLst/>
-          </a:prstGeom>
-          <a:solidFill>
-            <a:srgbClr val="0B7D6C"/>
-          </a:solidFill>
-          <a:ln>
-            <a:noFill/>
-          </a:ln>
-          <a:effectLst/>
-        </p:spPr>
-        <p:style>
-          <a:lnRef idx="1">
-            <a:schemeClr val="accent1"/>
-          </a:lnRef>
-          <a:fillRef idx="3">
-            <a:schemeClr val="accent1"/>
-          </a:fillRef>
-          <a:effectRef idx="2">
-            <a:schemeClr val="accent1"/>
-          </a:effectRef>
-          <a:fontRef idx="minor">
-            <a:schemeClr val="lt1"/>
-          </a:fontRef>
-        </p:style>
-        <p:txBody>
-          <a:bodyPr rtlCol="0" anchor="ctr"/>
-          <a:lstStyle/>
-          <a:p>
-            <a:pPr algn="ctr"/>
-          </a:p>
-        </p:txBody>
-      </p:sp>
-      <p:sp>
-        <p:nvSpPr>
-          <p:cNvPr id="16" name="TextBox 15"/>
-          <p:cNvSpPr txBox="1"/>
-          <p:nvPr/>
-        </p:nvSpPr>
-        <p:spPr>
-          <a:xfrm>
-            <a:off x="640080" y="4023360"/>
-            <a:ext cx="3383280" cy="822960"/>
-          </a:xfrm>
-          <a:prstGeom prst="rect">
-            <a:avLst/>
-          </a:prstGeom>
-          <a:noFill/>
-        </p:spPr>
-        <p:txBody>
-          <a:bodyPr wrap="square" anchor="t">
-            <a:spAutoFit/>
-          </a:bodyPr>
-          <a:lstStyle/>
-          <a:p>
-            <a:pPr algn="ctr"/>
-            <a:r>
-              <a:rPr sz="3400" b="1">
-                <a:solidFill>
-                  <a:srgbClr val="FFFFFF"/>
-                </a:solidFill>
-                <a:latin typeface="Calibri"/>
-              </a:rPr>
-              <a:t>612</a:t>
-            </a:r>
-          </a:p>
-        </p:txBody>
-      </p:sp>
-      <p:sp>
-        <p:nvSpPr>
-          <p:cNvPr id="17" name="TextBox 16"/>
-          <p:cNvSpPr txBox="1"/>
-          <p:nvPr/>
-        </p:nvSpPr>
-        <p:spPr>
-          <a:xfrm>
-            <a:off x="640080" y="4846320"/>
-            <a:ext cx="3383280" cy="640080"/>
-          </a:xfrm>
-          <a:prstGeom prst="rect">
-            <a:avLst/>
-          </a:prstGeom>
-          <a:noFill/>
-        </p:spPr>
-        <p:txBody>
-          <a:bodyPr wrap="square" anchor="t">
-            <a:spAutoFit/>
-          </a:bodyPr>
-          <a:lstStyle/>
-          <a:p>
-            <a:pPr algn="ctr"/>
-            <a:r>
-              <a:rPr sz="1400" b="0">
-                <a:solidFill>
-                  <a:srgbClr val="FFFFFF"/>
-                </a:solidFill>
-                <a:latin typeface="Calibri"/>
-              </a:rPr>
-              <a:t>Routed to peer</a:t>
-            </a:r>
-          </a:p>
-        </p:txBody>
-      </p:sp>
-      <p:sp>
-        <p:nvSpPr>
-          <p:cNvPr id="18" name="Rectangle 17"/>
-          <p:cNvSpPr/>
-          <p:nvPr/>
-        </p:nvSpPr>
-        <p:spPr>
-          <a:xfrm>
-            <a:off x="4389120" y="3840480"/>
-            <a:ext cx="3383280" cy="1737360"/>
-          </a:xfrm>
-          <a:prstGeom prst="rect">
-            <a:avLst/>
-          </a:prstGeom>
-          <a:solidFill>
-            <a:srgbClr val="0F9B86"/>
-          </a:solidFill>
-          <a:ln>
-            <a:noFill/>
-          </a:ln>
-          <a:effectLst/>
-        </p:spPr>
-        <p:style>
-          <a:lnRef idx="1">
-            <a:schemeClr val="accent1"/>
-          </a:lnRef>
-          <a:fillRef idx="3">
-            <a:schemeClr val="accent1"/>
-          </a:fillRef>
-          <a:effectRef idx="2">
-            <a:schemeClr val="accent1"/>
-          </a:effectRef>
-          <a:fontRef idx="minor">
-            <a:schemeClr val="lt1"/>
-          </a:fontRef>
-        </p:style>
-        <p:txBody>
-          <a:bodyPr rtlCol="0" anchor="ctr"/>
-          <a:lstStyle/>
-          <a:p>
-            <a:pPr algn="ctr"/>
-          </a:p>
-        </p:txBody>
-      </p:sp>
-      <p:sp>
-        <p:nvSpPr>
-          <p:cNvPr id="19" name="TextBox 18"/>
-          <p:cNvSpPr txBox="1"/>
-          <p:nvPr/>
-        </p:nvSpPr>
-        <p:spPr>
-          <a:xfrm>
-            <a:off x="4389120" y="4023360"/>
-            <a:ext cx="3383280" cy="822960"/>
-          </a:xfrm>
-          <a:prstGeom prst="rect">
-            <a:avLst/>
-          </a:prstGeom>
-          <a:noFill/>
-        </p:spPr>
-        <p:txBody>
-          <a:bodyPr wrap="square" anchor="t">
-            <a:spAutoFit/>
-          </a:bodyPr>
-          <a:lstStyle/>
-          <a:p>
-            <a:pPr algn="ctr"/>
-            <a:r>
-              <a:rPr sz="3400" b="1">
-                <a:solidFill>
-                  <a:srgbClr val="FFFFFF"/>
-                </a:solidFill>
-                <a:latin typeface="Calibri"/>
-              </a:rPr>
-              <a:t>298</a:t>
-            </a:r>
-          </a:p>
-        </p:txBody>
-      </p:sp>
-      <p:sp>
-        <p:nvSpPr>
-          <p:cNvPr id="20" name="TextBox 19"/>
-          <p:cNvSpPr txBox="1"/>
-          <p:nvPr/>
-        </p:nvSpPr>
-        <p:spPr>
-          <a:xfrm>
-            <a:off x="4389120" y="4846320"/>
-            <a:ext cx="3383280" cy="640080"/>
-          </a:xfrm>
-          <a:prstGeom prst="rect">
-            <a:avLst/>
-          </a:prstGeom>
-          <a:noFill/>
-        </p:spPr>
-        <p:txBody>
-          <a:bodyPr wrap="square" anchor="t">
-            <a:spAutoFit/>
-          </a:bodyPr>
-          <a:lstStyle/>
-          <a:p>
-            <a:pPr algn="ctr"/>
-            <a:r>
-              <a:rPr sz="1400" b="0">
-                <a:solidFill>
-                  <a:srgbClr val="FFFFFF"/>
-                </a:solidFill>
-                <a:latin typeface="Calibri"/>
-              </a:rPr>
-              <a:t>Routed to counselor</a:t>
-            </a:r>
-          </a:p>
-        </p:txBody>
-      </p:sp>
-      <p:sp>
-        <p:nvSpPr>
-          <p:cNvPr id="21" name="Rectangle 20"/>
-          <p:cNvSpPr/>
-          <p:nvPr/>
-        </p:nvSpPr>
-        <p:spPr>
-          <a:xfrm>
-            <a:off x="8138159" y="3840480"/>
-            <a:ext cx="3383280" cy="1737360"/>
-          </a:xfrm>
-          <a:prstGeom prst="rect">
-            <a:avLst/>
-          </a:prstGeom>
-          <a:solidFill>
-            <a:srgbClr val="0B7D6C"/>
-          </a:solidFill>
-          <a:ln>
-            <a:noFill/>
-          </a:ln>
-          <a:effectLst/>
-        </p:spPr>
-        <p:style>
-          <a:lnRef idx="1">
-            <a:schemeClr val="accent1"/>
-          </a:lnRef>
-          <a:fillRef idx="3">
-            <a:schemeClr val="accent1"/>
-          </a:fillRef>
-          <a:effectRef idx="2">
-            <a:schemeClr val="accent1"/>
-          </a:effectRef>
-          <a:fontRef idx="minor">
-            <a:schemeClr val="lt1"/>
-          </a:fontRef>
-        </p:style>
-        <p:txBody>
-          <a:bodyPr rtlCol="0" anchor="ctr"/>
-          <a:lstStyle/>
-          <a:p>
-            <a:pPr algn="ctr"/>
-          </a:p>
-        </p:txBody>
-      </p:sp>
-      <p:sp>
-        <p:nvSpPr>
-          <p:cNvPr id="22" name="TextBox 21"/>
-          <p:cNvSpPr txBox="1"/>
-          <p:nvPr/>
-        </p:nvSpPr>
-        <p:spPr>
-          <a:xfrm>
-            <a:off x="8138159" y="4023360"/>
-            <a:ext cx="3383280" cy="822960"/>
-          </a:xfrm>
-          <a:prstGeom prst="rect">
-            <a:avLst/>
-          </a:prstGeom>
-          <a:noFill/>
-        </p:spPr>
-        <p:txBody>
-          <a:bodyPr wrap="square" anchor="t">
-            <a:spAutoFit/>
-          </a:bodyPr>
-          <a:lstStyle/>
-          <a:p>
-            <a:pPr algn="ctr"/>
-            <a:r>
-              <a:rPr sz="3400" b="1">
-                <a:solidFill>
-                  <a:srgbClr val="FFFFFF"/>
-                </a:solidFill>
-                <a:latin typeface="Calibri"/>
-              </a:rPr>
-              <a:t>41</a:t>
-            </a:r>
-          </a:p>
-        </p:txBody>
-      </p:sp>
-      <p:sp>
-        <p:nvSpPr>
-          <p:cNvPr id="23" name="TextBox 22"/>
-          <p:cNvSpPr txBox="1"/>
-          <p:nvPr/>
-        </p:nvSpPr>
-        <p:spPr>
-          <a:xfrm>
-            <a:off x="8138159" y="4846320"/>
-            <a:ext cx="3383280" cy="640080"/>
-          </a:xfrm>
-          <a:prstGeom prst="rect">
-            <a:avLst/>
-          </a:prstGeom>
-          <a:noFill/>
-        </p:spPr>
-        <p:txBody>
-          <a:bodyPr wrap="square" anchor="t">
-            <a:spAutoFit/>
-          </a:bodyPr>
-          <a:lstStyle/>
-          <a:p>
-            <a:pPr algn="ctr"/>
-            <a:r>
-              <a:rPr sz="1400" b="0">
-                <a:solidFill>
-                  <a:srgbClr val="FFFFFF"/>
-                </a:solidFill>
-                <a:latin typeface="Calibri"/>
-              </a:rPr>
-              <a:t>Crisis escalations</a:t>
+              <a:t>• Retention via trust, not forced signup</a:t>
             </a:r>
           </a:p>
         </p:txBody>
@@ -4837,7 +4439,7 @@
                 </a:solidFill>
                 <a:latin typeface="Calibri"/>
               </a:rPr>
-              <a:t>Why It's Credible</a:t>
+              <a:t>Impact (Demo Metrics)</a:t>
             </a:r>
           </a:p>
         </p:txBody>
@@ -4872,21 +4474,65 @@
                 </a:solidFill>
                 <a:latin typeface="Calibri"/>
               </a:rPr>
-              <a:t>FRAMEWORKS &amp; TRUST ANCHORS</a:t>
-            </a:r>
-          </a:p>
-        </p:txBody>
-      </p:sp>
-      <p:sp>
-        <p:nvSpPr>
-          <p:cNvPr id="6" name="TextBox 5"/>
+              <a:t>WHAT SUCCESS LOOKS LIKE</a:t>
+            </a:r>
+          </a:p>
+        </p:txBody>
+      </p:sp>
+      <p:sp>
+        <p:nvSpPr>
+          <p:cNvPr id="6" name="Rectangle 5"/>
+          <p:cNvSpPr/>
+          <p:nvPr/>
+        </p:nvSpPr>
+        <p:spPr>
+          <a:xfrm>
+            <a:off x="640080" y="1828800"/>
+            <a:ext cx="3383280" cy="1737360"/>
+          </a:xfrm>
+          <a:prstGeom prst="rect">
+            <a:avLst/>
+          </a:prstGeom>
+          <a:solidFill>
+            <a:srgbClr val="0F9B86"/>
+          </a:solidFill>
+          <a:ln>
+            <a:noFill/>
+          </a:ln>
+          <a:effectLst/>
+        </p:spPr>
+        <p:style>
+          <a:lnRef idx="1">
+            <a:schemeClr val="accent1"/>
+          </a:lnRef>
+          <a:fillRef idx="3">
+            <a:schemeClr val="accent1"/>
+          </a:fillRef>
+          <a:effectRef idx="2">
+            <a:schemeClr val="accent1"/>
+          </a:effectRef>
+          <a:fontRef idx="minor">
+            <a:schemeClr val="lt1"/>
+          </a:fontRef>
+        </p:style>
+        <p:txBody>
+          <a:bodyPr rtlCol="0" anchor="ctr"/>
+          <a:lstStyle/>
+          <a:p>
+            <a:pPr algn="ctr"/>
+          </a:p>
+        </p:txBody>
+      </p:sp>
+      <p:sp>
+        <p:nvSpPr>
+          <p:cNvPr id="7" name="TextBox 6"/>
           <p:cNvSpPr txBox="1"/>
           <p:nvPr/>
         </p:nvSpPr>
         <p:spPr>
           <a:xfrm>
-            <a:off x="548640" y="1828800"/>
-            <a:ext cx="10515600" cy="4389120"/>
+            <a:off x="640080" y="2011680"/>
+            <a:ext cx="3383280" cy="822960"/>
           </a:xfrm>
           <a:prstGeom prst="rect">
             <a:avLst/>
@@ -4894,88 +4540,625 @@
           <a:noFill/>
         </p:spPr>
         <p:txBody>
-          <a:bodyPr wrap="square">
+          <a:bodyPr wrap="square" anchor="t">
             <a:spAutoFit/>
           </a:bodyPr>
           <a:lstStyle/>
           <a:p>
-            <a:pPr>
-              <a:spcAft>
-                <a:spcPts val="1400"/>
-              </a:spcAft>
-            </a:pPr>
-            <a:r>
-              <a:rPr sz="1800">
-                <a:solidFill>
-                  <a:srgbClr val="1F2A2E"/>
-                </a:solidFill>
-                <a:latin typeface="Calibri"/>
-              </a:rPr>
-              <a:t>• Peer Listener certification aligned with NIMHANS &amp; iCall training frameworks</a:t>
-            </a:r>
-          </a:p>
-          <a:p>
-            <a:pPr>
-              <a:spcAft>
-                <a:spcPts val="1400"/>
-              </a:spcAft>
-            </a:pPr>
-            <a:r>
-              <a:rPr sz="1800">
-                <a:solidFill>
-                  <a:srgbClr val="1F2A2E"/>
-                </a:solidFill>
-                <a:latin typeface="Calibri"/>
-              </a:rPr>
-              <a:t>• Crisis routing uses verified national helplines: Tele-MANAS 14416, iCall (TISS), Vandrevala</a:t>
-            </a:r>
-          </a:p>
-          <a:p>
-            <a:pPr>
-              <a:spcAft>
-                <a:spcPts val="1400"/>
-              </a:spcAft>
-            </a:pPr>
-            <a:r>
-              <a:rPr sz="1800">
-                <a:solidFill>
-                  <a:srgbClr val="1F2A2E"/>
-                </a:solidFill>
-                <a:latin typeface="Calibri"/>
-              </a:rPr>
-              <a:t>• Anonymous-first mirrors global best practice (7 Cups, Crisis Text Line) adapted for India</a:t>
-            </a:r>
-          </a:p>
-          <a:p>
-            <a:pPr>
-              <a:spcAft>
-                <a:spcPts val="1400"/>
-              </a:spcAft>
-            </a:pPr>
-            <a:r>
-              <a:rPr sz="1800">
-                <a:solidFill>
-                  <a:srgbClr val="1F2A2E"/>
-                </a:solidFill>
-                <a:latin typeface="Calibri"/>
-              </a:rPr>
-              <a:t>• Resource library in Hindi, English, Marathi &amp; Gujarati — targets worse vernacular stigma</a:t>
-            </a:r>
-          </a:p>
-          <a:p>
-            <a:pPr>
-              <a:spcAft>
-                <a:spcPts val="1400"/>
-              </a:spcAft>
-            </a:pPr>
-            <a:r>
-              <a:rPr sz="1800">
-                <a:solidFill>
-                  <a:srgbClr val="1F2A2E"/>
-                </a:solidFill>
-                <a:latin typeface="Calibri"/>
-              </a:rPr>
-              <a:t>• Safety built-in: high-risk language auto-escalates, never routes around crisis</a:t>
+            <a:pPr algn="ctr"/>
+            <a:r>
+              <a:rPr sz="3400" b="1">
+                <a:solidFill>
+                  <a:srgbClr val="FFFFFF"/>
+                </a:solidFill>
+                <a:latin typeface="Calibri"/>
+              </a:rPr>
+              <a:t>14</a:t>
+            </a:r>
+          </a:p>
+        </p:txBody>
+      </p:sp>
+      <p:sp>
+        <p:nvSpPr>
+          <p:cNvPr id="8" name="TextBox 7"/>
+          <p:cNvSpPr txBox="1"/>
+          <p:nvPr/>
+        </p:nvSpPr>
+        <p:spPr>
+          <a:xfrm>
+            <a:off x="640080" y="2834640"/>
+            <a:ext cx="3383280" cy="640080"/>
+          </a:xfrm>
+          <a:prstGeom prst="rect">
+            <a:avLst/>
+          </a:prstGeom>
+          <a:noFill/>
+        </p:spPr>
+        <p:txBody>
+          <a:bodyPr wrap="square" anchor="t">
+            <a:spAutoFit/>
+          </a:bodyPr>
+          <a:lstStyle/>
+          <a:p>
+            <a:pPr algn="ctr"/>
+            <a:r>
+              <a:rPr sz="1400" b="0">
+                <a:solidFill>
+                  <a:srgbClr val="FFFFFF"/>
+                </a:solidFill>
+                <a:latin typeface="Calibri"/>
+              </a:rPr>
+              <a:t>Colleges onboarded</a:t>
+            </a:r>
+          </a:p>
+        </p:txBody>
+      </p:sp>
+      <p:sp>
+        <p:nvSpPr>
+          <p:cNvPr id="9" name="Rectangle 8"/>
+          <p:cNvSpPr/>
+          <p:nvPr/>
+        </p:nvSpPr>
+        <p:spPr>
+          <a:xfrm>
+            <a:off x="4389120" y="1828800"/>
+            <a:ext cx="3383280" cy="1737360"/>
+          </a:xfrm>
+          <a:prstGeom prst="rect">
+            <a:avLst/>
+          </a:prstGeom>
+          <a:solidFill>
+            <a:srgbClr val="0B7D6C"/>
+          </a:solidFill>
+          <a:ln>
+            <a:noFill/>
+          </a:ln>
+          <a:effectLst/>
+        </p:spPr>
+        <p:style>
+          <a:lnRef idx="1">
+            <a:schemeClr val="accent1"/>
+          </a:lnRef>
+          <a:fillRef idx="3">
+            <a:schemeClr val="accent1"/>
+          </a:fillRef>
+          <a:effectRef idx="2">
+            <a:schemeClr val="accent1"/>
+          </a:effectRef>
+          <a:fontRef idx="minor">
+            <a:schemeClr val="lt1"/>
+          </a:fontRef>
+        </p:style>
+        <p:txBody>
+          <a:bodyPr rtlCol="0" anchor="ctr"/>
+          <a:lstStyle/>
+          <a:p>
+            <a:pPr algn="ctr"/>
+          </a:p>
+        </p:txBody>
+      </p:sp>
+      <p:sp>
+        <p:nvSpPr>
+          <p:cNvPr id="10" name="TextBox 9"/>
+          <p:cNvSpPr txBox="1"/>
+          <p:nvPr/>
+        </p:nvSpPr>
+        <p:spPr>
+          <a:xfrm>
+            <a:off x="4389120" y="2011680"/>
+            <a:ext cx="3383280" cy="822960"/>
+          </a:xfrm>
+          <a:prstGeom prst="rect">
+            <a:avLst/>
+          </a:prstGeom>
+          <a:noFill/>
+        </p:spPr>
+        <p:txBody>
+          <a:bodyPr wrap="square" anchor="t">
+            <a:spAutoFit/>
+          </a:bodyPr>
+          <a:lstStyle/>
+          <a:p>
+            <a:pPr algn="ctr"/>
+            <a:r>
+              <a:rPr sz="3400" b="1">
+                <a:solidFill>
+                  <a:srgbClr val="FFFFFF"/>
+                </a:solidFill>
+                <a:latin typeface="Calibri"/>
+              </a:rPr>
+              <a:t>38,200</a:t>
+            </a:r>
+          </a:p>
+        </p:txBody>
+      </p:sp>
+      <p:sp>
+        <p:nvSpPr>
+          <p:cNvPr id="11" name="TextBox 10"/>
+          <p:cNvSpPr txBox="1"/>
+          <p:nvPr/>
+        </p:nvSpPr>
+        <p:spPr>
+          <a:xfrm>
+            <a:off x="4389120" y="2834640"/>
+            <a:ext cx="3383280" cy="640080"/>
+          </a:xfrm>
+          <a:prstGeom prst="rect">
+            <a:avLst/>
+          </a:prstGeom>
+          <a:noFill/>
+        </p:spPr>
+        <p:txBody>
+          <a:bodyPr wrap="square" anchor="t">
+            <a:spAutoFit/>
+          </a:bodyPr>
+          <a:lstStyle/>
+          <a:p>
+            <a:pPr algn="ctr"/>
+            <a:r>
+              <a:rPr sz="1400" b="0">
+                <a:solidFill>
+                  <a:srgbClr val="FFFFFF"/>
+                </a:solidFill>
+                <a:latin typeface="Calibri"/>
+              </a:rPr>
+              <a:t>Lives reached</a:t>
+            </a:r>
+          </a:p>
+        </p:txBody>
+      </p:sp>
+      <p:sp>
+        <p:nvSpPr>
+          <p:cNvPr id="12" name="Rectangle 11"/>
+          <p:cNvSpPr/>
+          <p:nvPr/>
+        </p:nvSpPr>
+        <p:spPr>
+          <a:xfrm>
+            <a:off x="8138159" y="1828800"/>
+            <a:ext cx="3383280" cy="1737360"/>
+          </a:xfrm>
+          <a:prstGeom prst="rect">
+            <a:avLst/>
+          </a:prstGeom>
+          <a:solidFill>
+            <a:srgbClr val="0F9B86"/>
+          </a:solidFill>
+          <a:ln>
+            <a:noFill/>
+          </a:ln>
+          <a:effectLst/>
+        </p:spPr>
+        <p:style>
+          <a:lnRef idx="1">
+            <a:schemeClr val="accent1"/>
+          </a:lnRef>
+          <a:fillRef idx="3">
+            <a:schemeClr val="accent1"/>
+          </a:fillRef>
+          <a:effectRef idx="2">
+            <a:schemeClr val="accent1"/>
+          </a:effectRef>
+          <a:fontRef idx="minor">
+            <a:schemeClr val="lt1"/>
+          </a:fontRef>
+        </p:style>
+        <p:txBody>
+          <a:bodyPr rtlCol="0" anchor="ctr"/>
+          <a:lstStyle/>
+          <a:p>
+            <a:pPr algn="ctr"/>
+          </a:p>
+        </p:txBody>
+      </p:sp>
+      <p:sp>
+        <p:nvSpPr>
+          <p:cNvPr id="13" name="TextBox 12"/>
+          <p:cNvSpPr txBox="1"/>
+          <p:nvPr/>
+        </p:nvSpPr>
+        <p:spPr>
+          <a:xfrm>
+            <a:off x="8138159" y="2011680"/>
+            <a:ext cx="3383280" cy="822960"/>
+          </a:xfrm>
+          <a:prstGeom prst="rect">
+            <a:avLst/>
+          </a:prstGeom>
+          <a:noFill/>
+        </p:spPr>
+        <p:txBody>
+          <a:bodyPr wrap="square" anchor="t">
+            <a:spAutoFit/>
+          </a:bodyPr>
+          <a:lstStyle/>
+          <a:p>
+            <a:pPr algn="ctr"/>
+            <a:r>
+              <a:rPr sz="3400" b="1">
+                <a:solidFill>
+                  <a:srgbClr val="FFFFFF"/>
+                </a:solidFill>
+                <a:latin typeface="Calibri"/>
+              </a:rPr>
+              <a:t>1,284</a:t>
+            </a:r>
+          </a:p>
+        </p:txBody>
+      </p:sp>
+      <p:sp>
+        <p:nvSpPr>
+          <p:cNvPr id="14" name="TextBox 13"/>
+          <p:cNvSpPr txBox="1"/>
+          <p:nvPr/>
+        </p:nvSpPr>
+        <p:spPr>
+          <a:xfrm>
+            <a:off x="8138159" y="2834640"/>
+            <a:ext cx="3383280" cy="640080"/>
+          </a:xfrm>
+          <a:prstGeom prst="rect">
+            <a:avLst/>
+          </a:prstGeom>
+          <a:noFill/>
+        </p:spPr>
+        <p:txBody>
+          <a:bodyPr wrap="square" anchor="t">
+            <a:spAutoFit/>
+          </a:bodyPr>
+          <a:lstStyle/>
+          <a:p>
+            <a:pPr algn="ctr"/>
+            <a:r>
+              <a:rPr sz="1400" b="0">
+                <a:solidFill>
+                  <a:srgbClr val="FFFFFF"/>
+                </a:solidFill>
+                <a:latin typeface="Calibri"/>
+              </a:rPr>
+              <a:t>Check-ins (30d)</a:t>
+            </a:r>
+          </a:p>
+        </p:txBody>
+      </p:sp>
+      <p:sp>
+        <p:nvSpPr>
+          <p:cNvPr id="15" name="Rectangle 14"/>
+          <p:cNvSpPr/>
+          <p:nvPr/>
+        </p:nvSpPr>
+        <p:spPr>
+          <a:xfrm>
+            <a:off x="640080" y="3840480"/>
+            <a:ext cx="3383280" cy="1737360"/>
+          </a:xfrm>
+          <a:prstGeom prst="rect">
+            <a:avLst/>
+          </a:prstGeom>
+          <a:solidFill>
+            <a:srgbClr val="0B7D6C"/>
+          </a:solidFill>
+          <a:ln>
+            <a:noFill/>
+          </a:ln>
+          <a:effectLst/>
+        </p:spPr>
+        <p:style>
+          <a:lnRef idx="1">
+            <a:schemeClr val="accent1"/>
+          </a:lnRef>
+          <a:fillRef idx="3">
+            <a:schemeClr val="accent1"/>
+          </a:fillRef>
+          <a:effectRef idx="2">
+            <a:schemeClr val="accent1"/>
+          </a:effectRef>
+          <a:fontRef idx="minor">
+            <a:schemeClr val="lt1"/>
+          </a:fontRef>
+        </p:style>
+        <p:txBody>
+          <a:bodyPr rtlCol="0" anchor="ctr"/>
+          <a:lstStyle/>
+          <a:p>
+            <a:pPr algn="ctr"/>
+          </a:p>
+        </p:txBody>
+      </p:sp>
+      <p:sp>
+        <p:nvSpPr>
+          <p:cNvPr id="16" name="TextBox 15"/>
+          <p:cNvSpPr txBox="1"/>
+          <p:nvPr/>
+        </p:nvSpPr>
+        <p:spPr>
+          <a:xfrm>
+            <a:off x="640080" y="4023360"/>
+            <a:ext cx="3383280" cy="822960"/>
+          </a:xfrm>
+          <a:prstGeom prst="rect">
+            <a:avLst/>
+          </a:prstGeom>
+          <a:noFill/>
+        </p:spPr>
+        <p:txBody>
+          <a:bodyPr wrap="square" anchor="t">
+            <a:spAutoFit/>
+          </a:bodyPr>
+          <a:lstStyle/>
+          <a:p>
+            <a:pPr algn="ctr"/>
+            <a:r>
+              <a:rPr sz="3400" b="1">
+                <a:solidFill>
+                  <a:srgbClr val="FFFFFF"/>
+                </a:solidFill>
+                <a:latin typeface="Calibri"/>
+              </a:rPr>
+              <a:t>612</a:t>
+            </a:r>
+          </a:p>
+        </p:txBody>
+      </p:sp>
+      <p:sp>
+        <p:nvSpPr>
+          <p:cNvPr id="17" name="TextBox 16"/>
+          <p:cNvSpPr txBox="1"/>
+          <p:nvPr/>
+        </p:nvSpPr>
+        <p:spPr>
+          <a:xfrm>
+            <a:off x="640080" y="4846320"/>
+            <a:ext cx="3383280" cy="640080"/>
+          </a:xfrm>
+          <a:prstGeom prst="rect">
+            <a:avLst/>
+          </a:prstGeom>
+          <a:noFill/>
+        </p:spPr>
+        <p:txBody>
+          <a:bodyPr wrap="square" anchor="t">
+            <a:spAutoFit/>
+          </a:bodyPr>
+          <a:lstStyle/>
+          <a:p>
+            <a:pPr algn="ctr"/>
+            <a:r>
+              <a:rPr sz="1400" b="0">
+                <a:solidFill>
+                  <a:srgbClr val="FFFFFF"/>
+                </a:solidFill>
+                <a:latin typeface="Calibri"/>
+              </a:rPr>
+              <a:t>Routed to peer</a:t>
+            </a:r>
+          </a:p>
+        </p:txBody>
+      </p:sp>
+      <p:sp>
+        <p:nvSpPr>
+          <p:cNvPr id="18" name="Rectangle 17"/>
+          <p:cNvSpPr/>
+          <p:nvPr/>
+        </p:nvSpPr>
+        <p:spPr>
+          <a:xfrm>
+            <a:off x="4389120" y="3840480"/>
+            <a:ext cx="3383280" cy="1737360"/>
+          </a:xfrm>
+          <a:prstGeom prst="rect">
+            <a:avLst/>
+          </a:prstGeom>
+          <a:solidFill>
+            <a:srgbClr val="0F9B86"/>
+          </a:solidFill>
+          <a:ln>
+            <a:noFill/>
+          </a:ln>
+          <a:effectLst/>
+        </p:spPr>
+        <p:style>
+          <a:lnRef idx="1">
+            <a:schemeClr val="accent1"/>
+          </a:lnRef>
+          <a:fillRef idx="3">
+            <a:schemeClr val="accent1"/>
+          </a:fillRef>
+          <a:effectRef idx="2">
+            <a:schemeClr val="accent1"/>
+          </a:effectRef>
+          <a:fontRef idx="minor">
+            <a:schemeClr val="lt1"/>
+          </a:fontRef>
+        </p:style>
+        <p:txBody>
+          <a:bodyPr rtlCol="0" anchor="ctr"/>
+          <a:lstStyle/>
+          <a:p>
+            <a:pPr algn="ctr"/>
+          </a:p>
+        </p:txBody>
+      </p:sp>
+      <p:sp>
+        <p:nvSpPr>
+          <p:cNvPr id="19" name="TextBox 18"/>
+          <p:cNvSpPr txBox="1"/>
+          <p:nvPr/>
+        </p:nvSpPr>
+        <p:spPr>
+          <a:xfrm>
+            <a:off x="4389120" y="4023360"/>
+            <a:ext cx="3383280" cy="822960"/>
+          </a:xfrm>
+          <a:prstGeom prst="rect">
+            <a:avLst/>
+          </a:prstGeom>
+          <a:noFill/>
+        </p:spPr>
+        <p:txBody>
+          <a:bodyPr wrap="square" anchor="t">
+            <a:spAutoFit/>
+          </a:bodyPr>
+          <a:lstStyle/>
+          <a:p>
+            <a:pPr algn="ctr"/>
+            <a:r>
+              <a:rPr sz="3400" b="1">
+                <a:solidFill>
+                  <a:srgbClr val="FFFFFF"/>
+                </a:solidFill>
+                <a:latin typeface="Calibri"/>
+              </a:rPr>
+              <a:t>298</a:t>
+            </a:r>
+          </a:p>
+        </p:txBody>
+      </p:sp>
+      <p:sp>
+        <p:nvSpPr>
+          <p:cNvPr id="20" name="TextBox 19"/>
+          <p:cNvSpPr txBox="1"/>
+          <p:nvPr/>
+        </p:nvSpPr>
+        <p:spPr>
+          <a:xfrm>
+            <a:off x="4389120" y="4846320"/>
+            <a:ext cx="3383280" cy="640080"/>
+          </a:xfrm>
+          <a:prstGeom prst="rect">
+            <a:avLst/>
+          </a:prstGeom>
+          <a:noFill/>
+        </p:spPr>
+        <p:txBody>
+          <a:bodyPr wrap="square" anchor="t">
+            <a:spAutoFit/>
+          </a:bodyPr>
+          <a:lstStyle/>
+          <a:p>
+            <a:pPr algn="ctr"/>
+            <a:r>
+              <a:rPr sz="1400" b="0">
+                <a:solidFill>
+                  <a:srgbClr val="FFFFFF"/>
+                </a:solidFill>
+                <a:latin typeface="Calibri"/>
+              </a:rPr>
+              <a:t>Routed to counselor</a:t>
+            </a:r>
+          </a:p>
+        </p:txBody>
+      </p:sp>
+      <p:sp>
+        <p:nvSpPr>
+          <p:cNvPr id="21" name="Rectangle 20"/>
+          <p:cNvSpPr/>
+          <p:nvPr/>
+        </p:nvSpPr>
+        <p:spPr>
+          <a:xfrm>
+            <a:off x="8138159" y="3840480"/>
+            <a:ext cx="3383280" cy="1737360"/>
+          </a:xfrm>
+          <a:prstGeom prst="rect">
+            <a:avLst/>
+          </a:prstGeom>
+          <a:solidFill>
+            <a:srgbClr val="0B7D6C"/>
+          </a:solidFill>
+          <a:ln>
+            <a:noFill/>
+          </a:ln>
+          <a:effectLst/>
+        </p:spPr>
+        <p:style>
+          <a:lnRef idx="1">
+            <a:schemeClr val="accent1"/>
+          </a:lnRef>
+          <a:fillRef idx="3">
+            <a:schemeClr val="accent1"/>
+          </a:fillRef>
+          <a:effectRef idx="2">
+            <a:schemeClr val="accent1"/>
+          </a:effectRef>
+          <a:fontRef idx="minor">
+            <a:schemeClr val="lt1"/>
+          </a:fontRef>
+        </p:style>
+        <p:txBody>
+          <a:bodyPr rtlCol="0" anchor="ctr"/>
+          <a:lstStyle/>
+          <a:p>
+            <a:pPr algn="ctr"/>
+          </a:p>
+        </p:txBody>
+      </p:sp>
+      <p:sp>
+        <p:nvSpPr>
+          <p:cNvPr id="22" name="TextBox 21"/>
+          <p:cNvSpPr txBox="1"/>
+          <p:nvPr/>
+        </p:nvSpPr>
+        <p:spPr>
+          <a:xfrm>
+            <a:off x="8138159" y="4023360"/>
+            <a:ext cx="3383280" cy="822960"/>
+          </a:xfrm>
+          <a:prstGeom prst="rect">
+            <a:avLst/>
+          </a:prstGeom>
+          <a:noFill/>
+        </p:spPr>
+        <p:txBody>
+          <a:bodyPr wrap="square" anchor="t">
+            <a:spAutoFit/>
+          </a:bodyPr>
+          <a:lstStyle/>
+          <a:p>
+            <a:pPr algn="ctr"/>
+            <a:r>
+              <a:rPr sz="3400" b="1">
+                <a:solidFill>
+                  <a:srgbClr val="FFFFFF"/>
+                </a:solidFill>
+                <a:latin typeface="Calibri"/>
+              </a:rPr>
+              <a:t>41</a:t>
+            </a:r>
+          </a:p>
+        </p:txBody>
+      </p:sp>
+      <p:sp>
+        <p:nvSpPr>
+          <p:cNvPr id="23" name="TextBox 22"/>
+          <p:cNvSpPr txBox="1"/>
+          <p:nvPr/>
+        </p:nvSpPr>
+        <p:spPr>
+          <a:xfrm>
+            <a:off x="8138159" y="4846320"/>
+            <a:ext cx="3383280" cy="640080"/>
+          </a:xfrm>
+          <a:prstGeom prst="rect">
+            <a:avLst/>
+          </a:prstGeom>
+          <a:noFill/>
+        </p:spPr>
+        <p:txBody>
+          <a:bodyPr wrap="square" anchor="t">
+            <a:spAutoFit/>
+          </a:bodyPr>
+          <a:lstStyle/>
+          <a:p>
+            <a:pPr algn="ctr"/>
+            <a:r>
+              <a:rPr sz="1400" b="0">
+                <a:solidFill>
+                  <a:srgbClr val="FFFFFF"/>
+                </a:solidFill>
+                <a:latin typeface="Calibri"/>
+              </a:rPr>
+              <a:t>Crisis escalations</a:t>
             </a:r>
           </a:p>
         </p:txBody>
@@ -5013,6 +5196,285 @@
             <a:avLst/>
           </a:prstGeom>
           <a:solidFill>
+            <a:srgbClr val="FFFFFF"/>
+          </a:solidFill>
+          <a:ln>
+            <a:noFill/>
+          </a:ln>
+          <a:effectLst/>
+        </p:spPr>
+        <p:style>
+          <a:lnRef idx="1">
+            <a:schemeClr val="accent1"/>
+          </a:lnRef>
+          <a:fillRef idx="3">
+            <a:schemeClr val="accent1"/>
+          </a:fillRef>
+          <a:effectRef idx="2">
+            <a:schemeClr val="accent1"/>
+          </a:effectRef>
+          <a:fontRef idx="minor">
+            <a:schemeClr val="lt1"/>
+          </a:fontRef>
+        </p:style>
+        <p:txBody>
+          <a:bodyPr rtlCol="0" anchor="ctr"/>
+          <a:lstStyle/>
+          <a:p>
+            <a:pPr algn="ctr"/>
+          </a:p>
+        </p:txBody>
+      </p:sp>
+      <p:sp>
+        <p:nvSpPr>
+          <p:cNvPr id="3" name="Rectangle 2"/>
+          <p:cNvSpPr/>
+          <p:nvPr/>
+        </p:nvSpPr>
+        <p:spPr>
+          <a:xfrm>
+            <a:off x="0" y="0"/>
+            <a:ext cx="12191695" cy="1051560"/>
+          </a:xfrm>
+          <a:prstGeom prst="rect">
+            <a:avLst/>
+          </a:prstGeom>
+          <a:solidFill>
+            <a:srgbClr val="0F9B86"/>
+          </a:solidFill>
+          <a:ln>
+            <a:noFill/>
+          </a:ln>
+          <a:effectLst/>
+        </p:spPr>
+        <p:style>
+          <a:lnRef idx="1">
+            <a:schemeClr val="accent1"/>
+          </a:lnRef>
+          <a:fillRef idx="3">
+            <a:schemeClr val="accent1"/>
+          </a:fillRef>
+          <a:effectRef idx="2">
+            <a:schemeClr val="accent1"/>
+          </a:effectRef>
+          <a:fontRef idx="minor">
+            <a:schemeClr val="lt1"/>
+          </a:fontRef>
+        </p:style>
+        <p:txBody>
+          <a:bodyPr rtlCol="0" anchor="ctr"/>
+          <a:lstStyle/>
+          <a:p>
+            <a:pPr algn="ctr"/>
+          </a:p>
+        </p:txBody>
+      </p:sp>
+      <p:sp>
+        <p:nvSpPr>
+          <p:cNvPr id="4" name="TextBox 3"/>
+          <p:cNvSpPr txBox="1"/>
+          <p:nvPr/>
+        </p:nvSpPr>
+        <p:spPr>
+          <a:xfrm>
+            <a:off x="457200" y="164592"/>
+            <a:ext cx="10972800" cy="731520"/>
+          </a:xfrm>
+          <a:prstGeom prst="rect">
+            <a:avLst/>
+          </a:prstGeom>
+          <a:noFill/>
+        </p:spPr>
+        <p:txBody>
+          <a:bodyPr wrap="square" anchor="ctr">
+            <a:spAutoFit/>
+          </a:bodyPr>
+          <a:lstStyle/>
+          <a:p>
+            <a:pPr algn="l"/>
+            <a:r>
+              <a:rPr sz="3000" b="1">
+                <a:solidFill>
+                  <a:srgbClr val="FFFFFF"/>
+                </a:solidFill>
+                <a:latin typeface="Calibri"/>
+              </a:rPr>
+              <a:t>Why It's Credible</a:t>
+            </a:r>
+          </a:p>
+        </p:txBody>
+      </p:sp>
+      <p:sp>
+        <p:nvSpPr>
+          <p:cNvPr id="5" name="TextBox 4"/>
+          <p:cNvSpPr txBox="1"/>
+          <p:nvPr/>
+        </p:nvSpPr>
+        <p:spPr>
+          <a:xfrm>
+            <a:off x="457200" y="1143000"/>
+            <a:ext cx="10972800" cy="365760"/>
+          </a:xfrm>
+          <a:prstGeom prst="rect">
+            <a:avLst/>
+          </a:prstGeom>
+          <a:noFill/>
+        </p:spPr>
+        <p:txBody>
+          <a:bodyPr wrap="square" anchor="t">
+            <a:spAutoFit/>
+          </a:bodyPr>
+          <a:lstStyle/>
+          <a:p>
+            <a:pPr algn="l"/>
+            <a:r>
+              <a:rPr sz="1400" b="1">
+                <a:solidFill>
+                  <a:srgbClr val="5B6B6E"/>
+                </a:solidFill>
+                <a:latin typeface="Calibri"/>
+              </a:rPr>
+              <a:t>FRAMEWORKS &amp; TRUST ANCHORS</a:t>
+            </a:r>
+          </a:p>
+        </p:txBody>
+      </p:sp>
+      <p:sp>
+        <p:nvSpPr>
+          <p:cNvPr id="6" name="TextBox 5"/>
+          <p:cNvSpPr txBox="1"/>
+          <p:nvPr/>
+        </p:nvSpPr>
+        <p:spPr>
+          <a:xfrm>
+            <a:off x="548640" y="1828800"/>
+            <a:ext cx="10515600" cy="4389120"/>
+          </a:xfrm>
+          <a:prstGeom prst="rect">
+            <a:avLst/>
+          </a:prstGeom>
+          <a:noFill/>
+        </p:spPr>
+        <p:txBody>
+          <a:bodyPr wrap="square">
+            <a:spAutoFit/>
+          </a:bodyPr>
+          <a:lstStyle/>
+          <a:p>
+            <a:pPr>
+              <a:spcAft>
+                <a:spcPts val="1400"/>
+              </a:spcAft>
+            </a:pPr>
+            <a:r>
+              <a:rPr sz="1800">
+                <a:solidFill>
+                  <a:srgbClr val="1F2A2E"/>
+                </a:solidFill>
+                <a:latin typeface="Calibri"/>
+              </a:rPr>
+              <a:t>• Peer Listener certification aligned with NIMHANS &amp; iCall training frameworks</a:t>
+            </a:r>
+          </a:p>
+          <a:p>
+            <a:pPr>
+              <a:spcAft>
+                <a:spcPts val="1400"/>
+              </a:spcAft>
+            </a:pPr>
+            <a:r>
+              <a:rPr sz="1800">
+                <a:solidFill>
+                  <a:srgbClr val="1F2A2E"/>
+                </a:solidFill>
+                <a:latin typeface="Calibri"/>
+              </a:rPr>
+              <a:t>• Crisis routing uses verified national helplines: Tele-MANAS 14416, iCall (TISS), Vandrevala</a:t>
+            </a:r>
+          </a:p>
+          <a:p>
+            <a:pPr>
+              <a:spcAft>
+                <a:spcPts val="1400"/>
+              </a:spcAft>
+            </a:pPr>
+            <a:r>
+              <a:rPr sz="1800">
+                <a:solidFill>
+                  <a:srgbClr val="1F2A2E"/>
+                </a:solidFill>
+                <a:latin typeface="Calibri"/>
+              </a:rPr>
+              <a:t>• Anonymous-first mirrors global best practice (7 Cups, Crisis Text Line) adapted for India</a:t>
+            </a:r>
+          </a:p>
+          <a:p>
+            <a:pPr>
+              <a:spcAft>
+                <a:spcPts val="1400"/>
+              </a:spcAft>
+            </a:pPr>
+            <a:r>
+              <a:rPr sz="1800">
+                <a:solidFill>
+                  <a:srgbClr val="1F2A2E"/>
+                </a:solidFill>
+                <a:latin typeface="Calibri"/>
+              </a:rPr>
+              <a:t>• Resource library in Hindi, English, Marathi &amp; Gujarati — targets worse vernacular stigma</a:t>
+            </a:r>
+          </a:p>
+          <a:p>
+            <a:pPr>
+              <a:spcAft>
+                <a:spcPts val="1400"/>
+              </a:spcAft>
+            </a:pPr>
+            <a:r>
+              <a:rPr sz="1800">
+                <a:solidFill>
+                  <a:srgbClr val="1F2A2E"/>
+                </a:solidFill>
+                <a:latin typeface="Calibri"/>
+              </a:rPr>
+              <a:t>• Safety built-in: high-risk language auto-escalates, never routes around crisis</a:t>
+            </a:r>
+          </a:p>
+        </p:txBody>
+      </p:sp>
+    </p:spTree>
+  </p:cSld>
+  <p:clrMapOvr>
+    <a:masterClrMapping/>
+  </p:clrMapOvr>
+</p:sld>
+</file>
+
+<file path=ppt/slides/slide14.xml><?xml version="1.0" encoding="utf-8"?>
+<p:sld xmlns:a="http://schemas.openxmlformats.org/drawingml/2006/main" xmlns:p="http://schemas.openxmlformats.org/presentationml/2006/main" xmlns:r="http://schemas.openxmlformats.org/officeDocument/2006/relationships">
+  <p:cSld>
+    <p:spTree>
+      <p:nvGrpSpPr>
+        <p:cNvPr id="1" name=""/>
+        <p:cNvGrpSpPr/>
+        <p:nvPr/>
+      </p:nvGrpSpPr>
+      <p:grpSpPr/>
+      <p:sp>
+        <p:nvSpPr>
+          <p:cNvPr id="2" name="Rectangle 1"/>
+          <p:cNvSpPr/>
+          <p:nvPr/>
+        </p:nvSpPr>
+        <p:spPr>
+          <a:xfrm>
+            <a:off x="0" y="0"/>
+            <a:ext cx="12191695" cy="6858000"/>
+          </a:xfrm>
+          <a:prstGeom prst="rect">
+            <a:avLst/>
+          </a:prstGeom>
+          <a:solidFill>
             <a:srgbClr val="0F9B86"/>
           </a:solidFill>
           <a:ln>
@@ -8182,7 +8644,7 @@
                 </a:solidFill>
                 <a:latin typeface="Calibri"/>
               </a:rPr>
-              <a:t>Live Demo Flow</a:t>
+              <a:t>Product Preview</a:t>
             </a:r>
           </a:p>
         </p:txBody>
@@ -8217,200 +8679,45 @@
                 </a:solidFill>
                 <a:latin typeface="Calibri"/>
               </a:rPr>
-              <a:t>60-SECOND CLICKABLE STORY</a:t>
-            </a:r>
-          </a:p>
-        </p:txBody>
-      </p:sp>
-      <p:sp>
-        <p:nvSpPr>
-          <p:cNvPr id="6" name="TextBox 5"/>
+              <a:t>WHAT YOU'LL SEE IN THE DEMO</a:t>
+            </a:r>
+          </a:p>
+        </p:txBody>
+      </p:sp>
+      <p:pic>
+        <p:nvPicPr>
+          <p:cNvPr id="6" name="Picture 5" descr="preview.png"/>
+          <p:cNvPicPr>
+            <a:picLocks noChangeAspect="1"/>
+          </p:cNvPicPr>
+          <p:nvPr/>
+        </p:nvPicPr>
+        <p:blipFill>
+          <a:blip r:embed="rId2"/>
+          <a:stretch>
+            <a:fillRect/>
+          </a:stretch>
+        </p:blipFill>
+        <p:spPr>
+          <a:xfrm>
+            <a:off x="603504" y="1371600"/>
+            <a:ext cx="10972800" cy="4297441"/>
+          </a:xfrm>
+          <a:prstGeom prst="rect">
+            <a:avLst/>
+          </a:prstGeom>
+        </p:spPr>
+      </p:pic>
+      <p:sp>
+        <p:nvSpPr>
+          <p:cNvPr id="7" name="TextBox 6"/>
           <p:cNvSpPr txBox="1"/>
           <p:nvPr/>
         </p:nvSpPr>
         <p:spPr>
           <a:xfrm>
-            <a:off x="640080" y="1828800"/>
-            <a:ext cx="6583680" cy="4572000"/>
-          </a:xfrm>
-          <a:prstGeom prst="rect">
-            <a:avLst/>
-          </a:prstGeom>
-          <a:noFill/>
-        </p:spPr>
-        <p:txBody>
-          <a:bodyPr wrap="square">
-            <a:spAutoFit/>
-          </a:bodyPr>
-          <a:lstStyle/>
-          <a:p>
-            <a:pPr>
-              <a:spcAft>
-                <a:spcPts val="1100"/>
-              </a:spcAft>
-            </a:pPr>
-            <a:r>
-              <a:rPr sz="1600">
-                <a:solidFill>
-                  <a:srgbClr val="1F2A2E"/>
-                </a:solidFill>
-                <a:latin typeface="Calibri"/>
-              </a:rPr>
-              <a:t>• Landing → 'Start anonymously' (no signup, onboarding tour)</a:t>
-            </a:r>
-          </a:p>
-          <a:p>
-            <a:pPr>
-              <a:spcAft>
-                <a:spcPts val="1100"/>
-              </a:spcAft>
-            </a:pPr>
-            <a:r>
-              <a:rPr sz="1600">
-                <a:solidFill>
-                  <a:srgbClr val="1F2A2E"/>
-                </a:solidFill>
-                <a:latin typeface="Calibri"/>
-              </a:rPr>
-              <a:t>• Mood slider + 3 questions → rule-based triage</a:t>
-            </a:r>
-          </a:p>
-          <a:p>
-            <a:pPr>
-              <a:spcAft>
-                <a:spcPts val="1100"/>
-              </a:spcAft>
-            </a:pPr>
-            <a:r>
-              <a:rPr sz="1600">
-                <a:solidFill>
-                  <a:srgbClr val="1F2A2E"/>
-                </a:solidFill>
-                <a:latin typeface="Calibri"/>
-              </a:rPr>
-              <a:t>• Low/medium → routed to Peer Support room</a:t>
-            </a:r>
-          </a:p>
-          <a:p>
-            <a:pPr>
-              <a:spcAft>
-                <a:spcPts val="1100"/>
-              </a:spcAft>
-            </a:pPr>
-            <a:r>
-              <a:rPr sz="1600">
-                <a:solidFill>
-                  <a:srgbClr val="1F2A2E"/>
-                </a:solidFill>
-                <a:latin typeface="Calibri"/>
-              </a:rPr>
-              <a:t>• Type a risk phrase → Crisis overlay auto-triggers</a:t>
-            </a:r>
-          </a:p>
-          <a:p>
-            <a:pPr>
-              <a:spcAft>
-                <a:spcPts val="1100"/>
-              </a:spcAft>
-            </a:pPr>
-            <a:r>
-              <a:rPr sz="1600">
-                <a:solidFill>
-                  <a:srgbClr val="1F2A2E"/>
-                </a:solidFill>
-                <a:latin typeface="Calibri"/>
-              </a:rPr>
-              <a:t>• SOS hold-to-call button → instant helplines</a:t>
-            </a:r>
-          </a:p>
-          <a:p>
-            <a:pPr>
-              <a:spcAft>
-                <a:spcPts val="1100"/>
-              </a:spcAft>
-            </a:pPr>
-            <a:r>
-              <a:rPr sz="1600">
-                <a:solidFill>
-                  <a:srgbClr val="1F2A2E"/>
-                </a:solidFill>
-                <a:latin typeface="Calibri"/>
-              </a:rPr>
-              <a:t>• Dashboard: streak, badges, 'lowest on Monday' insight</a:t>
-            </a:r>
-          </a:p>
-          <a:p>
-            <a:pPr>
-              <a:spcAft>
-                <a:spcPts val="1100"/>
-              </a:spcAft>
-            </a:pPr>
-            <a:r>
-              <a:rPr sz="1600">
-                <a:solidFill>
-                  <a:srgbClr val="1F2A2E"/>
-                </a:solidFill>
-                <a:latin typeface="Calibri"/>
-              </a:rPr>
-              <a:t>• CBT + Community + Counselor/Admin + Privacy 'My Data'</a:t>
-            </a:r>
-          </a:p>
-        </p:txBody>
-      </p:sp>
-      <p:sp>
-        <p:nvSpPr>
-          <p:cNvPr id="7" name="Rectangle 6"/>
-          <p:cNvSpPr/>
-          <p:nvPr/>
-        </p:nvSpPr>
-        <p:spPr>
-          <a:xfrm>
-            <a:off x="7680960" y="1828800"/>
-            <a:ext cx="3931920" cy="4206240"/>
-          </a:xfrm>
-          <a:prstGeom prst="rect">
-            <a:avLst/>
-          </a:prstGeom>
-          <a:solidFill>
-            <a:srgbClr val="FDF8F1"/>
-          </a:solidFill>
-          <a:ln>
-            <a:noFill/>
-          </a:ln>
-          <a:effectLst/>
-        </p:spPr>
-        <p:style>
-          <a:lnRef idx="1">
-            <a:schemeClr val="accent1"/>
-          </a:lnRef>
-          <a:fillRef idx="3">
-            <a:schemeClr val="accent1"/>
-          </a:fillRef>
-          <a:effectRef idx="2">
-            <a:schemeClr val="accent1"/>
-          </a:effectRef>
-          <a:fontRef idx="minor">
-            <a:schemeClr val="lt1"/>
-          </a:fontRef>
-        </p:style>
-        <p:txBody>
-          <a:bodyPr rtlCol="0" anchor="ctr"/>
-          <a:lstStyle/>
-          <a:p>
-            <a:pPr algn="ctr"/>
-          </a:p>
-        </p:txBody>
-      </p:sp>
-      <p:sp>
-        <p:nvSpPr>
-          <p:cNvPr id="8" name="TextBox 7"/>
-          <p:cNvSpPr txBox="1"/>
-          <p:nvPr/>
-        </p:nvSpPr>
-        <p:spPr>
-          <a:xfrm>
-            <a:off x="7863840" y="2011680"/>
-            <a:ext cx="3566160" cy="457200"/>
+            <a:off x="603504" y="6126480"/>
+            <a:ext cx="10972800" cy="457200"/>
           </a:xfrm>
           <a:prstGeom prst="rect">
             <a:avLst/>
@@ -8423,55 +8730,15 @@
           </a:bodyPr>
           <a:lstStyle/>
           <a:p>
-            <a:pPr algn="l"/>
-            <a:r>
-              <a:rPr sz="1600" b="1">
-                <a:solidFill>
-                  <a:srgbClr val="0B7D6C"/>
-                </a:solidFill>
-                <a:latin typeface="Calibri"/>
-              </a:rPr>
-              <a:t>Try it live:</a:t>
-            </a:r>
-          </a:p>
-        </p:txBody>
-      </p:sp>
-      <p:sp>
-        <p:nvSpPr>
-          <p:cNvPr id="9" name="TextBox 8"/>
-          <p:cNvSpPr txBox="1"/>
-          <p:nvPr/>
-        </p:nvSpPr>
-        <p:spPr>
-          <a:xfrm>
-            <a:off x="7863840" y="2560320"/>
-            <a:ext cx="3566160" cy="3291840"/>
-          </a:xfrm>
-          <a:prstGeom prst="rect">
-            <a:avLst/>
-          </a:prstGeom>
-          <a:noFill/>
-        </p:spPr>
-        <p:txBody>
-          <a:bodyPr wrap="square" anchor="t">
-            <a:spAutoFit/>
-          </a:bodyPr>
-          <a:lstStyle/>
-          <a:p>
-            <a:pPr algn="l"/>
-            <a:r>
-              <a:rPr sz="1200" b="0">
-                <a:solidFill>
-                  <a:srgbClr val="1F2A2E"/>
-                </a:solidFill>
-                <a:latin typeface="Calibri"/>
-              </a:rPr>
-              <a:t>Open index.html → checkin.html
-triage.js is a pure function:
-score({mood, text, answers})
-  → severity: low | medium | high
-  → route: self | peer | crisis
-Same interface a real LLM slots into later.</a:t>
+            <a:pPr algn="ctr"/>
+            <a:r>
+              <a:rPr sz="1400" b="0">
+                <a:solidFill>
+                  <a:srgbClr val="5B6B6E"/>
+                </a:solidFill>
+                <a:latin typeface="Calibri"/>
+              </a:rPr>
+              <a:t>Six core surfaces — all anonymous, all offline-capable, all installable as a PWA.</a:t>
             </a:r>
           </a:p>
         </p:txBody>
@@ -8612,7 +8879,7 @@
                 </a:solidFill>
                 <a:latin typeface="Calibri"/>
               </a:rPr>
-              <a:t>Architecture</a:t>
+              <a:t>Live Demo Flow</a:t>
             </a:r>
           </a:p>
         </p:txBody>
@@ -8647,7 +8914,7 @@
                 </a:solidFill>
                 <a:latin typeface="Calibri"/>
               </a:rPr>
-              <a:t>FROM DEMO TO PRODUCTION</a:t>
+              <a:t>60-SECOND CLICKABLE STORY</a:t>
             </a:r>
           </a:p>
         </p:txBody>
@@ -8660,8 +8927,8 @@
         </p:nvSpPr>
         <p:spPr>
           <a:xfrm>
-            <a:off x="548640" y="1737360"/>
-            <a:ext cx="5486400" cy="4572000"/>
+            <a:off x="640080" y="1828800"/>
+            <a:ext cx="6583680" cy="4572000"/>
           </a:xfrm>
           <a:prstGeom prst="rect">
             <a:avLst/>
@@ -8676,113 +8943,113 @@
           <a:p>
             <a:pPr>
               <a:spcAft>
-                <a:spcPts val="800"/>
+                <a:spcPts val="1100"/>
               </a:spcAft>
             </a:pPr>
             <a:r>
-              <a:rPr sz="1500">
+              <a:rPr sz="1600">
                 <a:solidFill>
                   <a:srgbClr val="1F2A2E"/>
                 </a:solidFill>
                 <a:latin typeface="Calibri"/>
               </a:rPr>
-              <a:t>• Client: HTML/JS + global Crisis/SOS overlay</a:t>
+              <a:t>• Landing → 'Start anonymously' (no signup, onboarding tour)</a:t>
             </a:r>
           </a:p>
           <a:p>
             <a:pPr>
               <a:spcAft>
-                <a:spcPts val="800"/>
+                <a:spcPts val="1100"/>
               </a:spcAft>
             </a:pPr>
             <a:r>
-              <a:rPr sz="1500">
+              <a:rPr sz="1600">
                 <a:solidFill>
                   <a:srgbClr val="1F2A2E"/>
                 </a:solidFill>
                 <a:latin typeface="Calibri"/>
               </a:rPr>
-              <a:t>• Anonymous session store — zero PII (opaque anon_id)</a:t>
+              <a:t>• Mood slider + 3 questions → rule-based triage</a:t>
             </a:r>
           </a:p>
           <a:p>
             <a:pPr>
               <a:spcAft>
-                <a:spcPts val="800"/>
+                <a:spcPts val="1100"/>
               </a:spcAft>
             </a:pPr>
             <a:r>
-              <a:rPr sz="1500">
+              <a:rPr sz="1600">
                 <a:solidFill>
                   <a:srgbClr val="1F2A2E"/>
                 </a:solidFill>
                 <a:latin typeface="Calibri"/>
               </a:rPr>
-              <a:t>• 4 services: Triage · Peer Match · Booking · Crisis</a:t>
-            </a:r>
-          </a:p>
-          <a:p>
-            <a:pPr lvl="1">
+              <a:t>• Low/medium → routed to Peer Support room</a:t>
+            </a:r>
+          </a:p>
+          <a:p>
+            <a:pPr>
               <a:spcAft>
-                <a:spcPts val="800"/>
+                <a:spcPts val="1100"/>
               </a:spcAft>
             </a:pPr>
             <a:r>
-              <a:rPr sz="1500">
+              <a:rPr sz="1600">
                 <a:solidFill>
                   <a:srgbClr val="1F2A2E"/>
                 </a:solidFill>
                 <a:latin typeface="Calibri"/>
               </a:rPr>
-              <a:t>– Demo: rule-based triage + localStorage</a:t>
-            </a:r>
-          </a:p>
-          <a:p>
-            <a:pPr lvl="1">
+              <a:t>• Type a risk phrase → Crisis overlay auto-triggers</a:t>
+            </a:r>
+          </a:p>
+          <a:p>
+            <a:pPr>
               <a:spcAft>
-                <a:spcPts val="800"/>
+                <a:spcPts val="1100"/>
               </a:spcAft>
             </a:pPr>
             <a:r>
-              <a:rPr sz="1500">
+              <a:rPr sz="1600">
                 <a:solidFill>
                   <a:srgbClr val="1F2A2E"/>
                 </a:solidFill>
                 <a:latin typeface="Calibri"/>
               </a:rPr>
-              <a:t>– Prod: FastAPI + LLM (Gemini) behind score()</a:t>
+              <a:t>• SOS hold-to-call button → instant helplines</a:t>
             </a:r>
           </a:p>
           <a:p>
             <a:pPr>
               <a:spcAft>
-                <a:spcPts val="800"/>
+                <a:spcPts val="1100"/>
               </a:spcAft>
             </a:pPr>
             <a:r>
-              <a:rPr sz="1500">
+              <a:rPr sz="1600">
                 <a:solidFill>
                   <a:srgbClr val="1F2A2E"/>
                 </a:solidFill>
                 <a:latin typeface="Calibri"/>
               </a:rPr>
-              <a:t>• Data: hashed logs, TTL auto-delete, encrypted</a:t>
+              <a:t>• Dashboard: streak, badges, 'lowest on Monday' insight</a:t>
             </a:r>
           </a:p>
           <a:p>
             <a:pPr>
               <a:spcAft>
-                <a:spcPts val="800"/>
+                <a:spcPts val="1100"/>
               </a:spcAft>
             </a:pPr>
             <a:r>
-              <a:rPr sz="1500">
+              <a:rPr sz="1600">
                 <a:solidFill>
                   <a:srgbClr val="1F2A2E"/>
                 </a:solidFill>
                 <a:latin typeface="Calibri"/>
               </a:rPr>
-              <a:t>• Helpline registry: iCall / Vandrevala / Tele-MANAS</a:t>
+              <a:t>• CBT + Community + Counselor/Admin + Privacy 'My Data'</a:t>
             </a:r>
           </a:p>
         </p:txBody>
@@ -8795,8 +9062,8 @@
         </p:nvSpPr>
         <p:spPr>
           <a:xfrm>
-            <a:off x="6400800" y="1828800"/>
-            <a:ext cx="5212080" cy="4023360"/>
+            <a:off x="7680960" y="1828800"/>
+            <a:ext cx="3931920" cy="4206240"/>
           </a:xfrm>
           <a:prstGeom prst="rect">
             <a:avLst/>
@@ -8839,8 +9106,8 @@
         </p:nvSpPr>
         <p:spPr>
           <a:xfrm>
-            <a:off x="6583680" y="1965960"/>
-            <a:ext cx="4846320" cy="365760"/>
+            <a:off x="7863840" y="2011680"/>
+            <a:ext cx="3566160" cy="457200"/>
           </a:xfrm>
           <a:prstGeom prst="rect">
             <a:avLst/>
@@ -8861,65 +9128,21 @@
                 </a:solidFill>
                 <a:latin typeface="Calibri"/>
               </a:rPr>
-              <a:t>Trust Funnel</a:t>
-            </a:r>
-          </a:p>
-        </p:txBody>
-      </p:sp>
-      <p:sp>
-        <p:nvSpPr>
-          <p:cNvPr id="9" name="Rectangle 8"/>
-          <p:cNvSpPr/>
-          <p:nvPr/>
-        </p:nvSpPr>
-        <p:spPr>
-          <a:xfrm>
-            <a:off x="6675120" y="2468880"/>
-            <a:ext cx="4663440" cy="685800"/>
-          </a:xfrm>
-          <a:prstGeom prst="rect">
-            <a:avLst/>
-          </a:prstGeom>
-          <a:solidFill>
-            <a:srgbClr val="0F9B86"/>
-          </a:solidFill>
-          <a:ln>
-            <a:noFill/>
-          </a:ln>
-          <a:effectLst/>
-        </p:spPr>
-        <p:style>
-          <a:lnRef idx="1">
-            <a:schemeClr val="accent1"/>
-          </a:lnRef>
-          <a:fillRef idx="3">
-            <a:schemeClr val="accent1"/>
-          </a:fillRef>
-          <a:effectRef idx="2">
-            <a:schemeClr val="accent1"/>
-          </a:effectRef>
-          <a:fontRef idx="minor">
-            <a:schemeClr val="lt1"/>
-          </a:fontRef>
-        </p:style>
-        <p:txBody>
-          <a:bodyPr rtlCol="0" anchor="ctr"/>
-          <a:lstStyle/>
-          <a:p>
-            <a:pPr algn="ctr"/>
-          </a:p>
-        </p:txBody>
-      </p:sp>
-      <p:sp>
-        <p:nvSpPr>
-          <p:cNvPr id="10" name="TextBox 9"/>
+              <a:t>Try it live:</a:t>
+            </a:r>
+          </a:p>
+        </p:txBody>
+      </p:sp>
+      <p:sp>
+        <p:nvSpPr>
+          <p:cNvPr id="9" name="TextBox 8"/>
           <p:cNvSpPr txBox="1"/>
           <p:nvPr/>
         </p:nvSpPr>
         <p:spPr>
           <a:xfrm>
-            <a:off x="6858000" y="2468880"/>
-            <a:ext cx="4297680" cy="685800"/>
+            <a:off x="7863840" y="2560320"/>
+            <a:ext cx="3566160" cy="3291840"/>
           </a:xfrm>
           <a:prstGeom prst="rect">
             <a:avLst/>
@@ -8927,257 +9150,25 @@
           <a:noFill/>
         </p:spPr>
         <p:txBody>
-          <a:bodyPr wrap="square" anchor="ctr">
+          <a:bodyPr wrap="square" anchor="t">
             <a:spAutoFit/>
           </a:bodyPr>
           <a:lstStyle/>
           <a:p>
             <a:pPr algn="l"/>
             <a:r>
-              <a:rPr sz="1400" b="1">
-                <a:solidFill>
-                  <a:srgbClr val="FFFFFF"/>
-                </a:solidFill>
-                <a:latin typeface="Calibri"/>
-              </a:rPr>
-              <a:t>Browser (anon)</a:t>
-            </a:r>
-          </a:p>
-        </p:txBody>
-      </p:sp>
-      <p:sp>
-        <p:nvSpPr>
-          <p:cNvPr id="11" name="Rectangle 10"/>
-          <p:cNvSpPr/>
-          <p:nvPr/>
-        </p:nvSpPr>
-        <p:spPr>
-          <a:xfrm>
-            <a:off x="6675120" y="3337560"/>
-            <a:ext cx="4663440" cy="685800"/>
-          </a:xfrm>
-          <a:prstGeom prst="rect">
-            <a:avLst/>
-          </a:prstGeom>
-          <a:solidFill>
-            <a:srgbClr val="0B7D6C"/>
-          </a:solidFill>
-          <a:ln>
-            <a:noFill/>
-          </a:ln>
-          <a:effectLst/>
-        </p:spPr>
-        <p:style>
-          <a:lnRef idx="1">
-            <a:schemeClr val="accent1"/>
-          </a:lnRef>
-          <a:fillRef idx="3">
-            <a:schemeClr val="accent1"/>
-          </a:fillRef>
-          <a:effectRef idx="2">
-            <a:schemeClr val="accent1"/>
-          </a:effectRef>
-          <a:fontRef idx="minor">
-            <a:schemeClr val="lt1"/>
-          </a:fontRef>
-        </p:style>
-        <p:txBody>
-          <a:bodyPr rtlCol="0" anchor="ctr"/>
-          <a:lstStyle/>
-          <a:p>
-            <a:pPr algn="ctr"/>
-          </a:p>
-        </p:txBody>
-      </p:sp>
-      <p:sp>
-        <p:nvSpPr>
-          <p:cNvPr id="12" name="TextBox 11"/>
-          <p:cNvSpPr txBox="1"/>
-          <p:nvPr/>
-        </p:nvSpPr>
-        <p:spPr>
-          <a:xfrm>
-            <a:off x="6858000" y="3337560"/>
-            <a:ext cx="4297680" cy="685800"/>
-          </a:xfrm>
-          <a:prstGeom prst="rect">
-            <a:avLst/>
-          </a:prstGeom>
-          <a:noFill/>
-        </p:spPr>
-        <p:txBody>
-          <a:bodyPr wrap="square" anchor="ctr">
-            <a:spAutoFit/>
-          </a:bodyPr>
-          <a:lstStyle/>
-          <a:p>
-            <a:pPr algn="l"/>
-            <a:r>
-              <a:rPr sz="1400" b="1">
-                <a:solidFill>
-                  <a:srgbClr val="FFFFFF"/>
-                </a:solidFill>
-                <a:latin typeface="Calibri"/>
-              </a:rPr>
-              <a:t>API / BFF</a:t>
-            </a:r>
-          </a:p>
-        </p:txBody>
-      </p:sp>
-      <p:sp>
-        <p:nvSpPr>
-          <p:cNvPr id="13" name="Rectangle 12"/>
-          <p:cNvSpPr/>
-          <p:nvPr/>
-        </p:nvSpPr>
-        <p:spPr>
-          <a:xfrm>
-            <a:off x="6675120" y="4206240"/>
-            <a:ext cx="4663440" cy="685800"/>
-          </a:xfrm>
-          <a:prstGeom prst="rect">
-            <a:avLst/>
-          </a:prstGeom>
-          <a:solidFill>
-            <a:srgbClr val="0F9B86"/>
-          </a:solidFill>
-          <a:ln>
-            <a:noFill/>
-          </a:ln>
-          <a:effectLst/>
-        </p:spPr>
-        <p:style>
-          <a:lnRef idx="1">
-            <a:schemeClr val="accent1"/>
-          </a:lnRef>
-          <a:fillRef idx="3">
-            <a:schemeClr val="accent1"/>
-          </a:fillRef>
-          <a:effectRef idx="2">
-            <a:schemeClr val="accent1"/>
-          </a:effectRef>
-          <a:fontRef idx="minor">
-            <a:schemeClr val="lt1"/>
-          </a:fontRef>
-        </p:style>
-        <p:txBody>
-          <a:bodyPr rtlCol="0" anchor="ctr"/>
-          <a:lstStyle/>
-          <a:p>
-            <a:pPr algn="ctr"/>
-          </a:p>
-        </p:txBody>
-      </p:sp>
-      <p:sp>
-        <p:nvSpPr>
-          <p:cNvPr id="14" name="TextBox 13"/>
-          <p:cNvSpPr txBox="1"/>
-          <p:nvPr/>
-        </p:nvSpPr>
-        <p:spPr>
-          <a:xfrm>
-            <a:off x="6858000" y="4206240"/>
-            <a:ext cx="4297680" cy="685800"/>
-          </a:xfrm>
-          <a:prstGeom prst="rect">
-            <a:avLst/>
-          </a:prstGeom>
-          <a:noFill/>
-        </p:spPr>
-        <p:txBody>
-          <a:bodyPr wrap="square" anchor="ctr">
-            <a:spAutoFit/>
-          </a:bodyPr>
-          <a:lstStyle/>
-          <a:p>
-            <a:pPr algn="l"/>
-            <a:r>
-              <a:rPr sz="1400" b="1">
-                <a:solidFill>
-                  <a:srgbClr val="FFFFFF"/>
-                </a:solidFill>
-                <a:latin typeface="Calibri"/>
-              </a:rPr>
-              <a:t>Triage · Peer · Booking · Crisis</a:t>
-            </a:r>
-          </a:p>
-        </p:txBody>
-      </p:sp>
-      <p:sp>
-        <p:nvSpPr>
-          <p:cNvPr id="15" name="Rectangle 14"/>
-          <p:cNvSpPr/>
-          <p:nvPr/>
-        </p:nvSpPr>
-        <p:spPr>
-          <a:xfrm>
-            <a:off x="6675120" y="5074920"/>
-            <a:ext cx="4663440" cy="685800"/>
-          </a:xfrm>
-          <a:prstGeom prst="rect">
-            <a:avLst/>
-          </a:prstGeom>
-          <a:solidFill>
-            <a:srgbClr val="0B7D6C"/>
-          </a:solidFill>
-          <a:ln>
-            <a:noFill/>
-          </a:ln>
-          <a:effectLst/>
-        </p:spPr>
-        <p:style>
-          <a:lnRef idx="1">
-            <a:schemeClr val="accent1"/>
-          </a:lnRef>
-          <a:fillRef idx="3">
-            <a:schemeClr val="accent1"/>
-          </a:fillRef>
-          <a:effectRef idx="2">
-            <a:schemeClr val="accent1"/>
-          </a:effectRef>
-          <a:fontRef idx="minor">
-            <a:schemeClr val="lt1"/>
-          </a:fontRef>
-        </p:style>
-        <p:txBody>
-          <a:bodyPr rtlCol="0" anchor="ctr"/>
-          <a:lstStyle/>
-          <a:p>
-            <a:pPr algn="ctr"/>
-          </a:p>
-        </p:txBody>
-      </p:sp>
-      <p:sp>
-        <p:nvSpPr>
-          <p:cNvPr id="16" name="TextBox 15"/>
-          <p:cNvSpPr txBox="1"/>
-          <p:nvPr/>
-        </p:nvSpPr>
-        <p:spPr>
-          <a:xfrm>
-            <a:off x="6858000" y="5074920"/>
-            <a:ext cx="4297680" cy="685800"/>
-          </a:xfrm>
-          <a:prstGeom prst="rect">
-            <a:avLst/>
-          </a:prstGeom>
-          <a:noFill/>
-        </p:spPr>
-        <p:txBody>
-          <a:bodyPr wrap="square" anchor="ctr">
-            <a:spAutoFit/>
-          </a:bodyPr>
-          <a:lstStyle/>
-          <a:p>
-            <a:pPr algn="l"/>
-            <a:r>
-              <a:rPr sz="1400" b="1">
-                <a:solidFill>
-                  <a:srgbClr val="FFFFFF"/>
-                </a:solidFill>
-                <a:latin typeface="Calibri"/>
-              </a:rPr>
-              <a:t>Encrypted Data Layer</a:t>
+              <a:rPr sz="1200" b="0">
+                <a:solidFill>
+                  <a:srgbClr val="1F2A2E"/>
+                </a:solidFill>
+                <a:latin typeface="Calibri"/>
+              </a:rPr>
+              <a:t>Open index.html → checkin.html
+triage.js is a pure function:
+score({mood, text, answers})
+  → severity: low | medium | high
+  → route: self | peer | crisis
+Same interface a real LLM slots into later.</a:t>
             </a:r>
           </a:p>
         </p:txBody>
@@ -9318,7 +9309,7 @@
                 </a:solidFill>
                 <a:latin typeface="Calibri"/>
               </a:rPr>
-              <a:t>Privacy &amp; Safety by Design</a:t>
+              <a:t>Architecture</a:t>
             </a:r>
           </a:p>
         </p:txBody>
@@ -9353,21 +9344,156 @@
                 </a:solidFill>
                 <a:latin typeface="Calibri"/>
               </a:rPr>
-              <a:t>JUDGES ASK — WE SHOW</a:t>
-            </a:r>
-          </a:p>
-        </p:txBody>
-      </p:sp>
-      <p:sp>
-        <p:nvSpPr>
-          <p:cNvPr id="6" name="Rectangle 5"/>
+              <a:t>FROM DEMO TO PRODUCTION</a:t>
+            </a:r>
+          </a:p>
+        </p:txBody>
+      </p:sp>
+      <p:sp>
+        <p:nvSpPr>
+          <p:cNvPr id="6" name="TextBox 5"/>
+          <p:cNvSpPr txBox="1"/>
+          <p:nvPr/>
+        </p:nvSpPr>
+        <p:spPr>
+          <a:xfrm>
+            <a:off x="548640" y="1737360"/>
+            <a:ext cx="5486400" cy="4572000"/>
+          </a:xfrm>
+          <a:prstGeom prst="rect">
+            <a:avLst/>
+          </a:prstGeom>
+          <a:noFill/>
+        </p:spPr>
+        <p:txBody>
+          <a:bodyPr wrap="square">
+            <a:spAutoFit/>
+          </a:bodyPr>
+          <a:lstStyle/>
+          <a:p>
+            <a:pPr>
+              <a:spcAft>
+                <a:spcPts val="800"/>
+              </a:spcAft>
+            </a:pPr>
+            <a:r>
+              <a:rPr sz="1500">
+                <a:solidFill>
+                  <a:srgbClr val="1F2A2E"/>
+                </a:solidFill>
+                <a:latin typeface="Calibri"/>
+              </a:rPr>
+              <a:t>• Client: HTML/JS + global Crisis/SOS overlay</a:t>
+            </a:r>
+          </a:p>
+          <a:p>
+            <a:pPr>
+              <a:spcAft>
+                <a:spcPts val="800"/>
+              </a:spcAft>
+            </a:pPr>
+            <a:r>
+              <a:rPr sz="1500">
+                <a:solidFill>
+                  <a:srgbClr val="1F2A2E"/>
+                </a:solidFill>
+                <a:latin typeface="Calibri"/>
+              </a:rPr>
+              <a:t>• Anonymous session store — zero PII (opaque anon_id)</a:t>
+            </a:r>
+          </a:p>
+          <a:p>
+            <a:pPr>
+              <a:spcAft>
+                <a:spcPts val="800"/>
+              </a:spcAft>
+            </a:pPr>
+            <a:r>
+              <a:rPr sz="1500">
+                <a:solidFill>
+                  <a:srgbClr val="1F2A2E"/>
+                </a:solidFill>
+                <a:latin typeface="Calibri"/>
+              </a:rPr>
+              <a:t>• 4 services: Triage · Peer Match · Booking · Crisis</a:t>
+            </a:r>
+          </a:p>
+          <a:p>
+            <a:pPr lvl="1">
+              <a:spcAft>
+                <a:spcPts val="800"/>
+              </a:spcAft>
+            </a:pPr>
+            <a:r>
+              <a:rPr sz="1500">
+                <a:solidFill>
+                  <a:srgbClr val="1F2A2E"/>
+                </a:solidFill>
+                <a:latin typeface="Calibri"/>
+              </a:rPr>
+              <a:t>– Demo: rule-based triage + localStorage</a:t>
+            </a:r>
+          </a:p>
+          <a:p>
+            <a:pPr lvl="1">
+              <a:spcAft>
+                <a:spcPts val="800"/>
+              </a:spcAft>
+            </a:pPr>
+            <a:r>
+              <a:rPr sz="1500">
+                <a:solidFill>
+                  <a:srgbClr val="1F2A2E"/>
+                </a:solidFill>
+                <a:latin typeface="Calibri"/>
+              </a:rPr>
+              <a:t>– Prod: FastAPI + LLM (Gemini) behind score()</a:t>
+            </a:r>
+          </a:p>
+          <a:p>
+            <a:pPr>
+              <a:spcAft>
+                <a:spcPts val="800"/>
+              </a:spcAft>
+            </a:pPr>
+            <a:r>
+              <a:rPr sz="1500">
+                <a:solidFill>
+                  <a:srgbClr val="1F2A2E"/>
+                </a:solidFill>
+                <a:latin typeface="Calibri"/>
+              </a:rPr>
+              <a:t>• Data: hashed logs, TTL auto-delete, encrypted</a:t>
+            </a:r>
+          </a:p>
+          <a:p>
+            <a:pPr>
+              <a:spcAft>
+                <a:spcPts val="800"/>
+              </a:spcAft>
+            </a:pPr>
+            <a:r>
+              <a:rPr sz="1500">
+                <a:solidFill>
+                  <a:srgbClr val="1F2A2E"/>
+                </a:solidFill>
+                <a:latin typeface="Calibri"/>
+              </a:rPr>
+              <a:t>• Helpline registry: iCall / Vandrevala / Tele-MANAS</a:t>
+            </a:r>
+          </a:p>
+        </p:txBody>
+      </p:sp>
+      <p:sp>
+        <p:nvSpPr>
+          <p:cNvPr id="7" name="Rectangle 6"/>
           <p:cNvSpPr/>
           <p:nvPr/>
         </p:nvSpPr>
         <p:spPr>
           <a:xfrm>
-            <a:off x="457200" y="1828800"/>
-            <a:ext cx="2670048" cy="1783080"/>
+            <a:off x="6400800" y="1828800"/>
+            <a:ext cx="5212080" cy="4023360"/>
           </a:xfrm>
           <a:prstGeom prst="rect">
             <a:avLst/>
@@ -9404,14 +9530,14 @@
       </p:sp>
       <p:sp>
         <p:nvSpPr>
-          <p:cNvPr id="7" name="TextBox 6"/>
+          <p:cNvPr id="8" name="TextBox 7"/>
           <p:cNvSpPr txBox="1"/>
           <p:nvPr/>
         </p:nvSpPr>
         <p:spPr>
           <a:xfrm>
-            <a:off x="640080" y="1965960"/>
-            <a:ext cx="2377440" cy="457200"/>
+            <a:off x="6583680" y="1965960"/>
+            <a:ext cx="4846320" cy="365760"/>
           </a:xfrm>
           <a:prstGeom prst="rect">
             <a:avLst/>
@@ -9426,48 +9552,13 @@
           <a:p>
             <a:pPr algn="l"/>
             <a:r>
-              <a:rPr sz="1500" b="1">
+              <a:rPr sz="1600" b="1">
                 <a:solidFill>
                   <a:srgbClr val="0B7D6C"/>
                 </a:solidFill>
                 <a:latin typeface="Calibri"/>
               </a:rPr>
-              <a:t>Anonymous ID</a:t>
-            </a:r>
-          </a:p>
-        </p:txBody>
-      </p:sp>
-      <p:sp>
-        <p:nvSpPr>
-          <p:cNvPr id="8" name="TextBox 7"/>
-          <p:cNvSpPr txBox="1"/>
-          <p:nvPr/>
-        </p:nvSpPr>
-        <p:spPr>
-          <a:xfrm>
-            <a:off x="640080" y="2468880"/>
-            <a:ext cx="2377440" cy="1005840"/>
-          </a:xfrm>
-          <a:prstGeom prst="rect">
-            <a:avLst/>
-          </a:prstGeom>
-          <a:noFill/>
-        </p:spPr>
-        <p:txBody>
-          <a:bodyPr wrap="square" anchor="t">
-            <a:spAutoFit/>
-          </a:bodyPr>
-          <a:lstStyle/>
-          <a:p>
-            <a:pPr algn="l"/>
-            <a:r>
-              <a:rPr sz="1200" b="0">
-                <a:solidFill>
-                  <a:srgbClr val="1F2A2E"/>
-                </a:solidFill>
-                <a:latin typeface="Calibri"/>
-              </a:rPr>
-              <a:t>No name/email/phone. Opaque anon_id only.</a:t>
+              <a:t>Trust Funnel</a:t>
             </a:r>
           </a:p>
         </p:txBody>
@@ -9480,14 +9571,14 @@
         </p:nvSpPr>
         <p:spPr>
           <a:xfrm>
-            <a:off x="3310128" y="1828800"/>
-            <a:ext cx="2670048" cy="1783080"/>
+            <a:off x="6675120" y="2468880"/>
+            <a:ext cx="4663440" cy="685800"/>
           </a:xfrm>
           <a:prstGeom prst="rect">
             <a:avLst/>
           </a:prstGeom>
           <a:solidFill>
-            <a:srgbClr val="FDF8F1"/>
+            <a:srgbClr val="0F9B86"/>
           </a:solidFill>
           <a:ln>
             <a:noFill/>
@@ -9524,8 +9615,8 @@
         </p:nvSpPr>
         <p:spPr>
           <a:xfrm>
-            <a:off x="3493008" y="1965960"/>
-            <a:ext cx="2377440" cy="457200"/>
+            <a:off x="6858000" y="2468880"/>
+            <a:ext cx="4297680" cy="685800"/>
           </a:xfrm>
           <a:prstGeom prst="rect">
             <a:avLst/>
@@ -9533,75 +9624,40 @@
           <a:noFill/>
         </p:spPr>
         <p:txBody>
-          <a:bodyPr wrap="square" anchor="t">
+          <a:bodyPr wrap="square" anchor="ctr">
             <a:spAutoFit/>
           </a:bodyPr>
           <a:lstStyle/>
           <a:p>
             <a:pPr algn="l"/>
             <a:r>
-              <a:rPr sz="1500" b="1">
-                <a:solidFill>
-                  <a:srgbClr val="0B7D6C"/>
-                </a:solidFill>
-                <a:latin typeface="Calibri"/>
-              </a:rPr>
-              <a:t>Blind booking</a:t>
-            </a:r>
-          </a:p>
-        </p:txBody>
-      </p:sp>
-      <p:sp>
-        <p:nvSpPr>
-          <p:cNvPr id="11" name="TextBox 10"/>
-          <p:cNvSpPr txBox="1"/>
-          <p:nvPr/>
-        </p:nvSpPr>
-        <p:spPr>
-          <a:xfrm>
-            <a:off x="3493008" y="2468880"/>
-            <a:ext cx="2377440" cy="1005840"/>
-          </a:xfrm>
-          <a:prstGeom prst="rect">
-            <a:avLst/>
-          </a:prstGeom>
-          <a:noFill/>
-        </p:spPr>
-        <p:txBody>
-          <a:bodyPr wrap="square" anchor="t">
-            <a:spAutoFit/>
-          </a:bodyPr>
-          <a:lstStyle/>
-          <a:p>
-            <a:pPr algn="l"/>
-            <a:r>
-              <a:rPr sz="1200" b="0">
-                <a:solidFill>
-                  <a:srgbClr val="1F2A2E"/>
-                </a:solidFill>
-                <a:latin typeface="Calibri"/>
-              </a:rPr>
-              <a:t>Admin sees ID + slot. No faculty/parent view.</a:t>
-            </a:r>
-          </a:p>
-        </p:txBody>
-      </p:sp>
-      <p:sp>
-        <p:nvSpPr>
-          <p:cNvPr id="12" name="Rectangle 11"/>
+              <a:rPr sz="1400" b="1">
+                <a:solidFill>
+                  <a:srgbClr val="FFFFFF"/>
+                </a:solidFill>
+                <a:latin typeface="Calibri"/>
+              </a:rPr>
+              <a:t>Browser (anon)</a:t>
+            </a:r>
+          </a:p>
+        </p:txBody>
+      </p:sp>
+      <p:sp>
+        <p:nvSpPr>
+          <p:cNvPr id="11" name="Rectangle 10"/>
           <p:cNvSpPr/>
           <p:nvPr/>
         </p:nvSpPr>
         <p:spPr>
           <a:xfrm>
-            <a:off x="6163056" y="1828800"/>
-            <a:ext cx="2670048" cy="1783080"/>
+            <a:off x="6675120" y="3337560"/>
+            <a:ext cx="4663440" cy="685800"/>
           </a:xfrm>
           <a:prstGeom prst="rect">
             <a:avLst/>
           </a:prstGeom>
           <a:solidFill>
-            <a:srgbClr val="FDF8F1"/>
+            <a:srgbClr val="0B7D6C"/>
           </a:solidFill>
           <a:ln>
             <a:noFill/>
@@ -9632,14 +9688,14 @@
       </p:sp>
       <p:sp>
         <p:nvSpPr>
-          <p:cNvPr id="13" name="TextBox 12"/>
+          <p:cNvPr id="12" name="TextBox 11"/>
           <p:cNvSpPr txBox="1"/>
           <p:nvPr/>
         </p:nvSpPr>
         <p:spPr>
           <a:xfrm>
-            <a:off x="6345936" y="1965960"/>
-            <a:ext cx="2377440" cy="457200"/>
+            <a:off x="6858000" y="3337560"/>
+            <a:ext cx="4297680" cy="685800"/>
           </a:xfrm>
           <a:prstGeom prst="rect">
             <a:avLst/>
@@ -9647,75 +9703,40 @@
           <a:noFill/>
         </p:spPr>
         <p:txBody>
-          <a:bodyPr wrap="square" anchor="t">
+          <a:bodyPr wrap="square" anchor="ctr">
             <a:spAutoFit/>
           </a:bodyPr>
           <a:lstStyle/>
           <a:p>
             <a:pPr algn="l"/>
             <a:r>
-              <a:rPr sz="1500" b="1">
-                <a:solidFill>
-                  <a:srgbClr val="0B7D6C"/>
-                </a:solidFill>
-                <a:latin typeface="Calibri"/>
-              </a:rPr>
-              <a:t>Local-first demo</a:t>
-            </a:r>
-          </a:p>
-        </p:txBody>
-      </p:sp>
-      <p:sp>
-        <p:nvSpPr>
-          <p:cNvPr id="14" name="TextBox 13"/>
-          <p:cNvSpPr txBox="1"/>
-          <p:nvPr/>
-        </p:nvSpPr>
-        <p:spPr>
-          <a:xfrm>
-            <a:off x="6345936" y="2468880"/>
-            <a:ext cx="2377440" cy="1005840"/>
-          </a:xfrm>
-          <a:prstGeom prst="rect">
-            <a:avLst/>
-          </a:prstGeom>
-          <a:noFill/>
-        </p:spPr>
-        <p:txBody>
-          <a:bodyPr wrap="square" anchor="t">
-            <a:spAutoFit/>
-          </a:bodyPr>
-          <a:lstStyle/>
-          <a:p>
-            <a:pPr algn="l"/>
-            <a:r>
-              <a:rPr sz="1200" b="0">
-                <a:solidFill>
-                  <a:srgbClr val="1F2A2E"/>
-                </a:solidFill>
-                <a:latin typeface="Calibri"/>
-              </a:rPr>
-              <a:t>Check-in state stays on device.</a:t>
-            </a:r>
-          </a:p>
-        </p:txBody>
-      </p:sp>
-      <p:sp>
-        <p:nvSpPr>
-          <p:cNvPr id="15" name="Rectangle 14"/>
+              <a:rPr sz="1400" b="1">
+                <a:solidFill>
+                  <a:srgbClr val="FFFFFF"/>
+                </a:solidFill>
+                <a:latin typeface="Calibri"/>
+              </a:rPr>
+              <a:t>API / BFF</a:t>
+            </a:r>
+          </a:p>
+        </p:txBody>
+      </p:sp>
+      <p:sp>
+        <p:nvSpPr>
+          <p:cNvPr id="13" name="Rectangle 12"/>
           <p:cNvSpPr/>
           <p:nvPr/>
         </p:nvSpPr>
         <p:spPr>
           <a:xfrm>
-            <a:off x="9015984" y="1828800"/>
-            <a:ext cx="2670048" cy="1783080"/>
+            <a:off x="6675120" y="4206240"/>
+            <a:ext cx="4663440" cy="685800"/>
           </a:xfrm>
           <a:prstGeom prst="rect">
             <a:avLst/>
           </a:prstGeom>
           <a:solidFill>
-            <a:srgbClr val="FDF8F1"/>
+            <a:srgbClr val="0F9B86"/>
           </a:solidFill>
           <a:ln>
             <a:noFill/>
@@ -9746,14 +9767,14 @@
       </p:sp>
       <p:sp>
         <p:nvSpPr>
-          <p:cNvPr id="16" name="TextBox 15"/>
+          <p:cNvPr id="14" name="TextBox 13"/>
           <p:cNvSpPr txBox="1"/>
           <p:nvPr/>
         </p:nvSpPr>
         <p:spPr>
           <a:xfrm>
-            <a:off x="9198864" y="1965960"/>
-            <a:ext cx="2377440" cy="457200"/>
+            <a:off x="6858000" y="4206240"/>
+            <a:ext cx="4297680" cy="685800"/>
           </a:xfrm>
           <a:prstGeom prst="rect">
             <a:avLst/>
@@ -9761,75 +9782,40 @@
           <a:noFill/>
         </p:spPr>
         <p:txBody>
-          <a:bodyPr wrap="square" anchor="t">
+          <a:bodyPr wrap="square" anchor="ctr">
             <a:spAutoFit/>
           </a:bodyPr>
           <a:lstStyle/>
           <a:p>
             <a:pPr algn="l"/>
             <a:r>
-              <a:rPr sz="1500" b="1">
-                <a:solidFill>
-                  <a:srgbClr val="0B7D6C"/>
-                </a:solidFill>
-                <a:latin typeface="Calibri"/>
-              </a:rPr>
-              <a:t>Auto-purge</a:t>
-            </a:r>
-          </a:p>
-        </p:txBody>
-      </p:sp>
-      <p:sp>
-        <p:nvSpPr>
-          <p:cNvPr id="17" name="TextBox 16"/>
-          <p:cNvSpPr txBox="1"/>
-          <p:nvPr/>
-        </p:nvSpPr>
-        <p:spPr>
-          <a:xfrm>
-            <a:off x="9198864" y="2468880"/>
-            <a:ext cx="2377440" cy="1005840"/>
-          </a:xfrm>
-          <a:prstGeom prst="rect">
-            <a:avLst/>
-          </a:prstGeom>
-          <a:noFill/>
-        </p:spPr>
-        <p:txBody>
-          <a:bodyPr wrap="square" anchor="t">
-            <a:spAutoFit/>
-          </a:bodyPr>
-          <a:lstStyle/>
-          <a:p>
-            <a:pPr algn="l"/>
-            <a:r>
-              <a:rPr sz="1200" b="0">
-                <a:solidFill>
-                  <a:srgbClr val="1F2A2E"/>
-                </a:solidFill>
-                <a:latin typeface="Calibri"/>
-              </a:rPr>
-              <a:t>Hashed logs, short TTL in production.</a:t>
-            </a:r>
-          </a:p>
-        </p:txBody>
-      </p:sp>
-      <p:sp>
-        <p:nvSpPr>
-          <p:cNvPr id="18" name="Rectangle 17"/>
+              <a:rPr sz="1400" b="1">
+                <a:solidFill>
+                  <a:srgbClr val="FFFFFF"/>
+                </a:solidFill>
+                <a:latin typeface="Calibri"/>
+              </a:rPr>
+              <a:t>Triage · Peer · Booking · Crisis</a:t>
+            </a:r>
+          </a:p>
+        </p:txBody>
+      </p:sp>
+      <p:sp>
+        <p:nvSpPr>
+          <p:cNvPr id="15" name="Rectangle 14"/>
           <p:cNvSpPr/>
           <p:nvPr/>
         </p:nvSpPr>
         <p:spPr>
           <a:xfrm>
-            <a:off x="457200" y="3840480"/>
-            <a:ext cx="2670048" cy="1783080"/>
+            <a:off x="6675120" y="5074920"/>
+            <a:ext cx="4663440" cy="685800"/>
           </a:xfrm>
           <a:prstGeom prst="rect">
             <a:avLst/>
           </a:prstGeom>
           <a:solidFill>
-            <a:srgbClr val="FDF8F1"/>
+            <a:srgbClr val="0B7D6C"/>
           </a:solidFill>
           <a:ln>
             <a:noFill/>
@@ -9860,14 +9846,14 @@
       </p:sp>
       <p:sp>
         <p:nvSpPr>
-          <p:cNvPr id="19" name="TextBox 18"/>
+          <p:cNvPr id="16" name="TextBox 15"/>
           <p:cNvSpPr txBox="1"/>
           <p:nvPr/>
         </p:nvSpPr>
         <p:spPr>
           <a:xfrm>
-            <a:off x="640080" y="3977640"/>
-            <a:ext cx="2377440" cy="457200"/>
+            <a:off x="6858000" y="5074920"/>
+            <a:ext cx="4297680" cy="685800"/>
           </a:xfrm>
           <a:prstGeom prst="rect">
             <a:avLst/>
@@ -9875,397 +9861,20 @@
           <a:noFill/>
         </p:spPr>
         <p:txBody>
-          <a:bodyPr wrap="square" anchor="t">
+          <a:bodyPr wrap="square" anchor="ctr">
             <a:spAutoFit/>
           </a:bodyPr>
           <a:lstStyle/>
           <a:p>
             <a:pPr algn="l"/>
             <a:r>
-              <a:rPr sz="1500" b="1">
-                <a:solidFill>
-                  <a:srgbClr val="0B7D6C"/>
-                </a:solidFill>
-                <a:latin typeface="Calibri"/>
-              </a:rPr>
-              <a:t>Consent-gated</a:t>
-            </a:r>
-          </a:p>
-        </p:txBody>
-      </p:sp>
-      <p:sp>
-        <p:nvSpPr>
-          <p:cNvPr id="20" name="TextBox 19"/>
-          <p:cNvSpPr txBox="1"/>
-          <p:nvPr/>
-        </p:nvSpPr>
-        <p:spPr>
-          <a:xfrm>
-            <a:off x="640080" y="4480560"/>
-            <a:ext cx="2377440" cy="1005840"/>
-          </a:xfrm>
-          <a:prstGeom prst="rect">
-            <a:avLst/>
-          </a:prstGeom>
-          <a:noFill/>
-        </p:spPr>
-        <p:txBody>
-          <a:bodyPr wrap="square" anchor="t">
-            <a:spAutoFit/>
-          </a:bodyPr>
-          <a:lstStyle/>
-          <a:p>
-            <a:pPr algn="l"/>
-            <a:r>
-              <a:rPr sz="1200" b="0">
-                <a:solidFill>
-                  <a:srgbClr val="1F2A2E"/>
-                </a:solidFill>
-                <a:latin typeface="Calibri"/>
-              </a:rPr>
-              <a:t>Identities revealed only by you.</a:t>
-            </a:r>
-          </a:p>
-        </p:txBody>
-      </p:sp>
-      <p:sp>
-        <p:nvSpPr>
-          <p:cNvPr id="21" name="Rectangle 20"/>
-          <p:cNvSpPr/>
-          <p:nvPr/>
-        </p:nvSpPr>
-        <p:spPr>
-          <a:xfrm>
-            <a:off x="3310128" y="3840480"/>
-            <a:ext cx="2670048" cy="1783080"/>
-          </a:xfrm>
-          <a:prstGeom prst="rect">
-            <a:avLst/>
-          </a:prstGeom>
-          <a:solidFill>
-            <a:srgbClr val="FDF8F1"/>
-          </a:solidFill>
-          <a:ln>
-            <a:noFill/>
-          </a:ln>
-          <a:effectLst/>
-        </p:spPr>
-        <p:style>
-          <a:lnRef idx="1">
-            <a:schemeClr val="accent1"/>
-          </a:lnRef>
-          <a:fillRef idx="3">
-            <a:schemeClr val="accent1"/>
-          </a:fillRef>
-          <a:effectRef idx="2">
-            <a:schemeClr val="accent1"/>
-          </a:effectRef>
-          <a:fontRef idx="minor">
-            <a:schemeClr val="lt1"/>
-          </a:fontRef>
-        </p:style>
-        <p:txBody>
-          <a:bodyPr rtlCol="0" anchor="ctr"/>
-          <a:lstStyle/>
-          <a:p>
-            <a:pPr algn="ctr"/>
-          </a:p>
-        </p:txBody>
-      </p:sp>
-      <p:sp>
-        <p:nvSpPr>
-          <p:cNvPr id="22" name="TextBox 21"/>
-          <p:cNvSpPr txBox="1"/>
-          <p:nvPr/>
-        </p:nvSpPr>
-        <p:spPr>
-          <a:xfrm>
-            <a:off x="3493008" y="3977640"/>
-            <a:ext cx="2377440" cy="457200"/>
-          </a:xfrm>
-          <a:prstGeom prst="rect">
-            <a:avLst/>
-          </a:prstGeom>
-          <a:noFill/>
-        </p:spPr>
-        <p:txBody>
-          <a:bodyPr wrap="square" anchor="t">
-            <a:spAutoFit/>
-          </a:bodyPr>
-          <a:lstStyle/>
-          <a:p>
-            <a:pPr algn="l"/>
-            <a:r>
-              <a:rPr sz="1500" b="1">
-                <a:solidFill>
-                  <a:srgbClr val="0B7D6C"/>
-                </a:solidFill>
-                <a:latin typeface="Calibri"/>
-              </a:rPr>
-              <a:t>Encrypted</a:t>
-            </a:r>
-          </a:p>
-        </p:txBody>
-      </p:sp>
-      <p:sp>
-        <p:nvSpPr>
-          <p:cNvPr id="23" name="TextBox 22"/>
-          <p:cNvSpPr txBox="1"/>
-          <p:nvPr/>
-        </p:nvSpPr>
-        <p:spPr>
-          <a:xfrm>
-            <a:off x="3493008" y="4480560"/>
-            <a:ext cx="2377440" cy="1005840"/>
-          </a:xfrm>
-          <a:prstGeom prst="rect">
-            <a:avLst/>
-          </a:prstGeom>
-          <a:noFill/>
-        </p:spPr>
-        <p:txBody>
-          <a:bodyPr wrap="square" anchor="t">
-            <a:spAutoFit/>
-          </a:bodyPr>
-          <a:lstStyle/>
-          <a:p>
-            <a:pPr algn="l"/>
-            <a:r>
-              <a:rPr sz="1200" b="0">
-                <a:solidFill>
-                  <a:srgbClr val="1F2A2E"/>
-                </a:solidFill>
-                <a:latin typeface="Calibri"/>
-              </a:rPr>
-              <a:t>TLS + column-level encryption at rest.</a:t>
-            </a:r>
-          </a:p>
-        </p:txBody>
-      </p:sp>
-      <p:sp>
-        <p:nvSpPr>
-          <p:cNvPr id="24" name="Rectangle 23"/>
-          <p:cNvSpPr/>
-          <p:nvPr/>
-        </p:nvSpPr>
-        <p:spPr>
-          <a:xfrm>
-            <a:off x="6163056" y="3840480"/>
-            <a:ext cx="2670048" cy="1783080"/>
-          </a:xfrm>
-          <a:prstGeom prst="rect">
-            <a:avLst/>
-          </a:prstGeom>
-          <a:solidFill>
-            <a:srgbClr val="FDF8F1"/>
-          </a:solidFill>
-          <a:ln>
-            <a:noFill/>
-          </a:ln>
-          <a:effectLst/>
-        </p:spPr>
-        <p:style>
-          <a:lnRef idx="1">
-            <a:schemeClr val="accent1"/>
-          </a:lnRef>
-          <a:fillRef idx="3">
-            <a:schemeClr val="accent1"/>
-          </a:fillRef>
-          <a:effectRef idx="2">
-            <a:schemeClr val="accent1"/>
-          </a:effectRef>
-          <a:fontRef idx="minor">
-            <a:schemeClr val="lt1"/>
-          </a:fontRef>
-        </p:style>
-        <p:txBody>
-          <a:bodyPr rtlCol="0" anchor="ctr"/>
-          <a:lstStyle/>
-          <a:p>
-            <a:pPr algn="ctr"/>
-          </a:p>
-        </p:txBody>
-      </p:sp>
-      <p:sp>
-        <p:nvSpPr>
-          <p:cNvPr id="25" name="TextBox 24"/>
-          <p:cNvSpPr txBox="1"/>
-          <p:nvPr/>
-        </p:nvSpPr>
-        <p:spPr>
-          <a:xfrm>
-            <a:off x="6345936" y="3977640"/>
-            <a:ext cx="2377440" cy="457200"/>
-          </a:xfrm>
-          <a:prstGeom prst="rect">
-            <a:avLst/>
-          </a:prstGeom>
-          <a:noFill/>
-        </p:spPr>
-        <p:txBody>
-          <a:bodyPr wrap="square" anchor="t">
-            <a:spAutoFit/>
-          </a:bodyPr>
-          <a:lstStyle/>
-          <a:p>
-            <a:pPr algn="l"/>
-            <a:r>
-              <a:rPr sz="1500" b="1">
-                <a:solidFill>
-                  <a:srgbClr val="0B7D6C"/>
-                </a:solidFill>
-                <a:latin typeface="Calibri"/>
-              </a:rPr>
-              <a:t>🚨 SOS + Crisis</a:t>
-            </a:r>
-          </a:p>
-        </p:txBody>
-      </p:sp>
-      <p:sp>
-        <p:nvSpPr>
-          <p:cNvPr id="26" name="TextBox 25"/>
-          <p:cNvSpPr txBox="1"/>
-          <p:nvPr/>
-        </p:nvSpPr>
-        <p:spPr>
-          <a:xfrm>
-            <a:off x="6345936" y="4480560"/>
-            <a:ext cx="2377440" cy="1005840"/>
-          </a:xfrm>
-          <a:prstGeom prst="rect">
-            <a:avLst/>
-          </a:prstGeom>
-          <a:noFill/>
-        </p:spPr>
-        <p:txBody>
-          <a:bodyPr wrap="square" anchor="t">
-            <a:spAutoFit/>
-          </a:bodyPr>
-          <a:lstStyle/>
-          <a:p>
-            <a:pPr algn="l"/>
-            <a:r>
-              <a:rPr sz="1200" b="0">
-                <a:solidFill>
-                  <a:srgbClr val="1F2A2E"/>
-                </a:solidFill>
-                <a:latin typeface="Calibri"/>
-              </a:rPr>
-              <a:t>High-risk language auto-escalates, never routes around.</a:t>
-            </a:r>
-          </a:p>
-        </p:txBody>
-      </p:sp>
-      <p:sp>
-        <p:nvSpPr>
-          <p:cNvPr id="27" name="Rectangle 26"/>
-          <p:cNvSpPr/>
-          <p:nvPr/>
-        </p:nvSpPr>
-        <p:spPr>
-          <a:xfrm>
-            <a:off x="9015984" y="3840480"/>
-            <a:ext cx="2670048" cy="1783080"/>
-          </a:xfrm>
-          <a:prstGeom prst="rect">
-            <a:avLst/>
-          </a:prstGeom>
-          <a:solidFill>
-            <a:srgbClr val="FDF8F1"/>
-          </a:solidFill>
-          <a:ln>
-            <a:noFill/>
-          </a:ln>
-          <a:effectLst/>
-        </p:spPr>
-        <p:style>
-          <a:lnRef idx="1">
-            <a:schemeClr val="accent1"/>
-          </a:lnRef>
-          <a:fillRef idx="3">
-            <a:schemeClr val="accent1"/>
-          </a:fillRef>
-          <a:effectRef idx="2">
-            <a:schemeClr val="accent1"/>
-          </a:effectRef>
-          <a:fontRef idx="minor">
-            <a:schemeClr val="lt1"/>
-          </a:fontRef>
-        </p:style>
-        <p:txBody>
-          <a:bodyPr rtlCol="0" anchor="ctr"/>
-          <a:lstStyle/>
-          <a:p>
-            <a:pPr algn="ctr"/>
-          </a:p>
-        </p:txBody>
-      </p:sp>
-      <p:sp>
-        <p:nvSpPr>
-          <p:cNvPr id="28" name="TextBox 27"/>
-          <p:cNvSpPr txBox="1"/>
-          <p:nvPr/>
-        </p:nvSpPr>
-        <p:spPr>
-          <a:xfrm>
-            <a:off x="9198864" y="3977640"/>
-            <a:ext cx="2377440" cy="457200"/>
-          </a:xfrm>
-          <a:prstGeom prst="rect">
-            <a:avLst/>
-          </a:prstGeom>
-          <a:noFill/>
-        </p:spPr>
-        <p:txBody>
-          <a:bodyPr wrap="square" anchor="t">
-            <a:spAutoFit/>
-          </a:bodyPr>
-          <a:lstStyle/>
-          <a:p>
-            <a:pPr algn="l"/>
-            <a:r>
-              <a:rPr sz="1500" b="1">
-                <a:solidFill>
-                  <a:srgbClr val="0B7D6C"/>
-                </a:solidFill>
-                <a:latin typeface="Calibri"/>
-              </a:rPr>
-              <a:t>🌍 Multilingual</a:t>
-            </a:r>
-          </a:p>
-        </p:txBody>
-      </p:sp>
-      <p:sp>
-        <p:nvSpPr>
-          <p:cNvPr id="29" name="TextBox 28"/>
-          <p:cNvSpPr txBox="1"/>
-          <p:nvPr/>
-        </p:nvSpPr>
-        <p:spPr>
-          <a:xfrm>
-            <a:off x="9198864" y="4480560"/>
-            <a:ext cx="2377440" cy="1005840"/>
-          </a:xfrm>
-          <a:prstGeom prst="rect">
-            <a:avLst/>
-          </a:prstGeom>
-          <a:noFill/>
-        </p:spPr>
-        <p:txBody>
-          <a:bodyPr wrap="square" anchor="t">
-            <a:spAutoFit/>
-          </a:bodyPr>
-          <a:lstStyle/>
-          <a:p>
-            <a:pPr algn="l"/>
-            <a:r>
-              <a:rPr sz="1200" b="0">
-                <a:solidFill>
-                  <a:srgbClr val="1F2A2E"/>
-                </a:solidFill>
-                <a:latin typeface="Calibri"/>
-              </a:rPr>
-              <a:t>Stigma is worse vernacular — EN/HI/MR/GU.</a:t>
+              <a:rPr sz="1400" b="1">
+                <a:solidFill>
+                  <a:srgbClr val="FFFFFF"/>
+                </a:solidFill>
+                <a:latin typeface="Calibri"/>
+              </a:rPr>
+              <a:t>Encrypted Data Layer</a:t>
             </a:r>
           </a:p>
         </p:txBody>
@@ -10406,7 +10015,7 @@
                 </a:solidFill>
                 <a:latin typeface="Calibri"/>
               </a:rPr>
-              <a:t>Built for Bharat</a:t>
+              <a:t>Privacy &amp; Safety by Design</a:t>
             </a:r>
           </a:p>
         </p:txBody>
@@ -10441,146 +10050,27 @@
                 </a:solidFill>
                 <a:latin typeface="Calibri"/>
               </a:rPr>
-              <a:t>MULTILINGUAL + ACCESSIBLE</a:t>
-            </a:r>
-          </a:p>
-        </p:txBody>
-      </p:sp>
-      <p:sp>
-        <p:nvSpPr>
-          <p:cNvPr id="6" name="TextBox 5"/>
-          <p:cNvSpPr txBox="1"/>
-          <p:nvPr/>
-        </p:nvSpPr>
-        <p:spPr>
-          <a:xfrm>
-            <a:off x="548640" y="1828800"/>
-            <a:ext cx="5486400" cy="4206240"/>
-          </a:xfrm>
-          <a:prstGeom prst="rect">
-            <a:avLst/>
-          </a:prstGeom>
-          <a:noFill/>
-        </p:spPr>
-        <p:txBody>
-          <a:bodyPr wrap="square">
-            <a:spAutoFit/>
-          </a:bodyPr>
-          <a:lstStyle/>
-          <a:p>
-            <a:pPr>
-              <a:spcAft>
-                <a:spcPts val="1200"/>
-              </a:spcAft>
-            </a:pPr>
-            <a:r>
-              <a:rPr sz="1700">
-                <a:solidFill>
-                  <a:srgbClr val="1F2A2E"/>
-                </a:solidFill>
-                <a:latin typeface="Calibri"/>
-              </a:rPr>
-              <a:t>• Language switcher: English, Hindi, Marathi, Gujarati</a:t>
-            </a:r>
-          </a:p>
-          <a:p>
-            <a:pPr>
-              <a:spcAft>
-                <a:spcPts val="1200"/>
-              </a:spcAft>
-            </a:pPr>
-            <a:r>
-              <a:rPr sz="1700">
-                <a:solidFill>
-                  <a:srgbClr val="1F2A2E"/>
-                </a:solidFill>
-                <a:latin typeface="Calibri"/>
-              </a:rPr>
-              <a:t>• Resource library published in all four languages</a:t>
-            </a:r>
-          </a:p>
-          <a:p>
-            <a:pPr>
-              <a:spcAft>
-                <a:spcPts val="1200"/>
-              </a:spcAft>
-            </a:pPr>
-            <a:r>
-              <a:rPr sz="1700">
-                <a:solidFill>
-                  <a:srgbClr val="1F2A2E"/>
-                </a:solidFill>
-                <a:latin typeface="Calibri"/>
-              </a:rPr>
-              <a:t>• Crisis keywords detected across languages in triage</a:t>
-            </a:r>
-          </a:p>
-          <a:p>
-            <a:pPr>
-              <a:spcAft>
-                <a:spcPts val="1200"/>
-              </a:spcAft>
-            </a:pPr>
-            <a:r>
-              <a:rPr sz="1700">
-                <a:solidFill>
-                  <a:srgbClr val="1F2A2E"/>
-                </a:solidFill>
-                <a:latin typeface="Calibri"/>
-              </a:rPr>
-              <a:t>• Stigma is worse in vernacular, non-metro contexts</a:t>
-            </a:r>
-          </a:p>
-          <a:p>
-            <a:pPr>
-              <a:spcAft>
-                <a:spcPts val="1200"/>
-              </a:spcAft>
-            </a:pPr>
-            <a:r>
-              <a:rPr sz="1700">
-                <a:solidFill>
-                  <a:srgbClr val="1F2A2E"/>
-                </a:solidFill>
-                <a:latin typeface="Calibri"/>
-              </a:rPr>
-              <a:t>• High-contrast mode + keyboard focus + ARIA labels</a:t>
-            </a:r>
-          </a:p>
-          <a:p>
-            <a:pPr>
-              <a:spcAft>
-                <a:spcPts val="1200"/>
-              </a:spcAft>
-            </a:pPr>
-            <a:r>
-              <a:rPr sz="1700">
-                <a:solidFill>
-                  <a:srgbClr val="1F2A2E"/>
-                </a:solidFill>
-                <a:latin typeface="Calibri"/>
-              </a:rPr>
-              <a:t>• Dark mode for late-night, low-stimulation use</a:t>
-            </a:r>
-          </a:p>
-        </p:txBody>
-      </p:sp>
-      <p:sp>
-        <p:nvSpPr>
-          <p:cNvPr id="7" name="Rectangle 6"/>
+              <a:t>JUDGES ASK — WE SHOW</a:t>
+            </a:r>
+          </a:p>
+        </p:txBody>
+      </p:sp>
+      <p:sp>
+        <p:nvSpPr>
+          <p:cNvPr id="6" name="Rectangle 5"/>
           <p:cNvSpPr/>
           <p:nvPr/>
         </p:nvSpPr>
         <p:spPr>
           <a:xfrm>
-            <a:off x="6400800" y="1828800"/>
-            <a:ext cx="5212080" cy="3840480"/>
+            <a:off x="457200" y="1828800"/>
+            <a:ext cx="2670048" cy="1783080"/>
           </a:xfrm>
           <a:prstGeom prst="rect">
             <a:avLst/>
           </a:prstGeom>
           <a:solidFill>
-            <a:srgbClr val="0F9B86"/>
+            <a:srgbClr val="FDF8F1"/>
           </a:solidFill>
           <a:ln>
             <a:noFill/>
@@ -10611,14 +10101,14 @@
       </p:sp>
       <p:sp>
         <p:nvSpPr>
-          <p:cNvPr id="8" name="TextBox 7"/>
+          <p:cNvPr id="7" name="TextBox 6"/>
           <p:cNvSpPr txBox="1"/>
           <p:nvPr/>
         </p:nvSpPr>
         <p:spPr>
           <a:xfrm>
-            <a:off x="6675120" y="2103120"/>
-            <a:ext cx="4663440" cy="457200"/>
+            <a:off x="640080" y="1965960"/>
+            <a:ext cx="2377440" cy="457200"/>
           </a:xfrm>
           <a:prstGeom prst="rect">
             <a:avLst/>
@@ -10633,27 +10123,27 @@
           <a:p>
             <a:pPr algn="l"/>
             <a:r>
-              <a:rPr sz="1800" b="1">
-                <a:solidFill>
-                  <a:srgbClr val="FFFFFF"/>
-                </a:solidFill>
-                <a:latin typeface="Calibri"/>
-              </a:rPr>
-              <a:t>Languages</a:t>
-            </a:r>
-          </a:p>
-        </p:txBody>
-      </p:sp>
-      <p:sp>
-        <p:nvSpPr>
-          <p:cNvPr id="9" name="TextBox 8"/>
+              <a:rPr sz="1500" b="1">
+                <a:solidFill>
+                  <a:srgbClr val="0B7D6C"/>
+                </a:solidFill>
+                <a:latin typeface="Calibri"/>
+              </a:rPr>
+              <a:t>Anonymous ID</a:t>
+            </a:r>
+          </a:p>
+        </p:txBody>
+      </p:sp>
+      <p:sp>
+        <p:nvSpPr>
+          <p:cNvPr id="8" name="TextBox 7"/>
           <p:cNvSpPr txBox="1"/>
           <p:nvPr/>
         </p:nvSpPr>
         <p:spPr>
           <a:xfrm>
-            <a:off x="6675120" y="2743200"/>
-            <a:ext cx="4663440" cy="2743200"/>
+            <a:off x="640080" y="2468880"/>
+            <a:ext cx="2377440" cy="1005840"/>
           </a:xfrm>
           <a:prstGeom prst="rect">
             <a:avLst/>
@@ -10661,72 +10151,818 @@
           <a:noFill/>
         </p:spPr>
         <p:txBody>
-          <a:bodyPr wrap="square">
+          <a:bodyPr wrap="square" anchor="t">
             <a:spAutoFit/>
           </a:bodyPr>
           <a:lstStyle/>
           <a:p>
-            <a:pPr>
-              <a:spcAft>
-                <a:spcPts val="1200"/>
-              </a:spcAft>
-            </a:pPr>
-            <a:r>
-              <a:rPr sz="1700">
-                <a:solidFill>
-                  <a:srgbClr val="FFFFFF"/>
-                </a:solidFill>
-                <a:latin typeface="Calibri"/>
-              </a:rPr>
-              <a:t>• English  — EN</a:t>
-            </a:r>
-          </a:p>
-          <a:p>
-            <a:pPr>
-              <a:spcAft>
-                <a:spcPts val="1200"/>
-              </a:spcAft>
-            </a:pPr>
-            <a:r>
-              <a:rPr sz="1700">
-                <a:solidFill>
-                  <a:srgbClr val="FFFFFF"/>
-                </a:solidFill>
-                <a:latin typeface="Calibri"/>
-              </a:rPr>
-              <a:t>• Hindi  — हिन्दी  (HI)</a:t>
-            </a:r>
-          </a:p>
-          <a:p>
-            <a:pPr>
-              <a:spcAft>
-                <a:spcPts val="1200"/>
-              </a:spcAft>
-            </a:pPr>
-            <a:r>
-              <a:rPr sz="1700">
-                <a:solidFill>
-                  <a:srgbClr val="FFFFFF"/>
-                </a:solidFill>
-                <a:latin typeface="Calibri"/>
-              </a:rPr>
-              <a:t>• Marathi  — मराठी  (MR)</a:t>
-            </a:r>
-          </a:p>
-          <a:p>
-            <a:pPr>
-              <a:spcAft>
-                <a:spcPts val="1200"/>
-              </a:spcAft>
-            </a:pPr>
-            <a:r>
-              <a:rPr sz="1700">
-                <a:solidFill>
-                  <a:srgbClr val="FFFFFF"/>
-                </a:solidFill>
-                <a:latin typeface="Calibri"/>
-              </a:rPr>
-              <a:t>• Gujarati  — ગુજરાતી  (GU)</a:t>
+            <a:pPr algn="l"/>
+            <a:r>
+              <a:rPr sz="1200" b="0">
+                <a:solidFill>
+                  <a:srgbClr val="1F2A2E"/>
+                </a:solidFill>
+                <a:latin typeface="Calibri"/>
+              </a:rPr>
+              <a:t>No name/email/phone. Opaque anon_id only.</a:t>
+            </a:r>
+          </a:p>
+        </p:txBody>
+      </p:sp>
+      <p:sp>
+        <p:nvSpPr>
+          <p:cNvPr id="9" name="Rectangle 8"/>
+          <p:cNvSpPr/>
+          <p:nvPr/>
+        </p:nvSpPr>
+        <p:spPr>
+          <a:xfrm>
+            <a:off x="3310128" y="1828800"/>
+            <a:ext cx="2670048" cy="1783080"/>
+          </a:xfrm>
+          <a:prstGeom prst="rect">
+            <a:avLst/>
+          </a:prstGeom>
+          <a:solidFill>
+            <a:srgbClr val="FDF8F1"/>
+          </a:solidFill>
+          <a:ln>
+            <a:noFill/>
+          </a:ln>
+          <a:effectLst/>
+        </p:spPr>
+        <p:style>
+          <a:lnRef idx="1">
+            <a:schemeClr val="accent1"/>
+          </a:lnRef>
+          <a:fillRef idx="3">
+            <a:schemeClr val="accent1"/>
+          </a:fillRef>
+          <a:effectRef idx="2">
+            <a:schemeClr val="accent1"/>
+          </a:effectRef>
+          <a:fontRef idx="minor">
+            <a:schemeClr val="lt1"/>
+          </a:fontRef>
+        </p:style>
+        <p:txBody>
+          <a:bodyPr rtlCol="0" anchor="ctr"/>
+          <a:lstStyle/>
+          <a:p>
+            <a:pPr algn="ctr"/>
+          </a:p>
+        </p:txBody>
+      </p:sp>
+      <p:sp>
+        <p:nvSpPr>
+          <p:cNvPr id="10" name="TextBox 9"/>
+          <p:cNvSpPr txBox="1"/>
+          <p:nvPr/>
+        </p:nvSpPr>
+        <p:spPr>
+          <a:xfrm>
+            <a:off x="3493008" y="1965960"/>
+            <a:ext cx="2377440" cy="457200"/>
+          </a:xfrm>
+          <a:prstGeom prst="rect">
+            <a:avLst/>
+          </a:prstGeom>
+          <a:noFill/>
+        </p:spPr>
+        <p:txBody>
+          <a:bodyPr wrap="square" anchor="t">
+            <a:spAutoFit/>
+          </a:bodyPr>
+          <a:lstStyle/>
+          <a:p>
+            <a:pPr algn="l"/>
+            <a:r>
+              <a:rPr sz="1500" b="1">
+                <a:solidFill>
+                  <a:srgbClr val="0B7D6C"/>
+                </a:solidFill>
+                <a:latin typeface="Calibri"/>
+              </a:rPr>
+              <a:t>Blind booking</a:t>
+            </a:r>
+          </a:p>
+        </p:txBody>
+      </p:sp>
+      <p:sp>
+        <p:nvSpPr>
+          <p:cNvPr id="11" name="TextBox 10"/>
+          <p:cNvSpPr txBox="1"/>
+          <p:nvPr/>
+        </p:nvSpPr>
+        <p:spPr>
+          <a:xfrm>
+            <a:off x="3493008" y="2468880"/>
+            <a:ext cx="2377440" cy="1005840"/>
+          </a:xfrm>
+          <a:prstGeom prst="rect">
+            <a:avLst/>
+          </a:prstGeom>
+          <a:noFill/>
+        </p:spPr>
+        <p:txBody>
+          <a:bodyPr wrap="square" anchor="t">
+            <a:spAutoFit/>
+          </a:bodyPr>
+          <a:lstStyle/>
+          <a:p>
+            <a:pPr algn="l"/>
+            <a:r>
+              <a:rPr sz="1200" b="0">
+                <a:solidFill>
+                  <a:srgbClr val="1F2A2E"/>
+                </a:solidFill>
+                <a:latin typeface="Calibri"/>
+              </a:rPr>
+              <a:t>Admin sees ID + slot. No faculty/parent view.</a:t>
+            </a:r>
+          </a:p>
+        </p:txBody>
+      </p:sp>
+      <p:sp>
+        <p:nvSpPr>
+          <p:cNvPr id="12" name="Rectangle 11"/>
+          <p:cNvSpPr/>
+          <p:nvPr/>
+        </p:nvSpPr>
+        <p:spPr>
+          <a:xfrm>
+            <a:off x="6163056" y="1828800"/>
+            <a:ext cx="2670048" cy="1783080"/>
+          </a:xfrm>
+          <a:prstGeom prst="rect">
+            <a:avLst/>
+          </a:prstGeom>
+          <a:solidFill>
+            <a:srgbClr val="FDF8F1"/>
+          </a:solidFill>
+          <a:ln>
+            <a:noFill/>
+          </a:ln>
+          <a:effectLst/>
+        </p:spPr>
+        <p:style>
+          <a:lnRef idx="1">
+            <a:schemeClr val="accent1"/>
+          </a:lnRef>
+          <a:fillRef idx="3">
+            <a:schemeClr val="accent1"/>
+          </a:fillRef>
+          <a:effectRef idx="2">
+            <a:schemeClr val="accent1"/>
+          </a:effectRef>
+          <a:fontRef idx="minor">
+            <a:schemeClr val="lt1"/>
+          </a:fontRef>
+        </p:style>
+        <p:txBody>
+          <a:bodyPr rtlCol="0" anchor="ctr"/>
+          <a:lstStyle/>
+          <a:p>
+            <a:pPr algn="ctr"/>
+          </a:p>
+        </p:txBody>
+      </p:sp>
+      <p:sp>
+        <p:nvSpPr>
+          <p:cNvPr id="13" name="TextBox 12"/>
+          <p:cNvSpPr txBox="1"/>
+          <p:nvPr/>
+        </p:nvSpPr>
+        <p:spPr>
+          <a:xfrm>
+            <a:off x="6345936" y="1965960"/>
+            <a:ext cx="2377440" cy="457200"/>
+          </a:xfrm>
+          <a:prstGeom prst="rect">
+            <a:avLst/>
+          </a:prstGeom>
+          <a:noFill/>
+        </p:spPr>
+        <p:txBody>
+          <a:bodyPr wrap="square" anchor="t">
+            <a:spAutoFit/>
+          </a:bodyPr>
+          <a:lstStyle/>
+          <a:p>
+            <a:pPr algn="l"/>
+            <a:r>
+              <a:rPr sz="1500" b="1">
+                <a:solidFill>
+                  <a:srgbClr val="0B7D6C"/>
+                </a:solidFill>
+                <a:latin typeface="Calibri"/>
+              </a:rPr>
+              <a:t>Local-first demo</a:t>
+            </a:r>
+          </a:p>
+        </p:txBody>
+      </p:sp>
+      <p:sp>
+        <p:nvSpPr>
+          <p:cNvPr id="14" name="TextBox 13"/>
+          <p:cNvSpPr txBox="1"/>
+          <p:nvPr/>
+        </p:nvSpPr>
+        <p:spPr>
+          <a:xfrm>
+            <a:off x="6345936" y="2468880"/>
+            <a:ext cx="2377440" cy="1005840"/>
+          </a:xfrm>
+          <a:prstGeom prst="rect">
+            <a:avLst/>
+          </a:prstGeom>
+          <a:noFill/>
+        </p:spPr>
+        <p:txBody>
+          <a:bodyPr wrap="square" anchor="t">
+            <a:spAutoFit/>
+          </a:bodyPr>
+          <a:lstStyle/>
+          <a:p>
+            <a:pPr algn="l"/>
+            <a:r>
+              <a:rPr sz="1200" b="0">
+                <a:solidFill>
+                  <a:srgbClr val="1F2A2E"/>
+                </a:solidFill>
+                <a:latin typeface="Calibri"/>
+              </a:rPr>
+              <a:t>Check-in state stays on device.</a:t>
+            </a:r>
+          </a:p>
+        </p:txBody>
+      </p:sp>
+      <p:sp>
+        <p:nvSpPr>
+          <p:cNvPr id="15" name="Rectangle 14"/>
+          <p:cNvSpPr/>
+          <p:nvPr/>
+        </p:nvSpPr>
+        <p:spPr>
+          <a:xfrm>
+            <a:off x="9015984" y="1828800"/>
+            <a:ext cx="2670048" cy="1783080"/>
+          </a:xfrm>
+          <a:prstGeom prst="rect">
+            <a:avLst/>
+          </a:prstGeom>
+          <a:solidFill>
+            <a:srgbClr val="FDF8F1"/>
+          </a:solidFill>
+          <a:ln>
+            <a:noFill/>
+          </a:ln>
+          <a:effectLst/>
+        </p:spPr>
+        <p:style>
+          <a:lnRef idx="1">
+            <a:schemeClr val="accent1"/>
+          </a:lnRef>
+          <a:fillRef idx="3">
+            <a:schemeClr val="accent1"/>
+          </a:fillRef>
+          <a:effectRef idx="2">
+            <a:schemeClr val="accent1"/>
+          </a:effectRef>
+          <a:fontRef idx="minor">
+            <a:schemeClr val="lt1"/>
+          </a:fontRef>
+        </p:style>
+        <p:txBody>
+          <a:bodyPr rtlCol="0" anchor="ctr"/>
+          <a:lstStyle/>
+          <a:p>
+            <a:pPr algn="ctr"/>
+          </a:p>
+        </p:txBody>
+      </p:sp>
+      <p:sp>
+        <p:nvSpPr>
+          <p:cNvPr id="16" name="TextBox 15"/>
+          <p:cNvSpPr txBox="1"/>
+          <p:nvPr/>
+        </p:nvSpPr>
+        <p:spPr>
+          <a:xfrm>
+            <a:off x="9198864" y="1965960"/>
+            <a:ext cx="2377440" cy="457200"/>
+          </a:xfrm>
+          <a:prstGeom prst="rect">
+            <a:avLst/>
+          </a:prstGeom>
+          <a:noFill/>
+        </p:spPr>
+        <p:txBody>
+          <a:bodyPr wrap="square" anchor="t">
+            <a:spAutoFit/>
+          </a:bodyPr>
+          <a:lstStyle/>
+          <a:p>
+            <a:pPr algn="l"/>
+            <a:r>
+              <a:rPr sz="1500" b="1">
+                <a:solidFill>
+                  <a:srgbClr val="0B7D6C"/>
+                </a:solidFill>
+                <a:latin typeface="Calibri"/>
+              </a:rPr>
+              <a:t>Auto-purge</a:t>
+            </a:r>
+          </a:p>
+        </p:txBody>
+      </p:sp>
+      <p:sp>
+        <p:nvSpPr>
+          <p:cNvPr id="17" name="TextBox 16"/>
+          <p:cNvSpPr txBox="1"/>
+          <p:nvPr/>
+        </p:nvSpPr>
+        <p:spPr>
+          <a:xfrm>
+            <a:off x="9198864" y="2468880"/>
+            <a:ext cx="2377440" cy="1005840"/>
+          </a:xfrm>
+          <a:prstGeom prst="rect">
+            <a:avLst/>
+          </a:prstGeom>
+          <a:noFill/>
+        </p:spPr>
+        <p:txBody>
+          <a:bodyPr wrap="square" anchor="t">
+            <a:spAutoFit/>
+          </a:bodyPr>
+          <a:lstStyle/>
+          <a:p>
+            <a:pPr algn="l"/>
+            <a:r>
+              <a:rPr sz="1200" b="0">
+                <a:solidFill>
+                  <a:srgbClr val="1F2A2E"/>
+                </a:solidFill>
+                <a:latin typeface="Calibri"/>
+              </a:rPr>
+              <a:t>Hashed logs, short TTL in production.</a:t>
+            </a:r>
+          </a:p>
+        </p:txBody>
+      </p:sp>
+      <p:sp>
+        <p:nvSpPr>
+          <p:cNvPr id="18" name="Rectangle 17"/>
+          <p:cNvSpPr/>
+          <p:nvPr/>
+        </p:nvSpPr>
+        <p:spPr>
+          <a:xfrm>
+            <a:off x="457200" y="3840480"/>
+            <a:ext cx="2670048" cy="1783080"/>
+          </a:xfrm>
+          <a:prstGeom prst="rect">
+            <a:avLst/>
+          </a:prstGeom>
+          <a:solidFill>
+            <a:srgbClr val="FDF8F1"/>
+          </a:solidFill>
+          <a:ln>
+            <a:noFill/>
+          </a:ln>
+          <a:effectLst/>
+        </p:spPr>
+        <p:style>
+          <a:lnRef idx="1">
+            <a:schemeClr val="accent1"/>
+          </a:lnRef>
+          <a:fillRef idx="3">
+            <a:schemeClr val="accent1"/>
+          </a:fillRef>
+          <a:effectRef idx="2">
+            <a:schemeClr val="accent1"/>
+          </a:effectRef>
+          <a:fontRef idx="minor">
+            <a:schemeClr val="lt1"/>
+          </a:fontRef>
+        </p:style>
+        <p:txBody>
+          <a:bodyPr rtlCol="0" anchor="ctr"/>
+          <a:lstStyle/>
+          <a:p>
+            <a:pPr algn="ctr"/>
+          </a:p>
+        </p:txBody>
+      </p:sp>
+      <p:sp>
+        <p:nvSpPr>
+          <p:cNvPr id="19" name="TextBox 18"/>
+          <p:cNvSpPr txBox="1"/>
+          <p:nvPr/>
+        </p:nvSpPr>
+        <p:spPr>
+          <a:xfrm>
+            <a:off x="640080" y="3977640"/>
+            <a:ext cx="2377440" cy="457200"/>
+          </a:xfrm>
+          <a:prstGeom prst="rect">
+            <a:avLst/>
+          </a:prstGeom>
+          <a:noFill/>
+        </p:spPr>
+        <p:txBody>
+          <a:bodyPr wrap="square" anchor="t">
+            <a:spAutoFit/>
+          </a:bodyPr>
+          <a:lstStyle/>
+          <a:p>
+            <a:pPr algn="l"/>
+            <a:r>
+              <a:rPr sz="1500" b="1">
+                <a:solidFill>
+                  <a:srgbClr val="0B7D6C"/>
+                </a:solidFill>
+                <a:latin typeface="Calibri"/>
+              </a:rPr>
+              <a:t>Consent-gated</a:t>
+            </a:r>
+          </a:p>
+        </p:txBody>
+      </p:sp>
+      <p:sp>
+        <p:nvSpPr>
+          <p:cNvPr id="20" name="TextBox 19"/>
+          <p:cNvSpPr txBox="1"/>
+          <p:nvPr/>
+        </p:nvSpPr>
+        <p:spPr>
+          <a:xfrm>
+            <a:off x="640080" y="4480560"/>
+            <a:ext cx="2377440" cy="1005840"/>
+          </a:xfrm>
+          <a:prstGeom prst="rect">
+            <a:avLst/>
+          </a:prstGeom>
+          <a:noFill/>
+        </p:spPr>
+        <p:txBody>
+          <a:bodyPr wrap="square" anchor="t">
+            <a:spAutoFit/>
+          </a:bodyPr>
+          <a:lstStyle/>
+          <a:p>
+            <a:pPr algn="l"/>
+            <a:r>
+              <a:rPr sz="1200" b="0">
+                <a:solidFill>
+                  <a:srgbClr val="1F2A2E"/>
+                </a:solidFill>
+                <a:latin typeface="Calibri"/>
+              </a:rPr>
+              <a:t>Identities revealed only by you.</a:t>
+            </a:r>
+          </a:p>
+        </p:txBody>
+      </p:sp>
+      <p:sp>
+        <p:nvSpPr>
+          <p:cNvPr id="21" name="Rectangle 20"/>
+          <p:cNvSpPr/>
+          <p:nvPr/>
+        </p:nvSpPr>
+        <p:spPr>
+          <a:xfrm>
+            <a:off x="3310128" y="3840480"/>
+            <a:ext cx="2670048" cy="1783080"/>
+          </a:xfrm>
+          <a:prstGeom prst="rect">
+            <a:avLst/>
+          </a:prstGeom>
+          <a:solidFill>
+            <a:srgbClr val="FDF8F1"/>
+          </a:solidFill>
+          <a:ln>
+            <a:noFill/>
+          </a:ln>
+          <a:effectLst/>
+        </p:spPr>
+        <p:style>
+          <a:lnRef idx="1">
+            <a:schemeClr val="accent1"/>
+          </a:lnRef>
+          <a:fillRef idx="3">
+            <a:schemeClr val="accent1"/>
+          </a:fillRef>
+          <a:effectRef idx="2">
+            <a:schemeClr val="accent1"/>
+          </a:effectRef>
+          <a:fontRef idx="minor">
+            <a:schemeClr val="lt1"/>
+          </a:fontRef>
+        </p:style>
+        <p:txBody>
+          <a:bodyPr rtlCol="0" anchor="ctr"/>
+          <a:lstStyle/>
+          <a:p>
+            <a:pPr algn="ctr"/>
+          </a:p>
+        </p:txBody>
+      </p:sp>
+      <p:sp>
+        <p:nvSpPr>
+          <p:cNvPr id="22" name="TextBox 21"/>
+          <p:cNvSpPr txBox="1"/>
+          <p:nvPr/>
+        </p:nvSpPr>
+        <p:spPr>
+          <a:xfrm>
+            <a:off x="3493008" y="3977640"/>
+            <a:ext cx="2377440" cy="457200"/>
+          </a:xfrm>
+          <a:prstGeom prst="rect">
+            <a:avLst/>
+          </a:prstGeom>
+          <a:noFill/>
+        </p:spPr>
+        <p:txBody>
+          <a:bodyPr wrap="square" anchor="t">
+            <a:spAutoFit/>
+          </a:bodyPr>
+          <a:lstStyle/>
+          <a:p>
+            <a:pPr algn="l"/>
+            <a:r>
+              <a:rPr sz="1500" b="1">
+                <a:solidFill>
+                  <a:srgbClr val="0B7D6C"/>
+                </a:solidFill>
+                <a:latin typeface="Calibri"/>
+              </a:rPr>
+              <a:t>Encrypted</a:t>
+            </a:r>
+          </a:p>
+        </p:txBody>
+      </p:sp>
+      <p:sp>
+        <p:nvSpPr>
+          <p:cNvPr id="23" name="TextBox 22"/>
+          <p:cNvSpPr txBox="1"/>
+          <p:nvPr/>
+        </p:nvSpPr>
+        <p:spPr>
+          <a:xfrm>
+            <a:off x="3493008" y="4480560"/>
+            <a:ext cx="2377440" cy="1005840"/>
+          </a:xfrm>
+          <a:prstGeom prst="rect">
+            <a:avLst/>
+          </a:prstGeom>
+          <a:noFill/>
+        </p:spPr>
+        <p:txBody>
+          <a:bodyPr wrap="square" anchor="t">
+            <a:spAutoFit/>
+          </a:bodyPr>
+          <a:lstStyle/>
+          <a:p>
+            <a:pPr algn="l"/>
+            <a:r>
+              <a:rPr sz="1200" b="0">
+                <a:solidFill>
+                  <a:srgbClr val="1F2A2E"/>
+                </a:solidFill>
+                <a:latin typeface="Calibri"/>
+              </a:rPr>
+              <a:t>TLS + column-level encryption at rest.</a:t>
+            </a:r>
+          </a:p>
+        </p:txBody>
+      </p:sp>
+      <p:sp>
+        <p:nvSpPr>
+          <p:cNvPr id="24" name="Rectangle 23"/>
+          <p:cNvSpPr/>
+          <p:nvPr/>
+        </p:nvSpPr>
+        <p:spPr>
+          <a:xfrm>
+            <a:off x="6163056" y="3840480"/>
+            <a:ext cx="2670048" cy="1783080"/>
+          </a:xfrm>
+          <a:prstGeom prst="rect">
+            <a:avLst/>
+          </a:prstGeom>
+          <a:solidFill>
+            <a:srgbClr val="FDF8F1"/>
+          </a:solidFill>
+          <a:ln>
+            <a:noFill/>
+          </a:ln>
+          <a:effectLst/>
+        </p:spPr>
+        <p:style>
+          <a:lnRef idx="1">
+            <a:schemeClr val="accent1"/>
+          </a:lnRef>
+          <a:fillRef idx="3">
+            <a:schemeClr val="accent1"/>
+          </a:fillRef>
+          <a:effectRef idx="2">
+            <a:schemeClr val="accent1"/>
+          </a:effectRef>
+          <a:fontRef idx="minor">
+            <a:schemeClr val="lt1"/>
+          </a:fontRef>
+        </p:style>
+        <p:txBody>
+          <a:bodyPr rtlCol="0" anchor="ctr"/>
+          <a:lstStyle/>
+          <a:p>
+            <a:pPr algn="ctr"/>
+          </a:p>
+        </p:txBody>
+      </p:sp>
+      <p:sp>
+        <p:nvSpPr>
+          <p:cNvPr id="25" name="TextBox 24"/>
+          <p:cNvSpPr txBox="1"/>
+          <p:nvPr/>
+        </p:nvSpPr>
+        <p:spPr>
+          <a:xfrm>
+            <a:off x="6345936" y="3977640"/>
+            <a:ext cx="2377440" cy="457200"/>
+          </a:xfrm>
+          <a:prstGeom prst="rect">
+            <a:avLst/>
+          </a:prstGeom>
+          <a:noFill/>
+        </p:spPr>
+        <p:txBody>
+          <a:bodyPr wrap="square" anchor="t">
+            <a:spAutoFit/>
+          </a:bodyPr>
+          <a:lstStyle/>
+          <a:p>
+            <a:pPr algn="l"/>
+            <a:r>
+              <a:rPr sz="1500" b="1">
+                <a:solidFill>
+                  <a:srgbClr val="0B7D6C"/>
+                </a:solidFill>
+                <a:latin typeface="Calibri"/>
+              </a:rPr>
+              <a:t>🚨 SOS + Crisis</a:t>
+            </a:r>
+          </a:p>
+        </p:txBody>
+      </p:sp>
+      <p:sp>
+        <p:nvSpPr>
+          <p:cNvPr id="26" name="TextBox 25"/>
+          <p:cNvSpPr txBox="1"/>
+          <p:nvPr/>
+        </p:nvSpPr>
+        <p:spPr>
+          <a:xfrm>
+            <a:off x="6345936" y="4480560"/>
+            <a:ext cx="2377440" cy="1005840"/>
+          </a:xfrm>
+          <a:prstGeom prst="rect">
+            <a:avLst/>
+          </a:prstGeom>
+          <a:noFill/>
+        </p:spPr>
+        <p:txBody>
+          <a:bodyPr wrap="square" anchor="t">
+            <a:spAutoFit/>
+          </a:bodyPr>
+          <a:lstStyle/>
+          <a:p>
+            <a:pPr algn="l"/>
+            <a:r>
+              <a:rPr sz="1200" b="0">
+                <a:solidFill>
+                  <a:srgbClr val="1F2A2E"/>
+                </a:solidFill>
+                <a:latin typeface="Calibri"/>
+              </a:rPr>
+              <a:t>High-risk language auto-escalates, never routes around.</a:t>
+            </a:r>
+          </a:p>
+        </p:txBody>
+      </p:sp>
+      <p:sp>
+        <p:nvSpPr>
+          <p:cNvPr id="27" name="Rectangle 26"/>
+          <p:cNvSpPr/>
+          <p:nvPr/>
+        </p:nvSpPr>
+        <p:spPr>
+          <a:xfrm>
+            <a:off x="9015984" y="3840480"/>
+            <a:ext cx="2670048" cy="1783080"/>
+          </a:xfrm>
+          <a:prstGeom prst="rect">
+            <a:avLst/>
+          </a:prstGeom>
+          <a:solidFill>
+            <a:srgbClr val="FDF8F1"/>
+          </a:solidFill>
+          <a:ln>
+            <a:noFill/>
+          </a:ln>
+          <a:effectLst/>
+        </p:spPr>
+        <p:style>
+          <a:lnRef idx="1">
+            <a:schemeClr val="accent1"/>
+          </a:lnRef>
+          <a:fillRef idx="3">
+            <a:schemeClr val="accent1"/>
+          </a:fillRef>
+          <a:effectRef idx="2">
+            <a:schemeClr val="accent1"/>
+          </a:effectRef>
+          <a:fontRef idx="minor">
+            <a:schemeClr val="lt1"/>
+          </a:fontRef>
+        </p:style>
+        <p:txBody>
+          <a:bodyPr rtlCol="0" anchor="ctr"/>
+          <a:lstStyle/>
+          <a:p>
+            <a:pPr algn="ctr"/>
+          </a:p>
+        </p:txBody>
+      </p:sp>
+      <p:sp>
+        <p:nvSpPr>
+          <p:cNvPr id="28" name="TextBox 27"/>
+          <p:cNvSpPr txBox="1"/>
+          <p:nvPr/>
+        </p:nvSpPr>
+        <p:spPr>
+          <a:xfrm>
+            <a:off x="9198864" y="3977640"/>
+            <a:ext cx="2377440" cy="457200"/>
+          </a:xfrm>
+          <a:prstGeom prst="rect">
+            <a:avLst/>
+          </a:prstGeom>
+          <a:noFill/>
+        </p:spPr>
+        <p:txBody>
+          <a:bodyPr wrap="square" anchor="t">
+            <a:spAutoFit/>
+          </a:bodyPr>
+          <a:lstStyle/>
+          <a:p>
+            <a:pPr algn="l"/>
+            <a:r>
+              <a:rPr sz="1500" b="1">
+                <a:solidFill>
+                  <a:srgbClr val="0B7D6C"/>
+                </a:solidFill>
+                <a:latin typeface="Calibri"/>
+              </a:rPr>
+              <a:t>🌍 Multilingual</a:t>
+            </a:r>
+          </a:p>
+        </p:txBody>
+      </p:sp>
+      <p:sp>
+        <p:nvSpPr>
+          <p:cNvPr id="29" name="TextBox 28"/>
+          <p:cNvSpPr txBox="1"/>
+          <p:nvPr/>
+        </p:nvSpPr>
+        <p:spPr>
+          <a:xfrm>
+            <a:off x="9198864" y="4480560"/>
+            <a:ext cx="2377440" cy="1005840"/>
+          </a:xfrm>
+          <a:prstGeom prst="rect">
+            <a:avLst/>
+          </a:prstGeom>
+          <a:noFill/>
+        </p:spPr>
+        <p:txBody>
+          <a:bodyPr wrap="square" anchor="t">
+            <a:spAutoFit/>
+          </a:bodyPr>
+          <a:lstStyle/>
+          <a:p>
+            <a:pPr algn="l"/>
+            <a:r>
+              <a:rPr sz="1200" b="0">
+                <a:solidFill>
+                  <a:srgbClr val="1F2A2E"/>
+                </a:solidFill>
+                <a:latin typeface="Calibri"/>
+              </a:rPr>
+              <a:t>Stigma is worse vernacular — EN/HI/MR/GU.</a:t>
             </a:r>
           </a:p>
         </p:txBody>
